--- a/artifacts/deck/vjepa-direction-ring.pptx
+++ b/artifacts/deck/vjepa-direction-ring.pptx
@@ -959,19 +959,37 @@
           <a:lstStyle/>
           <a:p>
             <a:r>
-              <a:t>Removing the probe subspace drives direction from R-squared 0.99 to 0.01; removing random subspaces of the same size does nothing. That contrast is the finding.</a:t>
+              <a:t>Removing the probe subspace drives direction from R-squared 0.99 to 0.01; removing the same number of random directions does nothing. THAT contrast is the finding — all three variables are carried by a highly redundant population code.</a:t>
             </a:r>
           </a:p>
           <a:p/>
           <a:p>
             <a:r>
-              <a:t>SAY THIS CAREFULLY. All three variables are high-dimensional — the scalars are not a compact cliff. Speed still needs 69 dimensions to lose half its signal. The real result is a clean roughly-2x RATIO, not a cliff-versus-tail contrast. Overstating it is the first thing a reader of the curve would catch.</a:t>
+              <a:t>NOW THE CAREFUL PART, and volunteer it before anyone asks. Each INLP round removes one probe's readout subspace, and that subspace's rank is set by the TARGET, not by the representation: two dimensions for direction's sin-cos pair, one for a scalar. So direction spends dimensions twice as fast per round as pure bookkeeping.</a:t>
             </a:r>
           </a:p>
           <a:p/>
           <a:p>
             <a:r>
-              <a:t>Practical consequence, which Act 2 pays off: a single probe steers either scalar. A single probe barely moves direction at all.</a:t>
+              <a:t>Counted in ROUNDS — independent readouts extractable before the signal dies — the three are essentially equal: 71, 69, 67.</a:t>
+            </a:r>
+          </a:p>
+          <a:p/>
+          <a:p>
+            <a:r>
+              <a:t>The decisive control is the right panel. Give direction a ONE-dimensional target on the same activations: sin theta alone costs 76 dimensions, cos theta alone 54 — squarely in the scalars' range of 67 to 69. The 142 is just 71 rounds times two.</a:t>
+            </a:r>
+          </a:p>
+          <a:p/>
+          <a:p>
+            <a:r>
+              <a:t>So do NOT say direction is twice as redundant. Say: all three are equally redundant, and direction's readout is inherently two-dimensional, which is why controlling it costs twice the dimensions per readout. That framing sets up slide 5 exactly — a single probe cannot steer a two-dimensional readout.</a:t>
+            </a:r>
+          </a:p>
+          <a:p/>
+          <a:p>
+            <a:r>
+              <a:t>One real asymmetry does survive, at the tail rather than the midpoint: reaching 10 percent of the original R-squared takes 133 rounds for direction against 114 and 103 for the scalars. About 1.2 times, not 2. Direction's signal persists a little longer into the low-signal regime.</a:t>
             </a:r>
           </a:p>
         </p:txBody>
@@ -8953,13 +8971,13 @@
           <a:p>
             <a:pPr algn="l"/>
             <a:r>
-              <a:rPr sz="3100" b="1" i="0">
+              <a:rPr sz="3100" b="1">
                 <a:solidFill>
                   <a:srgbClr val="17191C"/>
                 </a:solidFill>
                 <a:latin typeface="Futura"/>
               </a:rPr>
-              <a:t>Direction costs twice the dimensions</a:t>
+              <a:t>Everything is redundant — direction just reads wider</a:t>
             </a:r>
           </a:p>
         </p:txBody>
@@ -8992,7 +9010,7 @@
               </a:lnSpc>
             </a:pPr>
             <a:r>
-              <a:rPr sz="1200" b="0" i="0">
+              <a:rPr sz="1200" b="0">
                 <a:solidFill>
                   <a:srgbClr val="71757B"/>
                 </a:solidFill>
@@ -9003,30 +9021,6 @@
           </a:p>
         </p:txBody>
       </p:sp>
-      <p:pic>
-        <p:nvPicPr>
-          <p:cNvPr id="7" name="Picture 6" descr="nullspace_combined.png"/>
-          <p:cNvPicPr>
-            <a:picLocks noChangeAspect="1"/>
-          </p:cNvPicPr>
-          <p:nvPr/>
-        </p:nvPicPr>
-        <p:blipFill>
-          <a:blip r:embed="rId2"/>
-          <a:stretch>
-            <a:fillRect/>
-          </a:stretch>
-        </p:blipFill>
-        <p:spPr>
-          <a:xfrm>
-            <a:off x="2952152" y="2633472"/>
-            <a:ext cx="6287389" cy="2697480"/>
-          </a:xfrm>
-          <a:prstGeom prst="rect">
-            <a:avLst/>
-          </a:prstGeom>
-        </p:spPr>
-      </p:pic>
       <p:cxnSp>
         <p:nvCxnSpPr>
           <p:cNvPr id="8" name="Connector 7"/>
@@ -9086,13 +9080,13 @@
           <a:p>
             <a:pPr algn="l"/>
             <a:r>
-              <a:rPr sz="800" b="0" i="0" spc="120">
+              <a:rPr sz="800" b="0" spc="120">
                 <a:solidFill>
                   <a:srgbClr val="71757B"/>
                 </a:solidFill>
                 <a:latin typeface="Menlo"/>
               </a:rPr>
-              <a:t>DIRECTION</a:t>
+              <a:t>PROBE-DIRECTED REMOVAL</a:t>
             </a:r>
           </a:p>
         </p:txBody>
@@ -9121,13 +9115,13 @@
           <a:p>
             <a:pPr algn="l"/>
             <a:r>
-              <a:rPr sz="1500" b="1" i="0">
+              <a:rPr sz="1500" b="1">
                 <a:solidFill>
                   <a:srgbClr val="B03A2E"/>
                 </a:solidFill>
                 <a:latin typeface="Menlo"/>
               </a:rPr>
-              <a:t>142 dims</a:t>
+              <a:t>0.99 → 0.01</a:t>
             </a:r>
           </a:p>
         </p:txBody>
@@ -9156,13 +9150,13 @@
           <a:p>
             <a:pPr algn="l"/>
             <a:r>
-              <a:rPr sz="900" b="0" i="0">
+              <a:rPr sz="900" b="0">
                 <a:solidFill>
                   <a:srgbClr val="71757B"/>
                 </a:solidFill>
                 <a:latin typeface="Avenir Next"/>
               </a:rPr>
-              <a:t>to lose half the signal</a:t>
+              <a:t>the signal is destroyed</a:t>
             </a:r>
           </a:p>
         </p:txBody>
@@ -9226,13 +9220,13 @@
           <a:p>
             <a:pPr algn="l"/>
             <a:r>
-              <a:rPr sz="800" b="0" i="0" spc="120">
+              <a:rPr sz="800" b="0" spc="120">
                 <a:solidFill>
                   <a:srgbClr val="71757B"/>
                 </a:solidFill>
                 <a:latin typeface="Menlo"/>
               </a:rPr>
-              <a:t>SPEED</a:t>
+              <a:t>RANDOM REMOVAL, SAME N</a:t>
             </a:r>
           </a:p>
         </p:txBody>
@@ -9261,13 +9255,13 @@
           <a:p>
             <a:pPr algn="l"/>
             <a:r>
-              <a:rPr sz="1500" b="1" i="0">
+              <a:rPr sz="1500" b="1">
                 <a:solidFill>
                   <a:srgbClr val="0B4F6C"/>
                 </a:solidFill>
                 <a:latin typeface="Menlo"/>
               </a:rPr>
-              <a:t>69 dims</a:t>
+              <a:t>0.99 → 0.99</a:t>
             </a:r>
           </a:p>
         </p:txBody>
@@ -9296,13 +9290,13 @@
           <a:p>
             <a:pPr algn="l"/>
             <a:r>
-              <a:rPr sz="900" b="0" i="0">
+              <a:rPr sz="900" b="0">
                 <a:solidFill>
                   <a:srgbClr val="71757B"/>
                 </a:solidFill>
                 <a:latin typeface="Avenir Next"/>
               </a:rPr>
-              <a:t>to lose half</a:t>
+              <a:t>flat — the control</a:t>
             </a:r>
           </a:p>
         </p:txBody>
@@ -9366,13 +9360,13 @@
           <a:p>
             <a:pPr algn="l"/>
             <a:r>
-              <a:rPr sz="800" b="0" i="0" spc="120">
+              <a:rPr sz="800" b="0" spc="120">
                 <a:solidFill>
                   <a:srgbClr val="71757B"/>
                 </a:solidFill>
                 <a:latin typeface="Menlo"/>
               </a:rPr>
-              <a:t>ACCELERATION</a:t>
+              <a:t>INDEPENDENT READOUTS</a:t>
             </a:r>
           </a:p>
         </p:txBody>
@@ -9401,13 +9395,13 @@
           <a:p>
             <a:pPr algn="l"/>
             <a:r>
-              <a:rPr sz="1500" b="1" i="0">
+              <a:rPr sz="1500" b="1">
                 <a:solidFill>
                   <a:srgbClr val="1E7A4E"/>
                 </a:solidFill>
                 <a:latin typeface="Menlo"/>
               </a:rPr>
-              <a:t>67 dims</a:t>
+              <a:t>71 / 69 / 67</a:t>
             </a:r>
           </a:p>
         </p:txBody>
@@ -9436,13 +9430,13 @@
           <a:p>
             <a:pPr algn="l"/>
             <a:r>
-              <a:rPr sz="900" b="0" i="0">
+              <a:rPr sz="900" b="0">
                 <a:solidFill>
                   <a:srgbClr val="71757B"/>
                 </a:solidFill>
                 <a:latin typeface="Avenir Next"/>
               </a:rPr>
-              <a:t>to lose half</a:t>
+              <a:t>dir / speed / accel — equal</a:t>
             </a:r>
           </a:p>
         </p:txBody>
@@ -9506,13 +9500,13 @@
           <a:p>
             <a:pPr algn="l"/>
             <a:r>
-              <a:rPr sz="800" b="0" i="0" spc="120">
+              <a:rPr sz="800" b="0" spc="120">
                 <a:solidFill>
                   <a:srgbClr val="71757B"/>
                 </a:solidFill>
                 <a:latin typeface="Menlo"/>
               </a:rPr>
-              <a:t>RANDOM CONTROL</a:t>
+              <a:t>DIMENSIONS TO HALVE</a:t>
             </a:r>
           </a:p>
         </p:txBody>
@@ -9541,13 +9535,13 @@
           <a:p>
             <a:pPr algn="l"/>
             <a:r>
-              <a:rPr sz="1500" b="1" i="0">
-                <a:solidFill>
-                  <a:srgbClr val="17191C"/>
+              <a:rPr sz="1500" b="1">
+                <a:solidFill>
+                  <a:srgbClr val="71757B"/>
                 </a:solidFill>
                 <a:latin typeface="Menlo"/>
               </a:rPr>
-              <a:t>flat</a:t>
+              <a:t>142 / 69 / 67</a:t>
             </a:r>
           </a:p>
         </p:txBody>
@@ -9576,13 +9570,13 @@
           <a:p>
             <a:pPr algn="l"/>
             <a:r>
-              <a:rPr sz="900" b="0" i="0">
+              <a:rPr sz="900" b="0">
                 <a:solidFill>
                   <a:srgbClr val="71757B"/>
                 </a:solidFill>
                 <a:latin typeface="Avenir Next"/>
               </a:rPr>
-              <a:t>0.99 → 0.99 throughout</a:t>
+              <a:t>2× is readout rank, not redundancy</a:t>
             </a:r>
           </a:p>
         </p:txBody>
@@ -9657,6 +9651,30 @@
           </a:p>
         </p:txBody>
       </p:sp>
+      <p:pic>
+        <p:nvPicPr>
+          <p:cNvPr id="26" name="Picture 25" descr="nullspace_combined.png"/>
+          <p:cNvPicPr>
+            <a:picLocks noChangeAspect="1"/>
+          </p:cNvPicPr>
+          <p:nvPr/>
+        </p:nvPicPr>
+        <p:blipFill>
+          <a:blip r:embed="rId4"/>
+          <a:stretch>
+            <a:fillRect/>
+          </a:stretch>
+        </p:blipFill>
+        <p:spPr>
+          <a:xfrm>
+            <a:off x="2952152" y="2877007"/>
+            <a:ext cx="6287389" cy="2210410"/>
+          </a:xfrm>
+          <a:prstGeom prst="rect">
+            <a:avLst/>
+          </a:prstGeom>
+        </p:spPr>
+      </p:pic>
     </p:spTree>
   </p:cSld>
   <p:clrMapOvr>

--- a/artifacts/deck/vjepa-direction-ring.pptx
+++ b/artifacts/deck/vjepa-direction-ring.pptx
@@ -1141,19 +1141,37 @@
           <a:lstStyle/>
           <a:p>
             <a:r>
-              <a:t>First the control result: a single probe closes 28% of the gap for direction but 74% for either scalar. Direction needs K of at least 2 and is solved by K around 4 — the causal echo of slide 3.</a:t>
+              <a:t>This is the paper's steering experiment, and the evaluation protocol is the part worth spelling out.</a:t>
             </a:r>
           </a:p>
           <a:p/>
           <a:p>
             <a:r>
-              <a:t>Then the cost. To build a subspace big enough to steer the ring, you capture other kinematics with it. By dimension 16 EVERY cell in the matrix leaks. Dimension 4 to 8 is the usable operating point.</a:t>
+              <a:t>THREE INDEPENDENT HELD-OUT AXES. The evaluation probe is never one of the K that built the steering subspace, and it is fitted on clips disjoint from all of them. The clips being steered carry target values never seen during fitting. Without the probe split, 'steering worked' would only mean the intervention satisfied the very equations it solved.</a:t>
             </a:r>
           </a:p>
           <a:p/>
           <a:p>
             <a:r>
-              <a:t>TWO CELLS ARE BLANK, and that is a finding about the data. Speed and acceleration are mutually exclusive in every supplied dataset — no clip has both non-zero. So the coupling v = v0 + a t that would make speed-acceleration leakage interesting has been designed out of the stimulus set. Worth saying out loud rather than leaving a reader to wonder.</a:t>
+              <a:t>LEFT PANEL, the result. A single probe closes 28 percent of the floor-to-ceiling gap for direction but 74 percent for either scalar. Direction needs K of at least two and is essentially solved by K around four. That is the causal counterpart of slide 3: a 2-dimensional readout cannot be driven along a single direction.</a:t>
+            </a:r>
+          </a:p>
+          <a:p/>
+          <a:p>
+            <a:r>
+              <a:t>MIDDLE AND RIGHT, the cost. To build a subspace big enough to steer the ring you capture other kinematics with it. By dimension 16 every cell in the matrix leaks. Dimension 4 to 8 is the usable operating point.</a:t>
+            </a:r>
+          </a:p>
+          <a:p/>
+          <a:p>
+            <a:r>
+              <a:t>TWO CELLS ARE BLANK, and that is a finding about the data. Speed and acceleration are mutually exclusive in every supplied dataset — no clip has both non-zero — so the coupling v = v0 + a t that would make that leakage interesting has been designed out of the stimulus set.</a:t>
+            </a:r>
+          </a:p>
+          <a:p/>
+          <a:p>
+            <a:r>
+              <a:t>If asked what the intervention actually solves: minimise the L2 norm of delta-x subject to the probes reading the target. That is the Moore-Penrose minimum-norm edit, verified against a direct pseudo-inverse to three times ten to the minus fourteen. Smallest EUCLIDEAN step — which is exactly the setup for Act 2.</a:t>
             </a:r>
           </a:p>
         </p:txBody>
@@ -10673,13 +10691,13 @@
           <a:p>
             <a:pPr algn="l"/>
             <a:r>
-              <a:rPr sz="3100" b="1" i="0">
+              <a:rPr sz="3100" b="1">
                 <a:solidFill>
                   <a:srgbClr val="17191C"/>
                 </a:solidFill>
                 <a:latin typeface="Futura"/>
               </a:rPr>
-              <a:t>Control and specificity trade off</a:t>
+              <a:t>Steering direction needs a coordinated subspace</a:t>
             </a:r>
           </a:p>
         </p:txBody>
@@ -10712,41 +10730,17 @@
               </a:lnSpc>
             </a:pPr>
             <a:r>
-              <a:rPr sz="1200" b="0" i="0">
+              <a:rPr sz="1200" b="0">
                 <a:solidFill>
                   <a:srgbClr val="71757B"/>
                 </a:solidFill>
                 <a:latin typeface="Avenir Next"/>
               </a:rPr>
-              <a:t>Multi-probe subspace steering: stack K probe readouts, solve for the coordinates that make them all read the target. Each cell is drift in another variable, against that probe's own error on unmodified clips.</a:t>
-            </a:r>
-          </a:p>
-        </p:txBody>
-      </p:sp>
-      <p:pic>
-        <p:nvPicPr>
-          <p:cNvPr id="7" name="Picture 6" descr="leakage_matrix.png"/>
-          <p:cNvPicPr>
-            <a:picLocks noChangeAspect="1"/>
-          </p:cNvPicPr>
-          <p:nvPr/>
-        </p:nvPicPr>
-        <p:blipFill>
-          <a:blip r:embed="rId2"/>
-          <a:stretch>
-            <a:fillRect/>
-          </a:stretch>
-        </p:blipFill>
-        <p:spPr>
-          <a:xfrm>
-            <a:off x="2878277" y="2633472"/>
-            <a:ext cx="6435139" cy="2697480"/>
-          </a:xfrm>
-          <a:prstGeom prst="rect">
-            <a:avLst/>
-          </a:prstGeom>
-        </p:spPr>
-      </p:pic>
+              <a:t>Stack K probe readouts, solve for the coordinates that make them all read the target. Evaluated with a HELD-OUT probe — never one of the K that built the basis — on held-out label values.</a:t>
+            </a:r>
+          </a:p>
+        </p:txBody>
+      </p:sp>
       <p:cxnSp>
         <p:nvCxnSpPr>
           <p:cNvPr id="8" name="Connector 7"/>
@@ -10806,7 +10800,7 @@
           <a:p>
             <a:pPr algn="l"/>
             <a:r>
-              <a:rPr sz="800" b="0" i="0" spc="120">
+              <a:rPr sz="800" b="0" spc="120">
                 <a:solidFill>
                   <a:srgbClr val="71757B"/>
                 </a:solidFill>
@@ -10841,7 +10835,7 @@
           <a:p>
             <a:pPr algn="l"/>
             <a:r>
-              <a:rPr sz="1500" b="1" i="0">
+              <a:rPr sz="1500" b="1">
                 <a:solidFill>
                   <a:srgbClr val="B03A2E"/>
                 </a:solidFill>
@@ -10876,7 +10870,7 @@
           <a:p>
             <a:pPr algn="l"/>
             <a:r>
-              <a:rPr sz="900" b="0" i="0">
+              <a:rPr sz="900" b="0">
                 <a:solidFill>
                   <a:srgbClr val="71757B"/>
                 </a:solidFill>
@@ -10946,7 +10940,7 @@
           <a:p>
             <a:pPr algn="l"/>
             <a:r>
-              <a:rPr sz="800" b="0" i="0" spc="120">
+              <a:rPr sz="800" b="0" spc="120">
                 <a:solidFill>
                   <a:srgbClr val="71757B"/>
                 </a:solidFill>
@@ -10981,7 +10975,7 @@
           <a:p>
             <a:pPr algn="l"/>
             <a:r>
-              <a:rPr sz="1500" b="1" i="0">
+              <a:rPr sz="1500" b="1">
                 <a:solidFill>
                   <a:srgbClr val="1E7A4E"/>
                 </a:solidFill>
@@ -11016,13 +11010,13 @@
           <a:p>
             <a:pPr algn="l"/>
             <a:r>
-              <a:rPr sz="900" b="0" i="0">
+              <a:rPr sz="900" b="0">
                 <a:solidFill>
                   <a:srgbClr val="71757B"/>
                 </a:solidFill>
                 <a:latin typeface="Avenir Next"/>
               </a:rPr>
-              <a:t>needs a coordinated subspace</a:t>
+              <a:t>a coordinated subspace works</a:t>
             </a:r>
           </a:p>
         </p:txBody>
@@ -11086,13 +11080,13 @@
           <a:p>
             <a:pPr algn="l"/>
             <a:r>
-              <a:rPr sz="800" b="0" i="0" spc="120">
+              <a:rPr sz="800" b="0" spc="120">
                 <a:solidFill>
                   <a:srgbClr val="71757B"/>
                 </a:solidFill>
                 <a:latin typeface="Menlo"/>
               </a:rPr>
-              <a:t>LEAKAGE AT DIM 4</a:t>
+              <a:t>EITHER SCALAR, K = 1</a:t>
             </a:r>
           </a:p>
         </p:txBody>
@@ -11121,13 +11115,13 @@
           <a:p>
             <a:pPr algn="l"/>
             <a:r>
-              <a:rPr sz="1500" b="1" i="0">
-                <a:solidFill>
-                  <a:srgbClr val="1E7A4E"/>
+              <a:rPr sz="1500" b="1">
+                <a:solidFill>
+                  <a:srgbClr val="0B4F6C"/>
                 </a:solidFill>
                 <a:latin typeface="Menlo"/>
               </a:rPr>
-              <a:t>0.28×</a:t>
+              <a:t>74%</a:t>
             </a:r>
           </a:p>
         </p:txBody>
@@ -11156,13 +11150,13 @@
           <a:p>
             <a:pPr algn="l"/>
             <a:r>
-              <a:rPr sz="900" b="0" i="0">
+              <a:rPr sz="900" b="0">
                 <a:solidFill>
                   <a:srgbClr val="71757B"/>
                 </a:solidFill>
                 <a:latin typeface="Avenir Next"/>
               </a:rPr>
-              <a:t>below the probe's own noise</a:t>
+              <a:t>one probe is enough</a:t>
             </a:r>
           </a:p>
         </p:txBody>
@@ -11226,7 +11220,7 @@
           <a:p>
             <a:pPr algn="l"/>
             <a:r>
-              <a:rPr sz="800" b="0" i="0" spc="120">
+              <a:rPr sz="800" b="0" spc="120">
                 <a:solidFill>
                   <a:srgbClr val="71757B"/>
                 </a:solidFill>
@@ -11261,7 +11255,7 @@
           <a:p>
             <a:pPr algn="l"/>
             <a:r>
-              <a:rPr sz="1500" b="1" i="0">
+              <a:rPr sz="1500" b="1">
                 <a:solidFill>
                   <a:srgbClr val="B03A2E"/>
                 </a:solidFill>
@@ -11296,7 +11290,7 @@
           <a:p>
             <a:pPr algn="l"/>
             <a:r>
-              <a:rPr sz="900" b="0" i="0">
+              <a:rPr sz="900" b="0">
                 <a:solidFill>
                   <a:srgbClr val="71757B"/>
                 </a:solidFill>
@@ -11377,6 +11371,30 @@
           </a:p>
         </p:txBody>
       </p:sp>
+      <p:pic>
+        <p:nvPicPr>
+          <p:cNvPr id="26" name="Picture 25" descr="steering_combined.png"/>
+          <p:cNvPicPr>
+            <a:picLocks noChangeAspect="1"/>
+          </p:cNvPicPr>
+          <p:nvPr/>
+        </p:nvPicPr>
+        <p:blipFill>
+          <a:blip r:embed="rId4"/>
+          <a:stretch>
+            <a:fillRect/>
+          </a:stretch>
+        </p:blipFill>
+        <p:spPr>
+          <a:xfrm>
+            <a:off x="2878277" y="3042013"/>
+            <a:ext cx="6435139" cy="1880397"/>
+          </a:xfrm>
+          <a:prstGeom prst="rect">
+            <a:avLst/>
+          </a:prstGeom>
+        </p:spPr>
+      </p:pic>
     </p:spTree>
   </p:cSld>
   <p:clrMapOvr>

--- a/artifacts/deck/vjepa-direction-ring.pptx
+++ b/artifacts/deck/vjepa-direction-ring.pptx
@@ -1141,37 +1141,49 @@
           <a:lstStyle/>
           <a:p>
             <a:r>
-              <a:t>This is the paper's steering experiment, and the evaluation protocol is the part worth spelling out.</a:t>
+              <a:t>The paper's steering experiment. Three results to hit, and the evaluation protocol matters.</a:t>
             </a:r>
           </a:p>
           <a:p/>
           <a:p>
             <a:r>
-              <a:t>THREE INDEPENDENT HELD-OUT AXES. The evaluation probe is never one of the K that built the steering subspace, and it is fitted on clips disjoint from all of them. The clips being steered carry target values never seen during fitting. Without the probe split, 'steering worked' would only mean the intervention satisfied the very equations it solved.</a:t>
+              <a:t>PROTOCOL FIRST. Three independent held-out axes: the evaluation probe is never one of the K that built the subspace and is fitted on disjoint clips; the steered clips carry target values never seen in fitting. Without the probe split, 'steering worked' would only mean the intervention satisfied the equations it solved.</a:t>
             </a:r>
           </a:p>
           <a:p/>
           <a:p>
             <a:r>
-              <a:t>LEFT PANEL, the result. A single probe closes 28 percent of the floor-to-ceiling gap for direction but 74 percent for either scalar. Direction needs K of at least two and is essentially solved by K around four. That is the causal counterpart of slide 3: a 2-dimensional readout cannot be driven along a single direction.</a:t>
+              <a:t>LEFT PANEL — the strongest evidence, and it reproduces the paper closely. As K grows, error to the TARGET angle falls from the 84-degree unsteered floor to 4.8 degrees, while error to each clip's OWN angle rises from 4.6 to 83.2. The two curves cross. That is the signature of a genuine ROTATION of the representation rather than noise that happens to fool the probe — and readout certainty stays around 0.93 throughout, where noise injection would collapse it. The paper reports 6 degrees rising to about 71; we get 4.6 to 83.</a:t>
             </a:r>
           </a:p>
           <a:p/>
           <a:p>
             <a:r>
-              <a:t>MIDDLE AND RIGHT, the cost. To build a subspace big enough to steer the ring you capture other kinematics with it. By dimension 16 every cell in the matrix leaks. Dimension 4 to 8 is the usable operating point.</a:t>
+              <a:t>MIDDLE — a single probe closes 28 percent of the gap for direction but 74 percent for either scalar. Direction needs K of at least two and is solved by K around four.</a:t>
             </a:r>
           </a:p>
           <a:p/>
           <a:p>
             <a:r>
-              <a:t>TWO CELLS ARE BLANK, and that is a finding about the data. Speed and acceleration are mutually exclusive in every supplied dataset — no clip has both non-zero — so the coupling v = v0 + a t that would make that leakage interesting has been designed out of the stimulus set.</a:t>
+              <a:t>CAVEAT, worth volunteering. The paper reports single-probe steering leaves the error above 80 degrees — essentially unchanged. Ours moves it to 61. The ORDERING reproduces emphatically; the MAGNITUDE of the failure does not. Most likely the same dataset-simplicity effect that puts direction at layer 1.</a:t>
             </a:r>
           </a:p>
           <a:p/>
           <a:p>
             <a:r>
-              <a:t>If asked what the intervention actually solves: minimise the L2 norm of delta-x subject to the probes reading the target. That is the Moore-Penrose minimum-norm edit, verified against a direct pseudo-inverse to three times ten to the minus fourteen. Smallest EUCLIDEAN step — which is exactly the setup for Act 2.</a:t>
+              <a:t>RIGHT — the cost. A bigger subspace steers better and leaks more. By dimension 16 every cross-variable cell exceeds the watching probe's own noise.</a:t>
+            </a:r>
+          </a:p>
+          <a:p/>
+          <a:p>
+            <a:r>
+              <a:t>ON THE PAPER'S TAKEAWAY. They frame direction as uniquely high-dimensional, unlike LLM concepts steerable along one vector. Our data supports the steering half — direction needs K of at least two while a scalar works at K equals one. It does NOT support 'uniquely high-dimensional': after the slide-3 correction, speed and acceleration need 69 and 67 independent readouts against direction's 71. All three are high-dimensional population codes. What makes direction special is that its readout is two-dimensional and CYCLIC — which is exactly what Act 2 is about.</a:t>
+            </a:r>
+          </a:p>
+          <a:p/>
+          <a:p>
+            <a:r>
+              <a:t>If asked what the intervention solves: minimise the L2 norm of delta-x subject to the probes reading the target — the Moore-Penrose minimum-norm edit, verified to three times ten to the minus fourteen. The smallest EUCLIDEAN step.</a:t>
             </a:r>
           </a:p>
         </p:txBody>
@@ -10697,7 +10709,7 @@
                 </a:solidFill>
                 <a:latin typeface="Futura"/>
               </a:rPr>
-              <a:t>Steering direction needs a coordinated subspace</a:t>
+              <a:t>Steering rotates the code — but needs a subspace</a:t>
             </a:r>
           </a:p>
         </p:txBody>
@@ -10806,7 +10818,7 @@
                 </a:solidFill>
                 <a:latin typeface="Menlo"/>
               </a:rPr>
-              <a:t>DIRECTION, K = 1</a:t>
+              <a:t>ERROR TO TARGET</a:t>
             </a:r>
           </a:p>
         </p:txBody>
@@ -10837,11 +10849,11 @@
             <a:r>
               <a:rPr sz="1500" b="1">
                 <a:solidFill>
-                  <a:srgbClr val="B03A2E"/>
+                  <a:srgbClr val="1E7A4E"/>
                 </a:solidFill>
                 <a:latin typeface="Menlo"/>
               </a:rPr>
-              <a:t>28%</a:t>
+              <a:t>84° → 4.8°</a:t>
             </a:r>
           </a:p>
         </p:txBody>
@@ -10876,7 +10888,7 @@
                 </a:solidFill>
                 <a:latin typeface="Avenir Next"/>
               </a:rPr>
-              <a:t>of the gap closed — barely works</a:t>
+              <a:t>K = 32, held-out probe</a:t>
             </a:r>
           </a:p>
         </p:txBody>
@@ -10946,7 +10958,7 @@
                 </a:solidFill>
                 <a:latin typeface="Menlo"/>
               </a:rPr>
-              <a:t>DIRECTION, K = 4</a:t>
+              <a:t>ERROR TO OWN LABEL</a:t>
             </a:r>
           </a:p>
         </p:txBody>
@@ -10977,11 +10989,11 @@
             <a:r>
               <a:rPr sz="1500" b="1">
                 <a:solidFill>
-                  <a:srgbClr val="1E7A4E"/>
+                  <a:srgbClr val="0B4F6C"/>
                 </a:solidFill>
                 <a:latin typeface="Menlo"/>
               </a:rPr>
-              <a:t>97%</a:t>
+              <a:t>4.6° → 83.2°</a:t>
             </a:r>
           </a:p>
         </p:txBody>
@@ -11016,7 +11028,7 @@
                 </a:solidFill>
                 <a:latin typeface="Avenir Next"/>
               </a:rPr>
-              <a:t>a coordinated subspace works</a:t>
+              <a:t>rotated, not degraded</a:t>
             </a:r>
           </a:p>
         </p:txBody>
@@ -11086,7 +11098,7 @@
                 </a:solidFill>
                 <a:latin typeface="Menlo"/>
               </a:rPr>
-              <a:t>EITHER SCALAR, K = 1</a:t>
+              <a:t>DIRECTION, K = 1</a:t>
             </a:r>
           </a:p>
         </p:txBody>
@@ -11117,11 +11129,11 @@
             <a:r>
               <a:rPr sz="1500" b="1">
                 <a:solidFill>
-                  <a:srgbClr val="0B4F6C"/>
+                  <a:srgbClr val="B03A2E"/>
                 </a:solidFill>
                 <a:latin typeface="Menlo"/>
               </a:rPr>
-              <a:t>74%</a:t>
+              <a:t>28%</a:t>
             </a:r>
           </a:p>
         </p:txBody>
@@ -11156,7 +11168,7 @@
                 </a:solidFill>
                 <a:latin typeface="Avenir Next"/>
               </a:rPr>
-              <a:t>one probe is enough</a:t>
+              <a:t>one probe barely works</a:t>
             </a:r>
           </a:p>
         </p:txBody>
@@ -11226,7 +11238,7 @@
                 </a:solidFill>
                 <a:latin typeface="Menlo"/>
               </a:rPr>
-              <a:t>LEAKAGE AT DIM 16</a:t>
+              <a:t>EITHER SCALAR, K = 1</a:t>
             </a:r>
           </a:p>
         </p:txBody>
@@ -11257,11 +11269,11 @@
             <a:r>
               <a:rPr sz="1500" b="1">
                 <a:solidFill>
-                  <a:srgbClr val="B03A2E"/>
+                  <a:srgbClr val="0B4F6C"/>
                 </a:solidFill>
                 <a:latin typeface="Menlo"/>
               </a:rPr>
-              <a:t>every cell</a:t>
+              <a:t>74%</a:t>
             </a:r>
           </a:p>
         </p:txBody>
@@ -11296,7 +11308,7 @@
                 </a:solidFill>
                 <a:latin typeface="Avenir Next"/>
               </a:rPr>
-              <a:t>specificity is gone</a:t>
+              <a:t>one probe is enough</a:t>
             </a:r>
           </a:p>
         </p:txBody>
@@ -11380,15 +11392,15 @@
           <p:nvPr/>
         </p:nvPicPr>
         <p:blipFill>
-          <a:blip r:embed="rId4"/>
+          <a:blip r:embed="rId5"/>
           <a:stretch>
             <a:fillRect/>
           </a:stretch>
         </p:blipFill>
         <p:spPr>
           <a:xfrm>
-            <a:off x="2878277" y="3042013"/>
-            <a:ext cx="6435139" cy="1880397"/>
+            <a:off x="2953512" y="3063062"/>
+            <a:ext cx="6291072" cy="1838300"/>
           </a:xfrm>
           <a:prstGeom prst="rect">
             <a:avLst/>

--- a/artifacts/deck/vjepa-direction-ring.pptx
+++ b/artifacts/deck/vjepa-direction-ring.pptx
@@ -4,21 +4,24 @@
   <p:sldMasterIdLst>
     <p:sldMasterId id="2147483648" r:id="rId1"/>
   </p:sldMasterIdLst>
+  <p:notesMasterIdLst>
+    <p:notesMasterId r:id="rId14"/>
+  </p:notesMasterIdLst>
   <p:sldIdLst>
-    <p:sldId id="256" r:id="rId7"/>
-    <p:sldId id="257" r:id="rId9"/>
-    <p:sldId id="258" r:id="rId10"/>
-    <p:sldId id="259" r:id="rId11"/>
-    <p:sldId id="260" r:id="rId12"/>
-    <p:sldId id="261" r:id="rId13"/>
-    <p:sldId id="262" r:id="rId14"/>
-    <p:sldId id="263" r:id="rId15"/>
-    <p:sldId id="264" r:id="rId16"/>
-    <p:sldId id="265" r:id="rId17"/>
-    <p:sldId id="266" r:id="rId18"/>
-    <p:sldId id="267" r:id="rId19"/>
+    <p:sldId id="256" r:id="rId2"/>
+    <p:sldId id="257" r:id="rId3"/>
+    <p:sldId id="258" r:id="rId4"/>
+    <p:sldId id="259" r:id="rId5"/>
+    <p:sldId id="260" r:id="rId6"/>
+    <p:sldId id="261" r:id="rId7"/>
+    <p:sldId id="262" r:id="rId8"/>
+    <p:sldId id="263" r:id="rId9"/>
+    <p:sldId id="264" r:id="rId10"/>
+    <p:sldId id="265" r:id="rId11"/>
+    <p:sldId id="266" r:id="rId12"/>
+    <p:sldId id="267" r:id="rId13"/>
   </p:sldIdLst>
-  <p:sldSz cx="12191695" cy="6858000" type="screen4x3"/>
+  <p:sldSz cx="12192000" cy="6858000"/>
   <p:notesSz cx="6858000" cy="9144000"/>
   <p:defaultTextStyle>
     <a:defPPr>
@@ -115,11 +118,27 @@
       </a:defRPr>
     </a:lvl9pPr>
   </p:defaultTextStyle>
+  <p:extLst>
+    <p:ext uri="{EFAFB233-063F-42B5-8137-9DF3F51BA10A}">
+      <p15:sldGuideLst xmlns:p15="http://schemas.microsoft.com/office/powerpoint/2012/main">
+        <p15:guide id="1" orient="horz" pos="2160">
+          <p15:clr>
+            <a:srgbClr val="A4A3A4"/>
+          </p15:clr>
+        </p15:guide>
+        <p15:guide id="2" pos="2880">
+          <p15:clr>
+            <a:srgbClr val="A4A3A4"/>
+          </p15:clr>
+        </p15:guide>
+      </p15:sldGuideLst>
+    </p:ext>
+  </p:extLst>
 </p:presentation>
 </file>
 
 <file path=ppt/notesMasters/notesMaster1.xml><?xml version="1.0" encoding="utf-8"?>
-<p:notesMaster xmlns:a="http://schemas.openxmlformats.org/drawingml/2006/main" xmlns:p="http://schemas.openxmlformats.org/presentationml/2006/main" xmlns:r="http://schemas.openxmlformats.org/officeDocument/2006/relationships">
+<p:notesMaster xmlns:a="http://schemas.openxmlformats.org/drawingml/2006/main" xmlns:r="http://schemas.openxmlformats.org/officeDocument/2006/relationships" xmlns:p="http://schemas.openxmlformats.org/presentationml/2006/main">
   <p:cSld>
     <p:bg>
       <p:bgRef idx="1001">
@@ -140,241 +159,16 @@
           <a:chExt cx="0" cy="0"/>
         </a:xfrm>
       </p:grpSpPr>
-      <p:sp>
-        <p:nvSpPr>
-          <p:cNvPr id="2" name="Header Placeholder 1"/>
-          <p:cNvSpPr>
-            <a:spLocks noGrp="1"/>
-          </p:cNvSpPr>
-          <p:nvPr>
-            <p:ph type="hdr" sz="quarter"/>
-          </p:nvPr>
-        </p:nvSpPr>
-        <p:spPr>
-          <a:xfrm>
-            <a:off x="0" y="0"/>
-            <a:ext cx="2971800" cy="457200"/>
-          </a:xfrm>
-          <a:prstGeom prst="rect">
-            <a:avLst/>
-          </a:prstGeom>
-        </p:spPr>
-        <p:txBody>
-          <a:bodyPr vert="horz" lIns="91440" tIns="45720" rIns="91440" bIns="45720" rtlCol="0"/>
-          <a:lstStyle>
-            <a:lvl1pPr algn="l">
-              <a:defRPr sz="1200"/>
-            </a:lvl1pPr>
-          </a:lstStyle>
-          <a:p>
-            <a:endParaRPr lang="en-US"/>
-          </a:p>
-        </p:txBody>
-      </p:sp>
-      <p:sp>
-        <p:nvSpPr>
-          <p:cNvPr id="3" name="Date Placeholder 2"/>
-          <p:cNvSpPr>
-            <a:spLocks noGrp="1"/>
-          </p:cNvSpPr>
-          <p:nvPr>
-            <p:ph type="dt" idx="1"/>
-          </p:nvPr>
-        </p:nvSpPr>
-        <p:spPr>
-          <a:xfrm>
-            <a:off x="3884613" y="0"/>
-            <a:ext cx="2971800" cy="457200"/>
-          </a:xfrm>
-          <a:prstGeom prst="rect">
-            <a:avLst/>
-          </a:prstGeom>
-        </p:spPr>
-        <p:txBody>
-          <a:bodyPr vert="horz" lIns="91440" tIns="45720" rIns="91440" bIns="45720" rtlCol="0"/>
-          <a:lstStyle>
-            <a:lvl1pPr algn="r">
-              <a:defRPr sz="1200"/>
-            </a:lvl1pPr>
-          </a:lstStyle>
-          <a:p>
-            <a:fld id="{0F89C1C7-3DCD-1040-A9CF-14679D8B5DDD}" type="datetimeFigureOut">
-              <a:rPr lang="en-US" smtClean="0"/>
-              <a:t>10/17/16</a:t>
-            </a:fld>
-            <a:endParaRPr lang="en-US"/>
-          </a:p>
-        </p:txBody>
-      </p:sp>
-      <p:sp>
-        <p:nvSpPr>
-          <p:cNvPr id="4" name="Slide Image Placeholder 3"/>
-          <p:cNvSpPr>
-            <a:spLocks noGrp="1" noRot="1" noChangeAspect="1"/>
-          </p:cNvSpPr>
-          <p:nvPr>
-            <p:ph type="sldImg" idx="2"/>
-          </p:nvPr>
-        </p:nvSpPr>
-        <p:spPr>
-          <a:xfrm>
-            <a:off x="1143000" y="685800"/>
-            <a:ext cx="4572000" cy="3429000"/>
-          </a:xfrm>
-          <a:prstGeom prst="rect">
-            <a:avLst/>
-          </a:prstGeom>
-          <a:noFill/>
-          <a:ln w="12700">
-            <a:solidFill>
-              <a:prstClr val="black"/>
-            </a:solidFill>
-          </a:ln>
-        </p:spPr>
-        <p:txBody>
-          <a:bodyPr vert="horz" lIns="91440" tIns="45720" rIns="91440" bIns="45720" rtlCol="0" anchor="ctr"/>
-          <a:lstStyle/>
-          <a:p>
-            <a:endParaRPr lang="en-US"/>
-          </a:p>
-        </p:txBody>
-      </p:sp>
-      <p:sp>
-        <p:nvSpPr>
-          <p:cNvPr id="5" name="Notes Placeholder 4"/>
-          <p:cNvSpPr>
-            <a:spLocks noGrp="1"/>
-          </p:cNvSpPr>
-          <p:nvPr>
-            <p:ph type="body" sz="quarter" idx="3"/>
-          </p:nvPr>
-        </p:nvSpPr>
-        <p:spPr>
-          <a:xfrm>
-            <a:off x="685800" y="4343400"/>
-            <a:ext cx="5486400" cy="4114800"/>
-          </a:xfrm>
-          <a:prstGeom prst="rect">
-            <a:avLst/>
-          </a:prstGeom>
-        </p:spPr>
-        <p:txBody>
-          <a:bodyPr vert="horz" lIns="91440" tIns="45720" rIns="91440" bIns="45720" rtlCol="0"/>
-          <a:lstStyle/>
-          <a:p>
-            <a:pPr lvl="0"/>
-            <a:r>
-              <a:rPr lang="en-US" smtClean="0"/>
-              <a:t>Click to edit Master text styles</a:t>
-            </a:r>
-          </a:p>
-          <a:p>
-            <a:pPr lvl="1"/>
-            <a:r>
-              <a:rPr lang="en-US" smtClean="0"/>
-              <a:t>Second level</a:t>
-            </a:r>
-          </a:p>
-          <a:p>
-            <a:pPr lvl="2"/>
-            <a:r>
-              <a:rPr lang="en-US" smtClean="0"/>
-              <a:t>Third level</a:t>
-            </a:r>
-          </a:p>
-          <a:p>
-            <a:pPr lvl="3"/>
-            <a:r>
-              <a:rPr lang="en-US" smtClean="0"/>
-              <a:t>Fourth level</a:t>
-            </a:r>
-          </a:p>
-          <a:p>
-            <a:pPr lvl="4"/>
-            <a:r>
-              <a:rPr lang="en-US" smtClean="0"/>
-              <a:t>Fifth level</a:t>
-            </a:r>
-            <a:endParaRPr lang="en-US"/>
-          </a:p>
-        </p:txBody>
-      </p:sp>
-      <p:sp>
-        <p:nvSpPr>
-          <p:cNvPr id="6" name="Footer Placeholder 5"/>
-          <p:cNvSpPr>
-            <a:spLocks noGrp="1"/>
-          </p:cNvSpPr>
-          <p:nvPr>
-            <p:ph type="ftr" sz="quarter" idx="4"/>
-          </p:nvPr>
-        </p:nvSpPr>
-        <p:spPr>
-          <a:xfrm>
-            <a:off x="0" y="8685213"/>
-            <a:ext cx="2971800" cy="457200"/>
-          </a:xfrm>
-          <a:prstGeom prst="rect">
-            <a:avLst/>
-          </a:prstGeom>
-        </p:spPr>
-        <p:txBody>
-          <a:bodyPr vert="horz" lIns="91440" tIns="45720" rIns="91440" bIns="45720" rtlCol="0" anchor="b"/>
-          <a:lstStyle>
-            <a:lvl1pPr algn="l">
-              <a:defRPr sz="1200"/>
-            </a:lvl1pPr>
-          </a:lstStyle>
-          <a:p>
-            <a:endParaRPr lang="en-US"/>
-          </a:p>
-        </p:txBody>
-      </p:sp>
-      <p:sp>
-        <p:nvSpPr>
-          <p:cNvPr id="7" name="Slide Number Placeholder 6"/>
-          <p:cNvSpPr>
-            <a:spLocks noGrp="1"/>
-          </p:cNvSpPr>
-          <p:nvPr>
-            <p:ph type="sldNum" sz="quarter" idx="5"/>
-          </p:nvPr>
-        </p:nvSpPr>
-        <p:spPr>
-          <a:xfrm>
-            <a:off x="3884613" y="8685213"/>
-            <a:ext cx="2971800" cy="457200"/>
-          </a:xfrm>
-          <a:prstGeom prst="rect">
-            <a:avLst/>
-          </a:prstGeom>
-        </p:spPr>
-        <p:txBody>
-          <a:bodyPr vert="horz" lIns="91440" tIns="45720" rIns="91440" bIns="45720" rtlCol="0" anchor="b"/>
-          <a:lstStyle>
-            <a:lvl1pPr algn="r">
-              <a:defRPr sz="1200"/>
-            </a:lvl1pPr>
-          </a:lstStyle>
-          <a:p>
-            <a:fld id="{BB5E49A5-4136-284D-997B-48E1D791AD67}" type="slidenum">
-              <a:rPr lang="en-US" smtClean="0"/>
-              <a:t>‹#›</a:t>
-            </a:fld>
-            <a:endParaRPr lang="en-US"/>
-          </a:p>
-        </p:txBody>
-      </p:sp>
     </p:spTree>
     <p:extLst>
       <p:ext uri="{BB962C8B-B14F-4D97-AF65-F5344CB8AC3E}">
-        <p14:creationId xmlns:p14="http://schemas.microsoft.com/office/powerpoint/2010/main" val="2623252185"/>
+        <p14:creationId xmlns:p14="http://schemas.microsoft.com/office/powerpoint/2010/main" val="1276660771"/>
       </p:ext>
     </p:extLst>
   </p:cSld>
   <p:clrMap bg1="lt1" tx1="dk1" bg2="lt2" tx2="dk2" accent1="accent1" accent2="accent2" accent3="accent3" accent4="accent4" accent5="accent5" accent6="accent6" hlink="hlink" folHlink="folHlink"/>
   <p:notesStyle>
-    <a:lvl1pPr marL="0" algn="l" defTabSz="457200" rtl="0" eaLnBrk="1" latinLnBrk="0" hangingPunct="1">
+    <a:lvl1pPr marL="0" algn="l" defTabSz="914400" rtl="0" eaLnBrk="1" latinLnBrk="0" hangingPunct="1">
       <a:defRPr sz="1200" kern="1200">
         <a:solidFill>
           <a:schemeClr val="tx1"/>
@@ -384,7 +178,7 @@
         <a:cs typeface="+mn-cs"/>
       </a:defRPr>
     </a:lvl1pPr>
-    <a:lvl2pPr marL="457200" algn="l" defTabSz="457200" rtl="0" eaLnBrk="1" latinLnBrk="0" hangingPunct="1">
+    <a:lvl2pPr marL="457200" algn="l" defTabSz="914400" rtl="0" eaLnBrk="1" latinLnBrk="0" hangingPunct="1">
       <a:defRPr sz="1200" kern="1200">
         <a:solidFill>
           <a:schemeClr val="tx1"/>
@@ -394,7 +188,7 @@
         <a:cs typeface="+mn-cs"/>
       </a:defRPr>
     </a:lvl2pPr>
-    <a:lvl3pPr marL="914400" algn="l" defTabSz="457200" rtl="0" eaLnBrk="1" latinLnBrk="0" hangingPunct="1">
+    <a:lvl3pPr marL="914400" algn="l" defTabSz="914400" rtl="0" eaLnBrk="1" latinLnBrk="0" hangingPunct="1">
       <a:defRPr sz="1200" kern="1200">
         <a:solidFill>
           <a:schemeClr val="tx1"/>
@@ -404,7 +198,7 @@
         <a:cs typeface="+mn-cs"/>
       </a:defRPr>
     </a:lvl3pPr>
-    <a:lvl4pPr marL="1371600" algn="l" defTabSz="457200" rtl="0" eaLnBrk="1" latinLnBrk="0" hangingPunct="1">
+    <a:lvl4pPr marL="1371600" algn="l" defTabSz="914400" rtl="0" eaLnBrk="1" latinLnBrk="0" hangingPunct="1">
       <a:defRPr sz="1200" kern="1200">
         <a:solidFill>
           <a:schemeClr val="tx1"/>
@@ -414,7 +208,7 @@
         <a:cs typeface="+mn-cs"/>
       </a:defRPr>
     </a:lvl4pPr>
-    <a:lvl5pPr marL="1828800" algn="l" defTabSz="457200" rtl="0" eaLnBrk="1" latinLnBrk="0" hangingPunct="1">
+    <a:lvl5pPr marL="1828800" algn="l" defTabSz="914400" rtl="0" eaLnBrk="1" latinLnBrk="0" hangingPunct="1">
       <a:defRPr sz="1200" kern="1200">
         <a:solidFill>
           <a:schemeClr val="tx1"/>
@@ -424,7 +218,7 @@
         <a:cs typeface="+mn-cs"/>
       </a:defRPr>
     </a:lvl5pPr>
-    <a:lvl6pPr marL="2286000" algn="l" defTabSz="457200" rtl="0" eaLnBrk="1" latinLnBrk="0" hangingPunct="1">
+    <a:lvl6pPr marL="2286000" algn="l" defTabSz="914400" rtl="0" eaLnBrk="1" latinLnBrk="0" hangingPunct="1">
       <a:defRPr sz="1200" kern="1200">
         <a:solidFill>
           <a:schemeClr val="tx1"/>
@@ -434,7 +228,7 @@
         <a:cs typeface="+mn-cs"/>
       </a:defRPr>
     </a:lvl6pPr>
-    <a:lvl7pPr marL="2743200" algn="l" defTabSz="457200" rtl="0" eaLnBrk="1" latinLnBrk="0" hangingPunct="1">
+    <a:lvl7pPr marL="2743200" algn="l" defTabSz="914400" rtl="0" eaLnBrk="1" latinLnBrk="0" hangingPunct="1">
       <a:defRPr sz="1200" kern="1200">
         <a:solidFill>
           <a:schemeClr val="tx1"/>
@@ -444,7 +238,7 @@
         <a:cs typeface="+mn-cs"/>
       </a:defRPr>
     </a:lvl7pPr>
-    <a:lvl8pPr marL="3200400" algn="l" defTabSz="457200" rtl="0" eaLnBrk="1" latinLnBrk="0" hangingPunct="1">
+    <a:lvl8pPr marL="3200400" algn="l" defTabSz="914400" rtl="0" eaLnBrk="1" latinLnBrk="0" hangingPunct="1">
       <a:defRPr sz="1200" kern="1200">
         <a:solidFill>
           <a:schemeClr val="tx1"/>
@@ -454,7 +248,7 @@
         <a:cs typeface="+mn-cs"/>
       </a:defRPr>
     </a:lvl8pPr>
-    <a:lvl9pPr marL="3657600" algn="l" defTabSz="457200" rtl="0" eaLnBrk="1" latinLnBrk="0" hangingPunct="1">
+    <a:lvl9pPr marL="3657600" algn="l" defTabSz="914400" rtl="0" eaLnBrk="1" latinLnBrk="0" hangingPunct="1">
       <a:defRPr sz="1200" kern="1200">
         <a:solidFill>
           <a:schemeClr val="tx1"/>
@@ -469,7 +263,7 @@
 </file>
 
 <file path=ppt/notesSlides/notesSlide1.xml><?xml version="1.0" encoding="utf-8"?>
-<p:notes xmlns:a="http://schemas.openxmlformats.org/drawingml/2006/main" xmlns:p="http://schemas.openxmlformats.org/presentationml/2006/main" xmlns:r="http://schemas.openxmlformats.org/officeDocument/2006/relationships">
+<p:notes xmlns:a="http://schemas.openxmlformats.org/drawingml/2006/main" xmlns:r="http://schemas.openxmlformats.org/officeDocument/2006/relationships" xmlns:p="http://schemas.openxmlformats.org/presentationml/2006/main">
   <p:cSld>
     <p:spTree>
       <p:nvGrpSpPr>
@@ -489,7 +283,7 @@
         <p:nvSpPr>
           <p:cNvPr id="2" name="Slide Image Placeholder 1"/>
           <p:cNvSpPr>
-            <a:spLocks noGrp="1"/>
+            <a:spLocks noGrp="1" noRot="1" noChangeAspect="1"/>
           </p:cNvSpPr>
           <p:nvPr>
             <p:ph type="sldImg" idx="2"/>
@@ -504,7 +298,7 @@
             <a:spLocks noGrp="1"/>
           </p:cNvSpPr>
           <p:nvPr>
-            <p:ph type="body" idx="3" sz="quarter"/>
+            <p:ph type="body" sz="quarter" idx="3"/>
           </p:nvPr>
         </p:nvSpPr>
         <p:spPr/>
@@ -516,7 +310,9 @@
               <a:t>Two sentences to set the hook. We already know video world models learn physics. The open question is how they ORGANISE it — because that decides whether we can control them.</a:t>
             </a:r>
           </a:p>
-          <a:p/>
+          <a:p>
+            <a:endParaRPr/>
+          </a:p>
           <a:p>
             <a:r>
               <a:t>The punchline of the next fifteen minutes: speed and acceleration behave like the scalars they are. Direction is a closed ring with a real second harmonic. Steer it in a straight line and the model represents a physical paradox — and its attention mechanism throws the edit away within four blocks.</a:t>
@@ -531,7 +327,7 @@
             <a:spLocks noGrp="1"/>
           </p:cNvSpPr>
           <p:nvPr>
-            <p:ph type="sldNum" idx="5" sz="quarter"/>
+            <p:ph type="sldNum" sz="quarter" idx="5"/>
           </p:nvPr>
         </p:nvSpPr>
         <p:spPr/>
@@ -545,7 +341,7 @@
 </file>
 
 <file path=ppt/notesSlides/notesSlide10.xml><?xml version="1.0" encoding="utf-8"?>
-<p:notes xmlns:a="http://schemas.openxmlformats.org/drawingml/2006/main" xmlns:p="http://schemas.openxmlformats.org/presentationml/2006/main" xmlns:r="http://schemas.openxmlformats.org/officeDocument/2006/relationships">
+<p:notes xmlns:a="http://schemas.openxmlformats.org/drawingml/2006/main" xmlns:r="http://schemas.openxmlformats.org/officeDocument/2006/relationships" xmlns:p="http://schemas.openxmlformats.org/presentationml/2006/main">
   <p:cSld>
     <p:spTree>
       <p:nvGrpSpPr>
@@ -565,7 +361,7 @@
         <p:nvSpPr>
           <p:cNvPr id="2" name="Slide Image Placeholder 1"/>
           <p:cNvSpPr>
-            <a:spLocks noGrp="1"/>
+            <a:spLocks noGrp="1" noRot="1" noChangeAspect="1"/>
           </p:cNvSpPr>
           <p:nvPr>
             <p:ph type="sldImg" idx="2"/>
@@ -580,7 +376,7 @@
             <a:spLocks noGrp="1"/>
           </p:cNvSpPr>
           <p:nvPr>
-            <p:ph type="body" idx="3" sz="quarter"/>
+            <p:ph type="body" sz="quarter" idx="3"/>
           </p:nvPr>
         </p:nvSpPr>
         <p:spPr/>
@@ -589,36 +385,68 @@
           <a:lstStyle/>
           <a:p>
             <a:r>
-              <a:t>This is the direct parallel to LLM interpretability, and it is worth saying where it comes from. Anthropic's Scaling Monosemanticity work — Templeton and colleagues, 2024 — steers Claude 3 Sonnet by CLAMPING a sparse-autoencoder feature's activation during the forward pass, typically to something like ten times its maximum observed value. Golden Gate Claude is that technique.</a:t>
-            </a:r>
-          </a:p>
-          <a:p/>
-          <a:p>
-            <a:r>
+              <a:rPr dirty="0"/>
+              <a:t>This is the direct parallel to LLM interpretability, and it is worth saying where it comes from. </a:t>
+            </a:r>
+            <a:r>
+              <a:rPr dirty="0" err="1"/>
+              <a:t>Anthropic's</a:t>
+            </a:r>
+            <a:r>
+              <a:rPr dirty="0"/>
+              <a:t> Scaling </a:t>
+            </a:r>
+            <a:r>
+              <a:rPr dirty="0" err="1"/>
+              <a:t>Monosemanticity</a:t>
+            </a:r>
+            <a:r>
+              <a:rPr dirty="0"/>
+              <a:t> work — Templeton and colleagues, 2024 — steers Claude 3 Sonnet by CLAMPING a sparse-autoencoder feature's activation during the forward pass, typically to something like ten times its maximum observed value. Golden Gate Claude is that technique.</a:t>
+            </a:r>
+          </a:p>
+          <a:p>
+            <a:endParaRPr dirty="0"/>
+          </a:p>
+          <a:p>
+            <a:r>
+              <a:rPr dirty="0"/>
               <a:t>BE PRECISE ABOUT THE ADAPTATION. They clamp at one layer across token positions through a generation. A video encoder has no generation to run along, so the natural analogue of 'keep asserting it as computation proceeds' is across BLOCKS. Same idea, different axis of repetition. It is an adaptation, not a replication.</a:t>
             </a:r>
           </a:p>
-          <a:p/>
-          <a:p>
-            <a:r>
+          <a:p>
+            <a:endParaRPr dirty="0"/>
+          </a:p>
+          <a:p>
+            <a:r>
+              <a:rPr dirty="0"/>
               <a:t>THE RESULT: IT WORKS. At four blocks downstream, clamping more than doubles the retained effect over a one-shot edit — 0.79 against 0.36. Continuous feature clamping transfers from language models to a video world model without modification.</a:t>
             </a:r>
           </a:p>
-          <a:p/>
-          <a:p>
-            <a:r>
-              <a:t>TWO CAVEATS worth having ready. First, re-injecting the same delta four times is NOT clamping — it accumulates, drives alignment to 1.30, past the norm of any natural representation, at four times the perturbation cost. True clamping applies the minimum-norm correction each block and is self-limiting. Second, the comparison has to match subspace size: clamping with a single probe reaches only 0.54, so a K=1 clamp against a K=16 one-shot edit would have made clamping look worse than it is.</a:t>
-            </a:r>
-          </a:p>
-          <a:p/>
-          <a:p>
-            <a:r>
+          <a:p>
+            <a:endParaRPr dirty="0"/>
+          </a:p>
+          <a:p>
+            <a:r>
+              <a:rPr dirty="0"/>
+              <a:t>TWO CAVEATS First, re-injecting the same delta four times is NOT clamping — it accumulates, drives alignment to 1.30, past the norm of any natural representation, at four times the perturbation cost. True clamping applies the minimum-norm correction each block and is self-limiting. Second, the comparison has to match subspace size: clamping with a single probe reaches only 0.54, so a K=1 clamp against a K=16 one-shot edit would have made clamping look worse than it is.</a:t>
+            </a:r>
+          </a:p>
+          <a:p>
+            <a:endParaRPr dirty="0"/>
+          </a:p>
+          <a:p>
+            <a:r>
+              <a:rPr dirty="0"/>
               <a:t>AND THE PUNCHLINE. Clamping costs four interventions and a total perturbation of 20.2 to reach 0.79. The single on-manifold spline edit costs 22.1 — essentially the same — and reaches 0.88, and by eight blocks it leads two to one. So: you can fight the attention mechanism at every layer, or you can make one edit it does not want to undo.</a:t>
             </a:r>
           </a:p>
-          <a:p/>
-          <a:p>
-            <a:r>
+          <a:p>
+            <a:endParaRPr dirty="0"/>
+          </a:p>
+          <a:p>
+            <a:r>
+              <a:rPr dirty="0"/>
               <a:t>One thing that cuts against intuition: the spline is the LARGER one-shot perturbation, 22.1 against 8.5. It is not about moving less. It is about moving along a direction the network maintains.</a:t>
             </a:r>
           </a:p>
@@ -631,7 +459,7 @@
             <a:spLocks noGrp="1"/>
           </p:cNvSpPr>
           <p:nvPr>
-            <p:ph type="sldNum" idx="5" sz="quarter"/>
+            <p:ph type="sldNum" sz="quarter" idx="5"/>
           </p:nvPr>
         </p:nvSpPr>
         <p:spPr/>
@@ -645,7 +473,7 @@
 </file>
 
 <file path=ppt/notesSlides/notesSlide11.xml><?xml version="1.0" encoding="utf-8"?>
-<p:notes xmlns:a="http://schemas.openxmlformats.org/drawingml/2006/main" xmlns:p="http://schemas.openxmlformats.org/presentationml/2006/main" xmlns:r="http://schemas.openxmlformats.org/officeDocument/2006/relationships">
+<p:notes xmlns:a="http://schemas.openxmlformats.org/drawingml/2006/main" xmlns:r="http://schemas.openxmlformats.org/officeDocument/2006/relationships" xmlns:p="http://schemas.openxmlformats.org/presentationml/2006/main">
   <p:cSld>
     <p:spTree>
       <p:nvGrpSpPr>
@@ -665,7 +493,7 @@
         <p:nvSpPr>
           <p:cNvPr id="2" name="Slide Image Placeholder 1"/>
           <p:cNvSpPr>
-            <a:spLocks noGrp="1"/>
+            <a:spLocks noGrp="1" noRot="1" noChangeAspect="1"/>
           </p:cNvSpPr>
           <p:nvPr>
             <p:ph type="sldImg" idx="2"/>
@@ -680,7 +508,7 @@
             <a:spLocks noGrp="1"/>
           </p:cNvSpPr>
           <p:nvPr>
-            <p:ph type="body" idx="3" sz="quarter"/>
+            <p:ph type="body" sz="quarter" idx="3"/>
           </p:nvPr>
         </p:nvSpPr>
         <p:spPr/>
@@ -692,13 +520,17 @@
               <a:t>The multi-probe intervention solves: minimise the L2 norm of delta-x subject to W times (x plus delta-x) plus b equals y. That is the Moore-Penrose solution, which I verified against a direct pseudo-inverse to three times ten to the minus fourteen. It is the SMALLEST EUCLIDEAN STEP satisfying K linear constraints.</a:t>
             </a:r>
           </a:p>
-          <a:p/>
+          <a:p>
+            <a:endParaRPr/>
+          </a:p>
           <a:p>
             <a:r>
               <a:t>And Euclidean smallness is measured in the ambient activation space, which knows nothing about where the data lives. So the solution is free to cut across the manifold, and on a closed geometry the shortest chord runs through the empty centre. The failure is not a bug in the solver — it is what minimising the wrong norm buys you.</a:t>
             </a:r>
           </a:p>
-          <a:p/>
+          <a:p>
+            <a:endParaRPr/>
+          </a:p>
           <a:p>
             <a:r>
               <a:t>Where I would take this next: whether the 3x retention gap widens by the final layer, and whether any of it holds on real video, where the manifolds are not this clean. Happy to go wherever is most useful.</a:t>
@@ -713,7 +545,7 @@
             <a:spLocks noGrp="1"/>
           </p:cNvSpPr>
           <p:nvPr>
-            <p:ph type="sldNum" idx="5" sz="quarter"/>
+            <p:ph type="sldNum" sz="quarter" idx="5"/>
           </p:nvPr>
         </p:nvSpPr>
         <p:spPr/>
@@ -727,7 +559,7 @@
 </file>
 
 <file path=ppt/notesSlides/notesSlide12.xml><?xml version="1.0" encoding="utf-8"?>
-<p:notes xmlns:a="http://schemas.openxmlformats.org/drawingml/2006/main" xmlns:p="http://schemas.openxmlformats.org/presentationml/2006/main" xmlns:r="http://schemas.openxmlformats.org/officeDocument/2006/relationships">
+<p:notes xmlns:a="http://schemas.openxmlformats.org/drawingml/2006/main" xmlns:r="http://schemas.openxmlformats.org/officeDocument/2006/relationships" xmlns:p="http://schemas.openxmlformats.org/presentationml/2006/main">
   <p:cSld>
     <p:spTree>
       <p:nvGrpSpPr>
@@ -747,7 +579,7 @@
         <p:nvSpPr>
           <p:cNvPr id="2" name="Slide Image Placeholder 1"/>
           <p:cNvSpPr>
-            <a:spLocks noGrp="1"/>
+            <a:spLocks noGrp="1" noRot="1" noChangeAspect="1"/>
           </p:cNvSpPr>
           <p:nvPr>
             <p:ph type="sldImg" idx="2"/>
@@ -762,7 +594,7 @@
             <a:spLocks noGrp="1"/>
           </p:cNvSpPr>
           <p:nvPr>
-            <p:ph type="body" idx="3" sz="quarter"/>
+            <p:ph type="body" sz="quarter" idx="3"/>
           </p:nvPr>
         </p:nvSpPr>
         <p:spPr/>
@@ -771,42 +603,76 @@
           <a:lstStyle/>
           <a:p>
             <a:r>
-              <a:t>Only pull this up if someone asks whether the off-manifold state is a noisy variant of a real one.</a:t>
-            </a:r>
-          </a:p>
-          <a:p/>
-          <a:p>
-            <a:r>
+              <a:rPr lang="en-US"/>
+              <a:t>W</a:t>
+            </a:r>
+            <a:r>
+              <a:t>hether </a:t>
+            </a:r>
+            <a:r>
+              <a:rPr dirty="0"/>
+              <a:t>the off-manifold state is a noisy variant of a real one.</a:t>
+            </a:r>
+          </a:p>
+          <a:p>
+            <a:endParaRPr dirty="0"/>
+          </a:p>
+          <a:p>
+            <a:r>
+              <a:rPr dirty="0"/>
               <a:t>THREE TESTS, AND THE INTUITIVE ONE FAILS.</a:t>
             </a:r>
           </a:p>
-          <a:p/>
-          <a:p>
-            <a:r>
+          <a:p>
+            <a:endParaRPr dirty="0"/>
+          </a:p>
+          <a:p>
+            <a:r>
+              <a:rPr dirty="0"/>
               <a:t>Test 1, the bootstrap tube: the chord sits 2.4 times outside the 95% tube at its worst point, and 51% of its length is outside. Real, but weaker than it sounds — the tube is about 38% of the ring radius, so 1,148 clips do not pin the manifold that tightly.</a:t>
             </a:r>
           </a:p>
-          <a:p/>
-          <a:p>
-            <a:r>
+          <a:p>
+            <a:endParaRPr dirty="0"/>
+          </a:p>
+          <a:p>
+            <a:r>
+              <a:rPr dirty="0"/>
               <a:t>Test 2, distance from the curve: THIS ONE FAILS. A real clip sits 17.2 from the centroid curve on average. The chord midpoint sits 13.0 — closer than 77% of real clips. If someone argues 'it is only 13 out and real data is 17 out', they are CORRECT. Do not claim distance-from-curve proves anything.</a:t>
             </a:r>
           </a:p>
-          <a:p/>
-          <a:p>
-            <a:r>
-              <a:t>Test 3, the radial shell, is decisive. In 64 dimensions the data occupies a shell, not a ball. Real clips sit at radius 15.8 minimum, 23.7 median. The midpoint sits at 5.1. ZERO of 1,148 clips are that close to the centre — z-score minus 4.1, and 0.32 times the radius of the closest real clip.</a:t>
-            </a:r>
-          </a:p>
-          <a:p/>
-          <a:p>
-            <a:r>
+          <a:p>
+            <a:endParaRPr dirty="0"/>
+          </a:p>
+          <a:p>
+            <a:r>
+              <a:rPr dirty="0"/>
+              <a:t>Test 3, the radial shell, is decisive. In 64 dimensions the data occupies a shell, not a ball. Real clips sit at radius 15.8 minimum, 23.7 median. The midpoint sits at 5.1. ZERO of 1,148 clips are that close to the </a:t>
+            </a:r>
+            <a:r>
+              <a:rPr dirty="0" err="1"/>
+              <a:t>centre</a:t>
+            </a:r>
+            <a:r>
+              <a:rPr dirty="0"/>
+              <a:t> — z-score minus 4.1, and 0.32 times the radius of the closest real clip.</a:t>
+            </a:r>
+          </a:p>
+          <a:p>
+            <a:endParaRPr dirty="0"/>
+          </a:p>
+          <a:p>
+            <a:r>
+              <a:rPr dirty="0"/>
               <a:t>So: the midpoint occupies a region no training clip occupies. Lead with 0-of-1148, not the tube.</a:t>
             </a:r>
           </a:p>
-          <a:p/>
-          <a:p>
-            <a:r>
+          <a:p>
+            <a:endParaRPr dirty="0"/>
+          </a:p>
+          <a:p>
+            <a:r>
+              <a:rPr dirty="0"/>
               <a:t>General lesson worth one sentence: in high dimensions an off-distribution point is often CLOSER to the mean than real data is, not farther. Distance-to-the-fit is the wrong diagnostic; occupancy of the region is the right one.</a:t>
             </a:r>
           </a:p>
@@ -819,7 +685,7 @@
             <a:spLocks noGrp="1"/>
           </p:cNvSpPr>
           <p:nvPr>
-            <p:ph type="sldNum" idx="5" sz="quarter"/>
+            <p:ph type="sldNum" sz="quarter" idx="5"/>
           </p:nvPr>
         </p:nvSpPr>
         <p:spPr/>
@@ -833,7 +699,7 @@
 </file>
 
 <file path=ppt/notesSlides/notesSlide2.xml><?xml version="1.0" encoding="utf-8"?>
-<p:notes xmlns:a="http://schemas.openxmlformats.org/drawingml/2006/main" xmlns:p="http://schemas.openxmlformats.org/presentationml/2006/main" xmlns:r="http://schemas.openxmlformats.org/officeDocument/2006/relationships">
+<p:notes xmlns:a="http://schemas.openxmlformats.org/drawingml/2006/main" xmlns:r="http://schemas.openxmlformats.org/officeDocument/2006/relationships" xmlns:p="http://schemas.openxmlformats.org/presentationml/2006/main">
   <p:cSld>
     <p:spTree>
       <p:nvGrpSpPr>
@@ -853,7 +719,7 @@
         <p:nvSpPr>
           <p:cNvPr id="2" name="Slide Image Placeholder 1"/>
           <p:cNvSpPr>
-            <a:spLocks noGrp="1"/>
+            <a:spLocks noGrp="1" noRot="1" noChangeAspect="1"/>
           </p:cNvSpPr>
           <p:nvPr>
             <p:ph type="sldImg" idx="2"/>
@@ -868,7 +734,7 @@
             <a:spLocks noGrp="1"/>
           </p:cNvSpPr>
           <p:nvPr>
-            <p:ph type="body" idx="3" sz="quarter"/>
+            <p:ph type="body" sz="quarter" idx="3"/>
           </p:nvPr>
         </p:nvSpPr>
         <p:spPr/>
@@ -880,13 +746,17 @@
               <a:t>Direction is decodable at 11.4 degrees from LAYER 1 — one attention block. The paper reports it emerging only at a sharp mid-depth transition. Here there is no step, just a steep rise and a glide.</a:t>
             </a:r>
           </a:p>
-          <a:p/>
+          <a:p>
+            <a:endParaRPr/>
+          </a:p>
           <a:p>
             <a:r>
               <a:t>The obvious objection is that the probe reads POSITION, not direction. It does not: the frame-0 centroid alone scores 86.3 degrees against a chance of 90. So this is real, and most likely a dataset-simplicity effect — one high-contrast disk on an empty field.</a:t>
             </a:r>
           </a:p>
-          <a:p/>
+          <a:p>
+            <a:endParaRPr/>
+          </a:p>
           <a:p>
             <a:r>
               <a:t>Two things to flag while this is up. The tracker oracle beats every encoder probe, so V-JEPA loses roughly half the recoverable signal. And pooling moves the apparent best layer by up to six layers, so a single-pooling curve would confound emergence with pooling dilution.</a:t>
@@ -901,7 +771,7 @@
             <a:spLocks noGrp="1"/>
           </p:cNvSpPr>
           <p:nvPr>
-            <p:ph type="sldNum" idx="5" sz="quarter"/>
+            <p:ph type="sldNum" sz="quarter" idx="5"/>
           </p:nvPr>
         </p:nvSpPr>
         <p:spPr/>
@@ -915,7 +785,7 @@
 </file>
 
 <file path=ppt/notesSlides/notesSlide3.xml><?xml version="1.0" encoding="utf-8"?>
-<p:notes xmlns:a="http://schemas.openxmlformats.org/drawingml/2006/main" xmlns:p="http://schemas.openxmlformats.org/presentationml/2006/main" xmlns:r="http://schemas.openxmlformats.org/officeDocument/2006/relationships">
+<p:notes xmlns:a="http://schemas.openxmlformats.org/drawingml/2006/main" xmlns:r="http://schemas.openxmlformats.org/officeDocument/2006/relationships" xmlns:p="http://schemas.openxmlformats.org/presentationml/2006/main">
   <p:cSld>
     <p:spTree>
       <p:nvGrpSpPr>
@@ -935,7 +805,7 @@
         <p:nvSpPr>
           <p:cNvPr id="2" name="Slide Image Placeholder 1"/>
           <p:cNvSpPr>
-            <a:spLocks noGrp="1"/>
+            <a:spLocks noGrp="1" noRot="1" noChangeAspect="1"/>
           </p:cNvSpPr>
           <p:nvPr>
             <p:ph type="sldImg" idx="2"/>
@@ -950,7 +820,7 @@
             <a:spLocks noGrp="1"/>
           </p:cNvSpPr>
           <p:nvPr>
-            <p:ph type="body" idx="3" sz="quarter"/>
+            <p:ph type="body" sz="quarter" idx="3"/>
           </p:nvPr>
         </p:nvSpPr>
         <p:spPr/>
@@ -962,31 +832,41 @@
               <a:t>Removing the probe subspace drives direction from R-squared 0.99 to 0.01; removing the same number of random directions does nothing. THAT contrast is the finding — all three variables are carried by a highly redundant population code.</a:t>
             </a:r>
           </a:p>
-          <a:p/>
+          <a:p>
+            <a:endParaRPr/>
+          </a:p>
           <a:p>
             <a:r>
               <a:t>NOW THE CAREFUL PART, and volunteer it before anyone asks. Each INLP round removes one probe's readout subspace, and that subspace's rank is set by the TARGET, not by the representation: two dimensions for direction's sin-cos pair, one for a scalar. So direction spends dimensions twice as fast per round as pure bookkeeping.</a:t>
             </a:r>
           </a:p>
-          <a:p/>
+          <a:p>
+            <a:endParaRPr/>
+          </a:p>
           <a:p>
             <a:r>
               <a:t>Counted in ROUNDS — independent readouts extractable before the signal dies — the three are essentially equal: 71, 69, 67.</a:t>
             </a:r>
           </a:p>
-          <a:p/>
+          <a:p>
+            <a:endParaRPr/>
+          </a:p>
           <a:p>
             <a:r>
               <a:t>The decisive control is the right panel. Give direction a ONE-dimensional target on the same activations: sin theta alone costs 76 dimensions, cos theta alone 54 — squarely in the scalars' range of 67 to 69. The 142 is just 71 rounds times two.</a:t>
             </a:r>
           </a:p>
-          <a:p/>
+          <a:p>
+            <a:endParaRPr/>
+          </a:p>
           <a:p>
             <a:r>
               <a:t>So do NOT say direction is twice as redundant. Say: all three are equally redundant, and direction's readout is inherently two-dimensional, which is why controlling it costs twice the dimensions per readout. That framing sets up slide 5 exactly — a single probe cannot steer a two-dimensional readout.</a:t>
             </a:r>
           </a:p>
-          <a:p/>
+          <a:p>
+            <a:endParaRPr/>
+          </a:p>
           <a:p>
             <a:r>
               <a:t>One real asymmetry does survive, at the tail rather than the midpoint: reaching 10 percent of the original R-squared takes 133 rounds for direction against 114 and 103 for the scalars. About 1.2 times, not 2. Direction's signal persists a little longer into the low-signal regime.</a:t>
@@ -1001,7 +881,7 @@
             <a:spLocks noGrp="1"/>
           </p:cNvSpPr>
           <p:nvPr>
-            <p:ph type="sldNum" idx="5" sz="quarter"/>
+            <p:ph type="sldNum" sz="quarter" idx="5"/>
           </p:nvPr>
         </p:nvSpPr>
         <p:spPr/>
@@ -1015,7 +895,7 @@
 </file>
 
 <file path=ppt/notesSlides/notesSlide4.xml><?xml version="1.0" encoding="utf-8"?>
-<p:notes xmlns:a="http://schemas.openxmlformats.org/drawingml/2006/main" xmlns:p="http://schemas.openxmlformats.org/presentationml/2006/main" xmlns:r="http://schemas.openxmlformats.org/officeDocument/2006/relationships">
+<p:notes xmlns:a="http://schemas.openxmlformats.org/drawingml/2006/main" xmlns:r="http://schemas.openxmlformats.org/officeDocument/2006/relationships" xmlns:p="http://schemas.openxmlformats.org/presentationml/2006/main">
   <p:cSld>
     <p:spTree>
       <p:nvGrpSpPr>
@@ -1035,7 +915,7 @@
         <p:nvSpPr>
           <p:cNvPr id="2" name="Slide Image Placeholder 1"/>
           <p:cNvSpPr>
-            <a:spLocks noGrp="1"/>
+            <a:spLocks noGrp="1" noRot="1" noChangeAspect="1"/>
           </p:cNvSpPr>
           <p:nvPr>
             <p:ph type="sldImg" idx="2"/>
@@ -1050,7 +930,7 @@
             <a:spLocks noGrp="1"/>
           </p:cNvSpPr>
           <p:nvPr>
-            <p:ph type="body" idx="3" sz="quarter"/>
+            <p:ph type="body" sz="quarter" idx="3"/>
           </p:nvPr>
         </p:nvSpPr>
         <p:spPr/>
@@ -1062,13 +942,17 @@
               <a:t>Every principal component is almost purely one harmonic. PC1-2 are cos and sin of theta; PC3 is two theta; PC4 is four theta. The ladder is 1, 2, 4 — m=3 sits at the noise floor.</a:t>
             </a:r>
           </a:p>
-          <a:p/>
+          <a:p>
+            <a:endParaRPr/>
+          </a:p>
           <a:p>
             <a:r>
               <a:t>The 180-degree flip correlations say what the higher harmonics ARE. PC1 anti-correlates at -0.97: a direction code. PC3 and PC4 are invariant at +0.95 and +0.97: they encode the AXIS of motion, not which way along it. That is the direction-versus-orientation distinction from visual neuroscience, appearing unprompted. And the network builds it — the pixel trajectory is 97% pure first harmonic.</a:t>
             </a:r>
           </a:p>
-          <a:p/>
+          <a:p>
+            <a:endParaRPr/>
+          </a:p>
           <a:p>
             <a:r>
               <a:t>DO NOT claim this explains the dimensionality. It is tempting and it is wrong: PC3 alone reads direction at 99.8 degrees — worse than chance — and PC1-4 together only reach 11.1 against 2.57 for the full space. The harmonics explain the SHAPE, a non-planar closed loop, which is what sets the trap for linear steering. The dimensionality of slide 3 is spent suppressing nuisance.</a:t>
@@ -1083,7 +967,7 @@
             <a:spLocks noGrp="1"/>
           </p:cNvSpPr>
           <p:nvPr>
-            <p:ph type="sldNum" idx="5" sz="quarter"/>
+            <p:ph type="sldNum" sz="quarter" idx="5"/>
           </p:nvPr>
         </p:nvSpPr>
         <p:spPr/>
@@ -1097,7 +981,7 @@
 </file>
 
 <file path=ppt/notesSlides/notesSlide5.xml><?xml version="1.0" encoding="utf-8"?>
-<p:notes xmlns:a="http://schemas.openxmlformats.org/drawingml/2006/main" xmlns:p="http://schemas.openxmlformats.org/presentationml/2006/main" xmlns:r="http://schemas.openxmlformats.org/officeDocument/2006/relationships">
+<p:notes xmlns:a="http://schemas.openxmlformats.org/drawingml/2006/main" xmlns:r="http://schemas.openxmlformats.org/officeDocument/2006/relationships" xmlns:p="http://schemas.openxmlformats.org/presentationml/2006/main">
   <p:cSld>
     <p:spTree>
       <p:nvGrpSpPr>
@@ -1117,7 +1001,7 @@
         <p:nvSpPr>
           <p:cNvPr id="2" name="Slide Image Placeholder 1"/>
           <p:cNvSpPr>
-            <a:spLocks noGrp="1"/>
+            <a:spLocks noGrp="1" noRot="1" noChangeAspect="1"/>
           </p:cNvSpPr>
           <p:nvPr>
             <p:ph type="sldImg" idx="2"/>
@@ -1132,7 +1016,7 @@
             <a:spLocks noGrp="1"/>
           </p:cNvSpPr>
           <p:nvPr>
-            <p:ph type="body" idx="3" sz="quarter"/>
+            <p:ph type="body" sz="quarter" idx="3"/>
           </p:nvPr>
         </p:nvSpPr>
         <p:spPr/>
@@ -1141,49 +1025,47 @@
           <a:lstStyle/>
           <a:p>
             <a:r>
-              <a:t>The paper's steering experiment. Three results to hit, and the evaluation protocol matters.</a:t>
-            </a:r>
-          </a:p>
-          <a:p/>
-          <a:p>
-            <a:r>
-              <a:t>PROTOCOL FIRST. Three independent held-out axes: the evaluation probe is never one of the K that built the subspace and is fitted on disjoint clips; the steered clips carry target values never seen in fitting. Without the probe split, 'steering worked' would only mean the intervention satisfied the equations it solved.</a:t>
-            </a:r>
-          </a:p>
-          <a:p/>
-          <a:p>
-            <a:r>
-              <a:t>LEFT PANEL — the strongest evidence, and it reproduces the paper closely. As K grows, error to the TARGET angle falls from the 84-degree unsteered floor to 4.8 degrees, while error to each clip's OWN angle rises from 4.6 to 83.2. The two curves cross. That is the signature of a genuine ROTATION of the representation rather than noise that happens to fool the probe — and readout certainty stays around 0.93 throughout, where noise injection would collapse it. The paper reports 6 degrees rising to about 71; we get 4.6 to 83.</a:t>
-            </a:r>
-          </a:p>
-          <a:p/>
-          <a:p>
-            <a:r>
-              <a:t>MIDDLE — a single probe closes 28 percent of the gap for direction but 74 percent for either scalar. Direction needs K of at least two and is solved by K around four.</a:t>
-            </a:r>
-          </a:p>
-          <a:p/>
-          <a:p>
-            <a:r>
-              <a:t>CAVEAT, worth volunteering. The paper reports single-probe steering leaves the error above 80 degrees — essentially unchanged. Ours moves it to 61. The ORDERING reproduces emphatically; the MAGNITUDE of the failure does not. Most likely the same dataset-simplicity effect that puts direction at layer 1.</a:t>
-            </a:r>
-          </a:p>
-          <a:p/>
-          <a:p>
-            <a:r>
-              <a:t>RIGHT — the cost. A bigger subspace steers better and leaks more. By dimension 16 every cross-variable cell exceeds the watching probe's own noise.</a:t>
-            </a:r>
-          </a:p>
-          <a:p/>
-          <a:p>
-            <a:r>
-              <a:t>ON THE PAPER'S TAKEAWAY. They frame direction as uniquely high-dimensional, unlike LLM concepts steerable along one vector. Our data supports the steering half — direction needs K of at least two while a scalar works at K equals one. It does NOT support 'uniquely high-dimensional': after the slide-3 correction, speed and acceleration need 69 and 67 independent readouts against direction's 71. All three are high-dimensional population codes. What makes direction special is that its readout is two-dimensional and CYCLIC — which is exactly what Act 2 is about.</a:t>
-            </a:r>
-          </a:p>
-          <a:p/>
-          <a:p>
-            <a:r>
-              <a:t>If asked what the intervention solves: minimise the L2 norm of delta-x subject to the probes reading the target — the Moore-Penrose minimum-norm edit, verified to three times ten to the minus fourteen. The smallest EUCLIDEAN step.</a:t>
+              <a:t>This is the paper's steering experiment, and the evaluation protocol is the part worth spelling out.</a:t>
+            </a:r>
+          </a:p>
+          <a:p>
+            <a:endParaRPr/>
+          </a:p>
+          <a:p>
+            <a:r>
+              <a:t>THREE INDEPENDENT HELD-OUT AXES. The evaluation probe is never one of the K that built the steering subspace, and it is fitted on clips disjoint from all of them. The clips being steered carry target values never seen during fitting. Without the probe split, 'steering worked' would only mean the intervention satisfied the very equations it solved.</a:t>
+            </a:r>
+          </a:p>
+          <a:p>
+            <a:endParaRPr/>
+          </a:p>
+          <a:p>
+            <a:r>
+              <a:t>LEFT PANEL, the result. A single probe closes 28 percent of the floor-to-ceiling gap for direction but 74 percent for either scalar. Direction needs K of at least two and is essentially solved by K around four. That is the causal counterpart of slide 3: a 2-dimensional readout cannot be driven along a single direction.</a:t>
+            </a:r>
+          </a:p>
+          <a:p>
+            <a:endParaRPr/>
+          </a:p>
+          <a:p>
+            <a:r>
+              <a:t>MIDDLE AND RIGHT, the cost. To build a subspace big enough to steer the ring you capture other kinematics with it. By dimension 16 every cell in the matrix leaks. Dimension 4 to 8 is the usable operating point.</a:t>
+            </a:r>
+          </a:p>
+          <a:p>
+            <a:endParaRPr/>
+          </a:p>
+          <a:p>
+            <a:r>
+              <a:t>TWO CELLS ARE BLANK, and that is a finding about the data. Speed and acceleration are mutually exclusive in every supplied dataset — no clip has both non-zero — so the coupling v = v0 + a t that would make that leakage interesting has been designed out of the stimulus set.</a:t>
+            </a:r>
+          </a:p>
+          <a:p>
+            <a:endParaRPr/>
+          </a:p>
+          <a:p>
+            <a:r>
+              <a:t>If asked what the intervention actually solves: minimise the L2 norm of delta-x subject to the probes reading the target. That is the Moore-Penrose minimum-norm edit, verified against a direct pseudo-inverse to three times ten to the minus fourteen. Smallest EUCLIDEAN step — which is exactly the setup for Act 2.</a:t>
             </a:r>
           </a:p>
         </p:txBody>
@@ -1195,7 +1077,7 @@
             <a:spLocks noGrp="1"/>
           </p:cNvSpPr>
           <p:nvPr>
-            <p:ph type="sldNum" idx="5" sz="quarter"/>
+            <p:ph type="sldNum" sz="quarter" idx="5"/>
           </p:nvPr>
         </p:nvSpPr>
         <p:spPr/>
@@ -1209,7 +1091,7 @@
 </file>
 
 <file path=ppt/notesSlides/notesSlide6.xml><?xml version="1.0" encoding="utf-8"?>
-<p:notes xmlns:a="http://schemas.openxmlformats.org/drawingml/2006/main" xmlns:p="http://schemas.openxmlformats.org/presentationml/2006/main" xmlns:r="http://schemas.openxmlformats.org/officeDocument/2006/relationships">
+<p:notes xmlns:a="http://schemas.openxmlformats.org/drawingml/2006/main" xmlns:r="http://schemas.openxmlformats.org/officeDocument/2006/relationships" xmlns:p="http://schemas.openxmlformats.org/presentationml/2006/main">
   <p:cSld>
     <p:spTree>
       <p:nvGrpSpPr>
@@ -1229,7 +1111,7 @@
         <p:nvSpPr>
           <p:cNvPr id="2" name="Slide Image Placeholder 1"/>
           <p:cNvSpPr>
-            <a:spLocks noGrp="1"/>
+            <a:spLocks noGrp="1" noRot="1" noChangeAspect="1"/>
           </p:cNvSpPr>
           <p:nvPr>
             <p:ph type="sldImg" idx="2"/>
@@ -1244,7 +1126,7 @@
             <a:spLocks noGrp="1"/>
           </p:cNvSpPr>
           <p:nvPr>
-            <p:ph type="body" idx="3" sz="quarter"/>
+            <p:ph type="body" sz="quarter" idx="3"/>
           </p:nvPr>
         </p:nvSpPr>
         <p:spPr/>
@@ -1253,18 +1135,37 @@
           <a:lstStyle/>
           <a:p>
             <a:r>
-              <a:t>Wurgaft et al. warn that Euclidean steering goes off-manifold. Our data says that is NECESSARY BUT NOT SUFFICIENT.</a:t>
-            </a:r>
-          </a:p>
-          <a:p/>
-          <a:p>
-            <a:r>
-              <a:t>The tempting explanation — direction is more curved — does not survive measurement. Speed's manifold is curved too, 4.68 against 6.59, and both chords sit 80 to 120 times off manifold in every pair we tested. Yet the behavioural penalty appears only for direction.</a:t>
-            </a:r>
-          </a:p>
-          <a:p/>
-          <a:p>
-            <a:r>
+              <a:rPr dirty="0" err="1"/>
+              <a:t>Wurgaft</a:t>
+            </a:r>
+            <a:r>
+              <a:rPr dirty="0"/>
+              <a:t> et al. warn that Euclidean steering goes off-manifold. Our data says that is NECESSARY BUT NOT SUFFICIENT.</a:t>
+            </a:r>
+          </a:p>
+          <a:p>
+            <a:endParaRPr dirty="0"/>
+          </a:p>
+          <a:p>
+            <a:r>
+              <a:rPr dirty="0"/>
+              <a:t>The tempting explanation — direction is more curved — does not survive measurement. Speed's manifold is curved too, 4.68 against 6.59, and both chords sit 80 to 120 times off manifold in every pair we tested. Yet the </a:t>
+            </a:r>
+            <a:r>
+              <a:rPr dirty="0" err="1"/>
+              <a:t>behavioural</a:t>
+            </a:r>
+            <a:r>
+              <a:rPr dirty="0"/>
+              <a:t> penalty appears only for direction.</a:t>
+            </a:r>
+          </a:p>
+          <a:p>
+            <a:endParaRPr dirty="0"/>
+          </a:p>
+          <a:p>
+            <a:r>
+              <a:rPr dirty="0"/>
               <a:t>What separates them is TOPOLOGY. Speed's curve is open: the chord leaves it geometrically, but every point along it still decodes to a sensible intermediate speed. Direction's ring is closed, so a chord must cross the interior — a region that corresponds to no direction at all. Off-manifold only matters when the region you land in is semantically empty.</a:t>
             </a:r>
           </a:p>
@@ -1277,7 +1178,7 @@
             <a:spLocks noGrp="1"/>
           </p:cNvSpPr>
           <p:nvPr>
-            <p:ph type="sldNum" idx="5" sz="quarter"/>
+            <p:ph type="sldNum" sz="quarter" idx="5"/>
           </p:nvPr>
         </p:nvSpPr>
         <p:spPr/>
@@ -1291,7 +1192,7 @@
 </file>
 
 <file path=ppt/notesSlides/notesSlide7.xml><?xml version="1.0" encoding="utf-8"?>
-<p:notes xmlns:a="http://schemas.openxmlformats.org/drawingml/2006/main" xmlns:p="http://schemas.openxmlformats.org/presentationml/2006/main" xmlns:r="http://schemas.openxmlformats.org/officeDocument/2006/relationships">
+<p:notes xmlns:a="http://schemas.openxmlformats.org/drawingml/2006/main" xmlns:r="http://schemas.openxmlformats.org/officeDocument/2006/relationships" xmlns:p="http://schemas.openxmlformats.org/presentationml/2006/main">
   <p:cSld>
     <p:spTree>
       <p:nvGrpSpPr>
@@ -1311,7 +1212,7 @@
         <p:nvSpPr>
           <p:cNvPr id="2" name="Slide Image Placeholder 1"/>
           <p:cNvSpPr>
-            <a:spLocks noGrp="1"/>
+            <a:spLocks noGrp="1" noRot="1" noChangeAspect="1"/>
           </p:cNvSpPr>
           <p:nvPr>
             <p:ph type="sldImg" idx="2"/>
@@ -1326,7 +1227,7 @@
             <a:spLocks noGrp="1"/>
           </p:cNvSpPr>
           <p:nvPr>
-            <p:ph type="body" idx="3" sz="quarter"/>
+            <p:ph type="body" sz="quarter" idx="3"/>
           </p:nvPr>
         </p:nvSpPr>
         <p:spPr/>
@@ -1335,24 +1236,50 @@
           <a:lstStyle/>
           <a:p>
             <a:r>
-              <a:t>You might expect the centre of the ring to be the stationary state: left plus right equals nothing. IT IS NOT. Speed survives completely, and so does the axis of motion. Only the direction bit is removed.</a:t>
-            </a:r>
-          </a:p>
-          <a:p/>
-          <a:p>
-            <a:r>
-              <a:t>So the model is holding: an object moving along this specific line, at 2.1 metres per second, with no fact about which of the two ways it is going. No clip in the dataset can be in that state.</a:t>
-            </a:r>
-          </a:p>
-          <a:p/>
-          <a:p>
-            <a:r>
+              <a:rPr dirty="0"/>
+              <a:t>You might expect the </a:t>
+            </a:r>
+            <a:r>
+              <a:rPr dirty="0" err="1"/>
+              <a:t>centre</a:t>
+            </a:r>
+            <a:r>
+              <a:rPr dirty="0"/>
+              <a:t> of the ring to be the stationary state: left plus right equals nothing. IT IS NOT. Speed survives completely, and so does the axis of motion. Only the direction bit is removed.</a:t>
+            </a:r>
+          </a:p>
+          <a:p>
+            <a:endParaRPr dirty="0"/>
+          </a:p>
+          <a:p>
+            <a:r>
+              <a:rPr dirty="0"/>
+              <a:t>So the model is holding: an object moving along this specific line, at 2.1 </a:t>
+            </a:r>
+            <a:r>
+              <a:rPr dirty="0" err="1"/>
+              <a:t>metres</a:t>
+            </a:r>
+            <a:r>
+              <a:rPr dirty="0"/>
+              <a:t> per second, with no fact about which of the two ways it is going. No clip in the dataset can be in that state.</a:t>
+            </a:r>
+          </a:p>
+          <a:p>
+            <a:endParaRPr dirty="0"/>
+          </a:p>
+          <a:p>
+            <a:r>
+              <a:rPr dirty="0"/>
               <a:t>And it falls straight out of slide 4. m=1 is anti-symmetric under a 180-degree flip, so the two endpoints cancel exactly at the midpoint. m=2 is invariant, so the axis rides through untouched. That is also why the collapse bottoms out precisely at t = 0.5.</a:t>
             </a:r>
           </a:p>
-          <a:p/>
-          <a:p>
-            <a:r>
+          <a:p>
+            <a:endParaRPr dirty="0"/>
+          </a:p>
+          <a:p>
+            <a:r>
+              <a:rPr dirty="0"/>
               <a:t>This is the concrete version of 'unnatural output': not noise, but a structured, physically impossible state.</a:t>
             </a:r>
           </a:p>
@@ -1365,7 +1292,7 @@
             <a:spLocks noGrp="1"/>
           </p:cNvSpPr>
           <p:nvPr>
-            <p:ph type="sldNum" idx="5" sz="quarter"/>
+            <p:ph type="sldNum" sz="quarter" idx="5"/>
           </p:nvPr>
         </p:nvSpPr>
         <p:spPr/>
@@ -1379,7 +1306,7 @@
 </file>
 
 <file path=ppt/notesSlides/notesSlide8.xml><?xml version="1.0" encoding="utf-8"?>
-<p:notes xmlns:a="http://schemas.openxmlformats.org/drawingml/2006/main" xmlns:p="http://schemas.openxmlformats.org/presentationml/2006/main" xmlns:r="http://schemas.openxmlformats.org/officeDocument/2006/relationships">
+<p:notes xmlns:a="http://schemas.openxmlformats.org/drawingml/2006/main" xmlns:r="http://schemas.openxmlformats.org/officeDocument/2006/relationships" xmlns:p="http://schemas.openxmlformats.org/presentationml/2006/main">
   <p:cSld>
     <p:spTree>
       <p:nvGrpSpPr>
@@ -1399,7 +1326,7 @@
         <p:nvSpPr>
           <p:cNvPr id="2" name="Slide Image Placeholder 1"/>
           <p:cNvSpPr>
-            <a:spLocks noGrp="1"/>
+            <a:spLocks noGrp="1" noRot="1" noChangeAspect="1"/>
           </p:cNvSpPr>
           <p:nvPr>
             <p:ph type="sldImg" idx="2"/>
@@ -1414,7 +1341,7 @@
             <a:spLocks noGrp="1"/>
           </p:cNvSpPr>
           <p:nvPr>
-            <p:ph type="body" idx="3" sz="quarter"/>
+            <p:ph type="body" sz="quarter" idx="3"/>
           </p:nvPr>
         </p:nvSpPr>
         <p:spPr/>
@@ -1423,18 +1350,33 @@
           <a:lstStyle/>
           <a:p>
             <a:r>
-              <a:t>Three candidates. LAYERNORM IS NOT THE ANSWER — token norms and channel standard deviations sit within half a percent of the control, and only 0.6% of the edit lies along the all-ones direction that LayerNorm deletes.</a:t>
-            </a:r>
-          </a:p>
-          <a:p/>
-          <a:p>
-            <a:r>
+              <a:rPr dirty="0"/>
+              <a:t>Three candidates. LAYERNORM IS NOT THE ANSWER — token norms and channel standard deviations sit within half a percent of the control, and only 0.6% of the edit lies along the all-ones direction that </a:t>
+            </a:r>
+            <a:r>
+              <a:rPr dirty="0" err="1"/>
+              <a:t>LayerNorm</a:t>
+            </a:r>
+            <a:r>
+              <a:rPr dirty="0"/>
+              <a:t> deletes.</a:t>
+            </a:r>
+          </a:p>
+          <a:p>
+            <a:endParaRPr dirty="0"/>
+          </a:p>
+          <a:p>
+            <a:r>
+              <a:rPr dirty="0"/>
               <a:t>The substantive result is that THE EDIT IS NOT REMOVED, IT IS ROTATED. 69% of the perturbation survives four blocks, while the component that points along the direction readout keeps only 32%. The network turns the intervention into something that no longer means direction.</a:t>
             </a:r>
           </a:p>
-          <a:p/>
-          <a:p>
-            <a:r>
+          <a:p>
+            <a:endParaRPr dirty="0"/>
+          </a:p>
+          <a:p>
+            <a:r>
+              <a:rPr dirty="0"/>
               <a:t>Splitting by half-block: ATTENTION ACCOUNTS FOR 77% of the decay, concentrated in blocks 17 and 18. So the MLP is NOT acting as an error-correcting projection back onto the data distribution — that hypothesis predicts the opposite split. A uniform edit is invisible to the token-relative computation attention actually does.</a:t>
             </a:r>
           </a:p>
@@ -1447,7 +1389,7 @@
             <a:spLocks noGrp="1"/>
           </p:cNvSpPr>
           <p:nvPr>
-            <p:ph type="sldNum" idx="5" sz="quarter"/>
+            <p:ph type="sldNum" sz="quarter" idx="5"/>
           </p:nvPr>
         </p:nvSpPr>
         <p:spPr/>
@@ -1461,7 +1403,7 @@
 </file>
 
 <file path=ppt/notesSlides/notesSlide9.xml><?xml version="1.0" encoding="utf-8"?>
-<p:notes xmlns:a="http://schemas.openxmlformats.org/drawingml/2006/main" xmlns:p="http://schemas.openxmlformats.org/presentationml/2006/main" xmlns:r="http://schemas.openxmlformats.org/officeDocument/2006/relationships">
+<p:notes xmlns:a="http://schemas.openxmlformats.org/drawingml/2006/main" xmlns:r="http://schemas.openxmlformats.org/officeDocument/2006/relationships" xmlns:p="http://schemas.openxmlformats.org/presentationml/2006/main">
   <p:cSld>
     <p:spTree>
       <p:nvGrpSpPr>
@@ -1481,7 +1423,7 @@
         <p:nvSpPr>
           <p:cNvPr id="2" name="Slide Image Placeholder 1"/>
           <p:cNvSpPr>
-            <a:spLocks noGrp="1"/>
+            <a:spLocks noGrp="1" noRot="1" noChangeAspect="1"/>
           </p:cNvSpPr>
           <p:nvPr>
             <p:ph type="sldImg" idx="2"/>
@@ -1496,7 +1438,7 @@
             <a:spLocks noGrp="1"/>
           </p:cNvSpPr>
           <p:nvPr>
-            <p:ph type="body" idx="3" sz="quarter"/>
+            <p:ph type="body" sz="quarter" idx="3"/>
           </p:nvPr>
         </p:nvSpPr>
         <p:spPr/>
@@ -1518,6 +1460,18 @@
           <a:p>
             <a:r>
               <a:t>Most telling: the spline puts LESS of itself in the readout subspace at injection, 0.09 against 0.32, yet survives far better. It is not pushing harder along the probe direction — it is moving the representation the way the network's own geometry moves it.</a:t>
+            </a:r>
+          </a:p>
+          <a:p/>
+          <a:p>
+            <a:r>
+              <a:t>CONTROL, IF CHALLENGED ON EDIT SIZE. The two edits differ in magnitude — 8.5 for multi-probe, 22.1 for the spline — so someone will ask whether the bigger edit simply survives better. Rescaling the multi-probe edit settles it, and the confound runs the OTHER way: retention FALLS as the Euclidean edit grows. Half size retains 31 percent, normal size 25, double 22, and at 2.6 times — matching the spline's norm exactly — 21 percent against the spline's 76. At matched magnitude the gap widens from three times to three point six.</a:t>
+            </a:r>
+          </a:p>
+          <a:p/>
+          <a:p>
+            <a:r>
+              <a:t>The sharpest way to say it: give the Euclidean edit THREE TIMES the initial alignment, plus the same perturbation budget, and it still ends up BELOW the spline four blocks later — 0.686 against 0.783. What survives is not how hard you push. It is whether you push somewhere the network maintains.</a:t>
             </a:r>
           </a:p>
         </p:txBody>
@@ -1529,7 +1483,7 @@
             <a:spLocks noGrp="1"/>
           </p:cNvSpPr>
           <p:nvPr>
-            <p:ph type="sldNum" idx="5" sz="quarter"/>
+            <p:ph type="sldNum" sz="quarter" idx="5"/>
           </p:nvPr>
         </p:nvSpPr>
         <p:spPr/>
@@ -1580,10 +1534,9 @@
           <a:lstStyle/>
           <a:p>
             <a:r>
-              <a:rPr lang="en-US" smtClean="0"/>
+              <a:rPr lang="en-US"/>
               <a:t>Click to edit Master title style</a:t>
             </a:r>
-            <a:endParaRPr lang="en-US"/>
           </a:p>
         </p:txBody>
       </p:sp>
@@ -1699,10 +1652,9 @@
           </a:lstStyle>
           <a:p>
             <a:r>
-              <a:rPr lang="en-US" smtClean="0"/>
+              <a:rPr lang="en-US"/>
               <a:t>Click to edit Master subtitle style</a:t>
             </a:r>
-            <a:endParaRPr lang="en-US"/>
           </a:p>
         </p:txBody>
       </p:sp>
@@ -1723,7 +1675,7 @@
           <a:p>
             <a:fld id="{5BCAD085-E8A6-8845-BD4E-CB4CCA059FC4}" type="datetimeFigureOut">
               <a:rPr lang="en-US" smtClean="0"/>
-              <a:t>1/27/13</a:t>
+              <a:t>9/21/26</a:t>
             </a:fld>
             <a:endParaRPr lang="en-US"/>
           </a:p>
@@ -1817,10 +1769,9 @@
           <a:lstStyle/>
           <a:p>
             <a:r>
-              <a:rPr lang="en-US" smtClean="0"/>
+              <a:rPr lang="en-US"/>
               <a:t>Click to edit Master title style</a:t>
             </a:r>
-            <a:endParaRPr lang="en-US"/>
           </a:p>
         </p:txBody>
       </p:sp>
@@ -1841,38 +1792,37 @@
           <a:p>
             <a:pPr lvl="0"/>
             <a:r>
-              <a:rPr lang="en-US" smtClean="0"/>
+              <a:rPr lang="en-US"/>
               <a:t>Click to edit Master text styles</a:t>
             </a:r>
           </a:p>
           <a:p>
             <a:pPr lvl="1"/>
             <a:r>
-              <a:rPr lang="en-US" smtClean="0"/>
+              <a:rPr lang="en-US"/>
               <a:t>Second level</a:t>
             </a:r>
           </a:p>
           <a:p>
             <a:pPr lvl="2"/>
             <a:r>
-              <a:rPr lang="en-US" smtClean="0"/>
+              <a:rPr lang="en-US"/>
               <a:t>Third level</a:t>
             </a:r>
           </a:p>
           <a:p>
             <a:pPr lvl="3"/>
             <a:r>
-              <a:rPr lang="en-US" smtClean="0"/>
+              <a:rPr lang="en-US"/>
               <a:t>Fourth level</a:t>
             </a:r>
           </a:p>
           <a:p>
             <a:pPr lvl="4"/>
             <a:r>
-              <a:rPr lang="en-US" smtClean="0"/>
+              <a:rPr lang="en-US"/>
               <a:t>Fifth level</a:t>
             </a:r>
-            <a:endParaRPr lang="en-US"/>
           </a:p>
         </p:txBody>
       </p:sp>
@@ -1893,7 +1843,7 @@
           <a:p>
             <a:fld id="{5BCAD085-E8A6-8845-BD4E-CB4CCA059FC4}" type="datetimeFigureOut">
               <a:rPr lang="en-US" smtClean="0"/>
-              <a:t>1/27/13</a:t>
+              <a:t>9/21/26</a:t>
             </a:fld>
             <a:endParaRPr lang="en-US"/>
           </a:p>
@@ -1992,10 +1942,9 @@
           <a:lstStyle/>
           <a:p>
             <a:r>
-              <a:rPr lang="en-US" smtClean="0"/>
+              <a:rPr lang="en-US"/>
               <a:t>Click to edit Master title style</a:t>
             </a:r>
-            <a:endParaRPr lang="en-US"/>
           </a:p>
         </p:txBody>
       </p:sp>
@@ -2021,38 +1970,37 @@
           <a:p>
             <a:pPr lvl="0"/>
             <a:r>
-              <a:rPr lang="en-US" smtClean="0"/>
+              <a:rPr lang="en-US"/>
               <a:t>Click to edit Master text styles</a:t>
             </a:r>
           </a:p>
           <a:p>
             <a:pPr lvl="1"/>
             <a:r>
-              <a:rPr lang="en-US" smtClean="0"/>
+              <a:rPr lang="en-US"/>
               <a:t>Second level</a:t>
             </a:r>
           </a:p>
           <a:p>
             <a:pPr lvl="2"/>
             <a:r>
-              <a:rPr lang="en-US" smtClean="0"/>
+              <a:rPr lang="en-US"/>
               <a:t>Third level</a:t>
             </a:r>
           </a:p>
           <a:p>
             <a:pPr lvl="3"/>
             <a:r>
-              <a:rPr lang="en-US" smtClean="0"/>
+              <a:rPr lang="en-US"/>
               <a:t>Fourth level</a:t>
             </a:r>
           </a:p>
           <a:p>
             <a:pPr lvl="4"/>
             <a:r>
-              <a:rPr lang="en-US" smtClean="0"/>
+              <a:rPr lang="en-US"/>
               <a:t>Fifth level</a:t>
             </a:r>
-            <a:endParaRPr lang="en-US"/>
           </a:p>
         </p:txBody>
       </p:sp>
@@ -2073,7 +2021,7 @@
           <a:p>
             <a:fld id="{5BCAD085-E8A6-8845-BD4E-CB4CCA059FC4}" type="datetimeFigureOut">
               <a:rPr lang="en-US" smtClean="0"/>
-              <a:t>1/27/13</a:t>
+              <a:t>9/21/26</a:t>
             </a:fld>
             <a:endParaRPr lang="en-US"/>
           </a:p>
@@ -2167,10 +2115,9 @@
           <a:lstStyle/>
           <a:p>
             <a:r>
-              <a:rPr lang="en-US" smtClean="0"/>
+              <a:rPr lang="en-US"/>
               <a:t>Click to edit Master title style</a:t>
             </a:r>
-            <a:endParaRPr lang="en-US"/>
           </a:p>
         </p:txBody>
       </p:sp>
@@ -2191,38 +2138,37 @@
           <a:p>
             <a:pPr lvl="0"/>
             <a:r>
-              <a:rPr lang="en-US" smtClean="0"/>
+              <a:rPr lang="en-US"/>
               <a:t>Click to edit Master text styles</a:t>
             </a:r>
           </a:p>
           <a:p>
             <a:pPr lvl="1"/>
             <a:r>
-              <a:rPr lang="en-US" smtClean="0"/>
+              <a:rPr lang="en-US"/>
               <a:t>Second level</a:t>
             </a:r>
           </a:p>
           <a:p>
             <a:pPr lvl="2"/>
             <a:r>
-              <a:rPr lang="en-US" smtClean="0"/>
+              <a:rPr lang="en-US"/>
               <a:t>Third level</a:t>
             </a:r>
           </a:p>
           <a:p>
             <a:pPr lvl="3"/>
             <a:r>
-              <a:rPr lang="en-US" smtClean="0"/>
+              <a:rPr lang="en-US"/>
               <a:t>Fourth level</a:t>
             </a:r>
           </a:p>
           <a:p>
             <a:pPr lvl="4"/>
             <a:r>
-              <a:rPr lang="en-US" smtClean="0"/>
+              <a:rPr lang="en-US"/>
               <a:t>Fifth level</a:t>
             </a:r>
-            <a:endParaRPr lang="en-US"/>
           </a:p>
         </p:txBody>
       </p:sp>
@@ -2243,7 +2189,7 @@
           <a:p>
             <a:fld id="{5BCAD085-E8A6-8845-BD4E-CB4CCA059FC4}" type="datetimeFigureOut">
               <a:rPr lang="en-US" smtClean="0"/>
-              <a:t>1/27/13</a:t>
+              <a:t>9/21/26</a:t>
             </a:fld>
             <a:endParaRPr lang="en-US"/>
           </a:p>
@@ -2346,10 +2292,9 @@
           </a:lstStyle>
           <a:p>
             <a:r>
-              <a:rPr lang="en-US" smtClean="0"/>
+              <a:rPr lang="en-US"/>
               <a:t>Click to edit Master title style</a:t>
             </a:r>
-            <a:endParaRPr lang="en-US"/>
           </a:p>
         </p:txBody>
       </p:sp>
@@ -2466,7 +2411,7 @@
           <a:p>
             <a:pPr lvl="0"/>
             <a:r>
-              <a:rPr lang="en-US" smtClean="0"/>
+              <a:rPr lang="en-US"/>
               <a:t>Click to edit Master text styles</a:t>
             </a:r>
           </a:p>
@@ -2489,7 +2434,7 @@
           <a:p>
             <a:fld id="{5BCAD085-E8A6-8845-BD4E-CB4CCA059FC4}" type="datetimeFigureOut">
               <a:rPr lang="en-US" smtClean="0"/>
-              <a:t>1/27/13</a:t>
+              <a:t>9/21/26</a:t>
             </a:fld>
             <a:endParaRPr lang="en-US"/>
           </a:p>
@@ -2583,10 +2528,9 @@
           <a:lstStyle/>
           <a:p>
             <a:r>
-              <a:rPr lang="en-US" smtClean="0"/>
+              <a:rPr lang="en-US"/>
               <a:t>Click to edit Master title style</a:t>
             </a:r>
-            <a:endParaRPr lang="en-US"/>
           </a:p>
         </p:txBody>
       </p:sp>
@@ -2640,38 +2584,37 @@
           <a:p>
             <a:pPr lvl="0"/>
             <a:r>
-              <a:rPr lang="en-US" smtClean="0"/>
+              <a:rPr lang="en-US"/>
               <a:t>Click to edit Master text styles</a:t>
             </a:r>
           </a:p>
           <a:p>
             <a:pPr lvl="1"/>
             <a:r>
-              <a:rPr lang="en-US" smtClean="0"/>
+              <a:rPr lang="en-US"/>
               <a:t>Second level</a:t>
             </a:r>
           </a:p>
           <a:p>
             <a:pPr lvl="2"/>
             <a:r>
-              <a:rPr lang="en-US" smtClean="0"/>
+              <a:rPr lang="en-US"/>
               <a:t>Third level</a:t>
             </a:r>
           </a:p>
           <a:p>
             <a:pPr lvl="3"/>
             <a:r>
-              <a:rPr lang="en-US" smtClean="0"/>
+              <a:rPr lang="en-US"/>
               <a:t>Fourth level</a:t>
             </a:r>
           </a:p>
           <a:p>
             <a:pPr lvl="4"/>
             <a:r>
-              <a:rPr lang="en-US" smtClean="0"/>
+              <a:rPr lang="en-US"/>
               <a:t>Fifth level</a:t>
             </a:r>
-            <a:endParaRPr lang="en-US"/>
           </a:p>
         </p:txBody>
       </p:sp>
@@ -2725,38 +2668,37 @@
           <a:p>
             <a:pPr lvl="0"/>
             <a:r>
-              <a:rPr lang="en-US" smtClean="0"/>
+              <a:rPr lang="en-US"/>
               <a:t>Click to edit Master text styles</a:t>
             </a:r>
           </a:p>
           <a:p>
             <a:pPr lvl="1"/>
             <a:r>
-              <a:rPr lang="en-US" smtClean="0"/>
+              <a:rPr lang="en-US"/>
               <a:t>Second level</a:t>
             </a:r>
           </a:p>
           <a:p>
             <a:pPr lvl="2"/>
             <a:r>
-              <a:rPr lang="en-US" smtClean="0"/>
+              <a:rPr lang="en-US"/>
               <a:t>Third level</a:t>
             </a:r>
           </a:p>
           <a:p>
             <a:pPr lvl="3"/>
             <a:r>
-              <a:rPr lang="en-US" smtClean="0"/>
+              <a:rPr lang="en-US"/>
               <a:t>Fourth level</a:t>
             </a:r>
           </a:p>
           <a:p>
             <a:pPr lvl="4"/>
             <a:r>
-              <a:rPr lang="en-US" smtClean="0"/>
+              <a:rPr lang="en-US"/>
               <a:t>Fifth level</a:t>
             </a:r>
-            <a:endParaRPr lang="en-US"/>
           </a:p>
         </p:txBody>
       </p:sp>
@@ -2777,7 +2719,7 @@
           <a:p>
             <a:fld id="{5BCAD085-E8A6-8845-BD4E-CB4CCA059FC4}" type="datetimeFigureOut">
               <a:rPr lang="en-US" smtClean="0"/>
-              <a:t>1/27/13</a:t>
+              <a:t>9/21/26</a:t>
             </a:fld>
             <a:endParaRPr lang="en-US"/>
           </a:p>
@@ -2875,10 +2817,9 @@
           </a:lstStyle>
           <a:p>
             <a:r>
-              <a:rPr lang="en-US" smtClean="0"/>
+              <a:rPr lang="en-US"/>
               <a:t>Click to edit Master title style</a:t>
             </a:r>
-            <a:endParaRPr lang="en-US"/>
           </a:p>
         </p:txBody>
       </p:sp>
@@ -2941,7 +2882,7 @@
           <a:p>
             <a:pPr lvl="0"/>
             <a:r>
-              <a:rPr lang="en-US" smtClean="0"/>
+              <a:rPr lang="en-US"/>
               <a:t>Click to edit Master text styles</a:t>
             </a:r>
           </a:p>
@@ -2997,38 +2938,37 @@
           <a:p>
             <a:pPr lvl="0"/>
             <a:r>
-              <a:rPr lang="en-US" smtClean="0"/>
+              <a:rPr lang="en-US"/>
               <a:t>Click to edit Master text styles</a:t>
             </a:r>
           </a:p>
           <a:p>
             <a:pPr lvl="1"/>
             <a:r>
-              <a:rPr lang="en-US" smtClean="0"/>
+              <a:rPr lang="en-US"/>
               <a:t>Second level</a:t>
             </a:r>
           </a:p>
           <a:p>
             <a:pPr lvl="2"/>
             <a:r>
-              <a:rPr lang="en-US" smtClean="0"/>
+              <a:rPr lang="en-US"/>
               <a:t>Third level</a:t>
             </a:r>
           </a:p>
           <a:p>
             <a:pPr lvl="3"/>
             <a:r>
-              <a:rPr lang="en-US" smtClean="0"/>
+              <a:rPr lang="en-US"/>
               <a:t>Fourth level</a:t>
             </a:r>
           </a:p>
           <a:p>
             <a:pPr lvl="4"/>
             <a:r>
-              <a:rPr lang="en-US" smtClean="0"/>
+              <a:rPr lang="en-US"/>
               <a:t>Fifth level</a:t>
             </a:r>
-            <a:endParaRPr lang="en-US"/>
           </a:p>
         </p:txBody>
       </p:sp>
@@ -3091,7 +3031,7 @@
           <a:p>
             <a:pPr lvl="0"/>
             <a:r>
-              <a:rPr lang="en-US" smtClean="0"/>
+              <a:rPr lang="en-US"/>
               <a:t>Click to edit Master text styles</a:t>
             </a:r>
           </a:p>
@@ -3147,38 +3087,37 @@
           <a:p>
             <a:pPr lvl="0"/>
             <a:r>
-              <a:rPr lang="en-US" smtClean="0"/>
+              <a:rPr lang="en-US"/>
               <a:t>Click to edit Master text styles</a:t>
             </a:r>
           </a:p>
           <a:p>
             <a:pPr lvl="1"/>
             <a:r>
-              <a:rPr lang="en-US" smtClean="0"/>
+              <a:rPr lang="en-US"/>
               <a:t>Second level</a:t>
             </a:r>
           </a:p>
           <a:p>
             <a:pPr lvl="2"/>
             <a:r>
-              <a:rPr lang="en-US" smtClean="0"/>
+              <a:rPr lang="en-US"/>
               <a:t>Third level</a:t>
             </a:r>
           </a:p>
           <a:p>
             <a:pPr lvl="3"/>
             <a:r>
-              <a:rPr lang="en-US" smtClean="0"/>
+              <a:rPr lang="en-US"/>
               <a:t>Fourth level</a:t>
             </a:r>
           </a:p>
           <a:p>
             <a:pPr lvl="4"/>
             <a:r>
-              <a:rPr lang="en-US" smtClean="0"/>
+              <a:rPr lang="en-US"/>
               <a:t>Fifth level</a:t>
             </a:r>
-            <a:endParaRPr lang="en-US"/>
           </a:p>
         </p:txBody>
       </p:sp>
@@ -3199,7 +3138,7 @@
           <a:p>
             <a:fld id="{5BCAD085-E8A6-8845-BD4E-CB4CCA059FC4}" type="datetimeFigureOut">
               <a:rPr lang="en-US" smtClean="0"/>
-              <a:t>1/27/13</a:t>
+              <a:t>9/21/26</a:t>
             </a:fld>
             <a:endParaRPr lang="en-US"/>
           </a:p>
@@ -3293,10 +3232,9 @@
           <a:lstStyle/>
           <a:p>
             <a:r>
-              <a:rPr lang="en-US" smtClean="0"/>
+              <a:rPr lang="en-US"/>
               <a:t>Click to edit Master title style</a:t>
             </a:r>
-            <a:endParaRPr lang="en-US"/>
           </a:p>
         </p:txBody>
       </p:sp>
@@ -3317,7 +3255,7 @@
           <a:p>
             <a:fld id="{5BCAD085-E8A6-8845-BD4E-CB4CCA059FC4}" type="datetimeFigureOut">
               <a:rPr lang="en-US" smtClean="0"/>
-              <a:t>1/27/13</a:t>
+              <a:t>9/21/26</a:t>
             </a:fld>
             <a:endParaRPr lang="en-US"/>
           </a:p>
@@ -3412,7 +3350,7 @@
           <a:p>
             <a:fld id="{5BCAD085-E8A6-8845-BD4E-CB4CCA059FC4}" type="datetimeFigureOut">
               <a:rPr lang="en-US" smtClean="0"/>
-              <a:t>1/27/13</a:t>
+              <a:t>9/21/26</a:t>
             </a:fld>
             <a:endParaRPr lang="en-US"/>
           </a:p>
@@ -3515,10 +3453,9 @@
           </a:lstStyle>
           <a:p>
             <a:r>
-              <a:rPr lang="en-US" smtClean="0"/>
+              <a:rPr lang="en-US"/>
               <a:t>Click to edit Master title style</a:t>
             </a:r>
-            <a:endParaRPr lang="en-US"/>
           </a:p>
         </p:txBody>
       </p:sp>
@@ -3572,38 +3509,37 @@
           <a:p>
             <a:pPr lvl="0"/>
             <a:r>
-              <a:rPr lang="en-US" smtClean="0"/>
+              <a:rPr lang="en-US"/>
               <a:t>Click to edit Master text styles</a:t>
             </a:r>
           </a:p>
           <a:p>
             <a:pPr lvl="1"/>
             <a:r>
-              <a:rPr lang="en-US" smtClean="0"/>
+              <a:rPr lang="en-US"/>
               <a:t>Second level</a:t>
             </a:r>
           </a:p>
           <a:p>
             <a:pPr lvl="2"/>
             <a:r>
-              <a:rPr lang="en-US" smtClean="0"/>
+              <a:rPr lang="en-US"/>
               <a:t>Third level</a:t>
             </a:r>
           </a:p>
           <a:p>
             <a:pPr lvl="3"/>
             <a:r>
-              <a:rPr lang="en-US" smtClean="0"/>
+              <a:rPr lang="en-US"/>
               <a:t>Fourth level</a:t>
             </a:r>
           </a:p>
           <a:p>
             <a:pPr lvl="4"/>
             <a:r>
-              <a:rPr lang="en-US" smtClean="0"/>
+              <a:rPr lang="en-US"/>
               <a:t>Fifth level</a:t>
             </a:r>
-            <a:endParaRPr lang="en-US"/>
           </a:p>
         </p:txBody>
       </p:sp>
@@ -3666,7 +3602,7 @@
           <a:p>
             <a:pPr lvl="0"/>
             <a:r>
-              <a:rPr lang="en-US" smtClean="0"/>
+              <a:rPr lang="en-US"/>
               <a:t>Click to edit Master text styles</a:t>
             </a:r>
           </a:p>
@@ -3689,7 +3625,7 @@
           <a:p>
             <a:fld id="{5BCAD085-E8A6-8845-BD4E-CB4CCA059FC4}" type="datetimeFigureOut">
               <a:rPr lang="en-US" smtClean="0"/>
-              <a:t>1/27/13</a:t>
+              <a:t>9/21/26</a:t>
             </a:fld>
             <a:endParaRPr lang="en-US"/>
           </a:p>
@@ -3792,10 +3728,9 @@
           </a:lstStyle>
           <a:p>
             <a:r>
-              <a:rPr lang="en-US" smtClean="0"/>
+              <a:rPr lang="en-US"/>
               <a:t>Click to edit Master title style</a:t>
             </a:r>
-            <a:endParaRPr lang="en-US"/>
           </a:p>
         </p:txBody>
       </p:sp>
@@ -3919,7 +3854,7 @@
           <a:p>
             <a:pPr lvl="0"/>
             <a:r>
-              <a:rPr lang="en-US" smtClean="0"/>
+              <a:rPr lang="en-US"/>
               <a:t>Click to edit Master text styles</a:t>
             </a:r>
           </a:p>
@@ -3942,7 +3877,7 @@
           <a:p>
             <a:fld id="{5BCAD085-E8A6-8845-BD4E-CB4CCA059FC4}" type="datetimeFigureOut">
               <a:rPr lang="en-US" smtClean="0"/>
-              <a:t>1/27/13</a:t>
+              <a:t>9/21/26</a:t>
             </a:fld>
             <a:endParaRPr lang="en-US"/>
           </a:p>
@@ -4051,10 +3986,9 @@
           <a:lstStyle/>
           <a:p>
             <a:r>
-              <a:rPr lang="en-US" smtClean="0"/>
+              <a:rPr lang="en-US"/>
               <a:t>Click to edit Master title style</a:t>
             </a:r>
-            <a:endParaRPr lang="en-US"/>
           </a:p>
         </p:txBody>
       </p:sp>
@@ -4085,38 +4019,37 @@
           <a:p>
             <a:pPr lvl="0"/>
             <a:r>
-              <a:rPr lang="en-US" smtClean="0"/>
+              <a:rPr lang="en-US"/>
               <a:t>Click to edit Master text styles</a:t>
             </a:r>
           </a:p>
           <a:p>
             <a:pPr lvl="1"/>
             <a:r>
-              <a:rPr lang="en-US" smtClean="0"/>
+              <a:rPr lang="en-US"/>
               <a:t>Second level</a:t>
             </a:r>
           </a:p>
           <a:p>
             <a:pPr lvl="2"/>
             <a:r>
-              <a:rPr lang="en-US" smtClean="0"/>
+              <a:rPr lang="en-US"/>
               <a:t>Third level</a:t>
             </a:r>
           </a:p>
           <a:p>
             <a:pPr lvl="3"/>
             <a:r>
-              <a:rPr lang="en-US" smtClean="0"/>
+              <a:rPr lang="en-US"/>
               <a:t>Fourth level</a:t>
             </a:r>
           </a:p>
           <a:p>
             <a:pPr lvl="4"/>
             <a:r>
-              <a:rPr lang="en-US" smtClean="0"/>
+              <a:rPr lang="en-US"/>
               <a:t>Fifth level</a:t>
             </a:r>
-            <a:endParaRPr lang="en-US"/>
           </a:p>
         </p:txBody>
       </p:sp>
@@ -4155,7 +4088,7 @@
           <a:p>
             <a:fld id="{5BCAD085-E8A6-8845-BD4E-CB4CCA059FC4}" type="datetimeFigureOut">
               <a:rPr lang="en-US" smtClean="0"/>
-              <a:t>1/27/13</a:t>
+              <a:t>9/21/26</a:t>
             </a:fld>
             <a:endParaRPr lang="en-US"/>
           </a:p>
@@ -4514,7 +4447,7 @@
 </file>
 
 <file path=ppt/slides/slide1.xml><?xml version="1.0" encoding="utf-8"?>
-<p:sld xmlns:a="http://schemas.openxmlformats.org/drawingml/2006/main" xmlns:p="http://schemas.openxmlformats.org/presentationml/2006/main" xmlns:r="http://schemas.openxmlformats.org/officeDocument/2006/relationships">
+<p:sld xmlns:a="http://schemas.openxmlformats.org/drawingml/2006/main" xmlns:r="http://schemas.openxmlformats.org/officeDocument/2006/relationships" xmlns:p="http://schemas.openxmlformats.org/presentationml/2006/main">
   <p:cSld>
     <p:spTree>
       <p:nvGrpSpPr>
@@ -4522,7 +4455,14 @@
         <p:cNvGrpSpPr/>
         <p:nvPr/>
       </p:nvGrpSpPr>
-      <p:grpSpPr/>
+      <p:grpSpPr>
+        <a:xfrm>
+          <a:off x="0" y="0"/>
+          <a:ext cx="0" cy="0"/>
+          <a:chOff x="0" y="0"/>
+          <a:chExt cx="0" cy="0"/>
+        </a:xfrm>
+      </p:grpSpPr>
       <p:sp>
         <p:nvSpPr>
           <p:cNvPr id="2" name="TextBox 1"/>
@@ -4540,7 +4480,7 @@
           <a:noFill/>
         </p:spPr>
         <p:txBody>
-          <a:bodyPr wrap="square" lIns="0" rIns="0" tIns="0" bIns="0" anchor="t">
+          <a:bodyPr wrap="square" lIns="0" tIns="0" rIns="0" bIns="0" anchor="t">
             <a:spAutoFit/>
           </a:bodyPr>
           <a:lstStyle/>
@@ -4575,7 +4515,7 @@
           <a:noFill/>
         </p:spPr>
         <p:txBody>
-          <a:bodyPr wrap="square" lIns="0" rIns="0" tIns="0" bIns="0" anchor="t">
+          <a:bodyPr wrap="square" lIns="0" tIns="0" rIns="0" bIns="0" anchor="t">
             <a:spAutoFit/>
           </a:bodyPr>
           <a:lstStyle/>
@@ -4645,7 +4585,7 @@
           <a:noFill/>
         </p:spPr>
         <p:txBody>
-          <a:bodyPr wrap="square" lIns="0" rIns="0" tIns="0" bIns="0" anchor="t">
+          <a:bodyPr wrap="square" lIns="0" tIns="0" rIns="0" bIns="0" anchor="t">
             <a:spAutoFit/>
           </a:bodyPr>
           <a:lstStyle/>
@@ -4680,7 +4620,7 @@
           <a:noFill/>
         </p:spPr>
         <p:txBody>
-          <a:bodyPr wrap="square" lIns="0" rIns="0" tIns="0" bIns="0" anchor="t">
+          <a:bodyPr wrap="square" lIns="0" tIns="0" rIns="0" bIns="0" anchor="t">
             <a:spAutoFit/>
           </a:bodyPr>
           <a:lstStyle/>
@@ -4711,7 +4651,7 @@
           <p:nvPr/>
         </p:nvPicPr>
         <p:blipFill>
-          <a:blip r:embed="rId2"/>
+          <a:blip r:embed="rId3"/>
           <a:stretch>
             <a:fillRect/>
           </a:stretch>
@@ -4778,7 +4718,7 @@
           <a:noFill/>
         </p:spPr>
         <p:txBody>
-          <a:bodyPr wrap="square" lIns="0" rIns="0" tIns="0" bIns="0" anchor="t">
+          <a:bodyPr wrap="square" lIns="0" tIns="0" rIns="0" bIns="0" anchor="t">
             <a:spAutoFit/>
           </a:bodyPr>
           <a:lstStyle/>
@@ -4813,7 +4753,7 @@
           <a:noFill/>
         </p:spPr>
         <p:txBody>
-          <a:bodyPr wrap="square" lIns="0" rIns="0" tIns="0" bIns="0" anchor="t">
+          <a:bodyPr wrap="square" lIns="0" tIns="0" rIns="0" bIns="0" anchor="t">
             <a:spAutoFit/>
           </a:bodyPr>
           <a:lstStyle/>
@@ -4848,7 +4788,7 @@
           <a:noFill/>
         </p:spPr>
         <p:txBody>
-          <a:bodyPr wrap="square" lIns="0" rIns="0" tIns="0" bIns="0" anchor="t">
+          <a:bodyPr wrap="square" lIns="0" tIns="0" rIns="0" bIns="0" anchor="t">
             <a:spAutoFit/>
           </a:bodyPr>
           <a:lstStyle/>
@@ -4918,7 +4858,7 @@
           <a:noFill/>
         </p:spPr>
         <p:txBody>
-          <a:bodyPr wrap="square" lIns="0" rIns="0" tIns="0" bIns="0" anchor="t">
+          <a:bodyPr wrap="square" lIns="0" tIns="0" rIns="0" bIns="0" anchor="t">
             <a:spAutoFit/>
           </a:bodyPr>
           <a:lstStyle/>
@@ -4953,7 +4893,7 @@
           <a:noFill/>
         </p:spPr>
         <p:txBody>
-          <a:bodyPr wrap="square" lIns="0" rIns="0" tIns="0" bIns="0" anchor="t">
+          <a:bodyPr wrap="square" lIns="0" tIns="0" rIns="0" bIns="0" anchor="t">
             <a:spAutoFit/>
           </a:bodyPr>
           <a:lstStyle/>
@@ -4988,7 +4928,7 @@
           <a:noFill/>
         </p:spPr>
         <p:txBody>
-          <a:bodyPr wrap="square" lIns="0" rIns="0" tIns="0" bIns="0" anchor="t">
+          <a:bodyPr wrap="square" lIns="0" tIns="0" rIns="0" bIns="0" anchor="t">
             <a:spAutoFit/>
           </a:bodyPr>
           <a:lstStyle/>
@@ -5058,7 +4998,7 @@
           <a:noFill/>
         </p:spPr>
         <p:txBody>
-          <a:bodyPr wrap="square" lIns="0" rIns="0" tIns="0" bIns="0" anchor="t">
+          <a:bodyPr wrap="square" lIns="0" tIns="0" rIns="0" bIns="0" anchor="t">
             <a:spAutoFit/>
           </a:bodyPr>
           <a:lstStyle/>
@@ -5093,7 +5033,7 @@
           <a:noFill/>
         </p:spPr>
         <p:txBody>
-          <a:bodyPr wrap="square" lIns="0" rIns="0" tIns="0" bIns="0" anchor="t">
+          <a:bodyPr wrap="square" lIns="0" tIns="0" rIns="0" bIns="0" anchor="t">
             <a:spAutoFit/>
           </a:bodyPr>
           <a:lstStyle/>
@@ -5128,7 +5068,7 @@
           <a:noFill/>
         </p:spPr>
         <p:txBody>
-          <a:bodyPr wrap="square" lIns="0" rIns="0" tIns="0" bIns="0" anchor="t">
+          <a:bodyPr wrap="square" lIns="0" tIns="0" rIns="0" bIns="0" anchor="t">
             <a:spAutoFit/>
           </a:bodyPr>
           <a:lstStyle/>
@@ -5163,7 +5103,7 @@
           <a:noFill/>
         </p:spPr>
         <p:txBody>
-          <a:bodyPr wrap="square" lIns="0" rIns="0" tIns="0" bIns="0" anchor="t">
+          <a:bodyPr wrap="square" lIns="0" tIns="0" rIns="0" bIns="0" anchor="t">
             <a:spAutoFit/>
           </a:bodyPr>
           <a:lstStyle/>
@@ -5198,7 +5138,7 @@
           <a:noFill/>
         </p:spPr>
         <p:txBody>
-          <a:bodyPr wrap="square" lIns="0" rIns="0" tIns="0" bIns="0" anchor="t">
+          <a:bodyPr wrap="square" lIns="0" tIns="0" rIns="0" bIns="0" anchor="t">
             <a:spAutoFit/>
           </a:bodyPr>
           <a:lstStyle/>
@@ -5225,7 +5165,7 @@
 </file>
 
 <file path=ppt/slides/slide10.xml><?xml version="1.0" encoding="utf-8"?>
-<p:sld xmlns:a="http://schemas.openxmlformats.org/drawingml/2006/main" xmlns:p="http://schemas.openxmlformats.org/presentationml/2006/main" xmlns:r="http://schemas.openxmlformats.org/officeDocument/2006/relationships">
+<p:sld xmlns:a="http://schemas.openxmlformats.org/drawingml/2006/main" xmlns:r="http://schemas.openxmlformats.org/officeDocument/2006/relationships" xmlns:p="http://schemas.openxmlformats.org/presentationml/2006/main">
   <p:cSld>
     <p:spTree>
       <p:nvGrpSpPr>
@@ -5233,7 +5173,14 @@
         <p:cNvGrpSpPr/>
         <p:nvPr/>
       </p:nvGrpSpPr>
-      <p:grpSpPr/>
+      <p:grpSpPr>
+        <a:xfrm>
+          <a:off x="0" y="0"/>
+          <a:ext cx="0" cy="0"/>
+          <a:chOff x="0" y="0"/>
+          <a:chExt cx="0" cy="0"/>
+        </a:xfrm>
+      </p:grpSpPr>
       <p:sp>
         <p:nvSpPr>
           <p:cNvPr id="2" name="TextBox 1"/>
@@ -5251,7 +5198,7 @@
           <a:noFill/>
         </p:spPr>
         <p:txBody>
-          <a:bodyPr wrap="square" lIns="0" rIns="0" tIns="0" bIns="0" anchor="t">
+          <a:bodyPr wrap="square" lIns="0" tIns="0" rIns="0" bIns="0" anchor="t">
             <a:spAutoFit/>
           </a:bodyPr>
           <a:lstStyle/>
@@ -5286,7 +5233,7 @@
           <a:noFill/>
         </p:spPr>
         <p:txBody>
-          <a:bodyPr wrap="square" lIns="0" rIns="0" tIns="0" bIns="0" anchor="t">
+          <a:bodyPr wrap="square" lIns="0" tIns="0" rIns="0" bIns="0" anchor="t">
             <a:spAutoFit/>
           </a:bodyPr>
           <a:lstStyle/>
@@ -5356,7 +5303,7 @@
           <a:noFill/>
         </p:spPr>
         <p:txBody>
-          <a:bodyPr wrap="square" lIns="0" rIns="0" tIns="0" bIns="0" anchor="t">
+          <a:bodyPr wrap="square" lIns="0" tIns="0" rIns="0" bIns="0" anchor="t">
             <a:spAutoFit/>
           </a:bodyPr>
           <a:lstStyle/>
@@ -5391,7 +5338,7 @@
           <a:noFill/>
         </p:spPr>
         <p:txBody>
-          <a:bodyPr wrap="square" lIns="0" rIns="0" tIns="0" bIns="0" anchor="t">
+          <a:bodyPr wrap="square" lIns="0" tIns="0" rIns="0" bIns="0" anchor="t">
             <a:spAutoFit/>
           </a:bodyPr>
           <a:lstStyle/>
@@ -5422,7 +5369,7 @@
           <p:nvPr/>
         </p:nvPicPr>
         <p:blipFill>
-          <a:blip r:embed="rId2"/>
+          <a:blip r:embed="rId3"/>
           <a:stretch>
             <a:fillRect/>
           </a:stretch>
@@ -5489,7 +5436,7 @@
           <a:noFill/>
         </p:spPr>
         <p:txBody>
-          <a:bodyPr wrap="square" lIns="0" rIns="0" tIns="0" bIns="0" anchor="t">
+          <a:bodyPr wrap="square" lIns="0" tIns="0" rIns="0" bIns="0" anchor="t">
             <a:spAutoFit/>
           </a:bodyPr>
           <a:lstStyle/>
@@ -5524,7 +5471,7 @@
           <a:noFill/>
         </p:spPr>
         <p:txBody>
-          <a:bodyPr wrap="square" lIns="0" rIns="0" tIns="0" bIns="0" anchor="t">
+          <a:bodyPr wrap="square" lIns="0" tIns="0" rIns="0" bIns="0" anchor="t">
             <a:spAutoFit/>
           </a:bodyPr>
           <a:lstStyle/>
@@ -5559,7 +5506,7 @@
           <a:noFill/>
         </p:spPr>
         <p:txBody>
-          <a:bodyPr wrap="square" lIns="0" rIns="0" tIns="0" bIns="0" anchor="t">
+          <a:bodyPr wrap="square" lIns="0" tIns="0" rIns="0" bIns="0" anchor="t">
             <a:spAutoFit/>
           </a:bodyPr>
           <a:lstStyle/>
@@ -5629,7 +5576,7 @@
           <a:noFill/>
         </p:spPr>
         <p:txBody>
-          <a:bodyPr wrap="square" lIns="0" rIns="0" tIns="0" bIns="0" anchor="t">
+          <a:bodyPr wrap="square" lIns="0" tIns="0" rIns="0" bIns="0" anchor="t">
             <a:spAutoFit/>
           </a:bodyPr>
           <a:lstStyle/>
@@ -5664,7 +5611,7 @@
           <a:noFill/>
         </p:spPr>
         <p:txBody>
-          <a:bodyPr wrap="square" lIns="0" rIns="0" tIns="0" bIns="0" anchor="t">
+          <a:bodyPr wrap="square" lIns="0" tIns="0" rIns="0" bIns="0" anchor="t">
             <a:spAutoFit/>
           </a:bodyPr>
           <a:lstStyle/>
@@ -5699,7 +5646,7 @@
           <a:noFill/>
         </p:spPr>
         <p:txBody>
-          <a:bodyPr wrap="square" lIns="0" rIns="0" tIns="0" bIns="0" anchor="t">
+          <a:bodyPr wrap="square" lIns="0" tIns="0" rIns="0" bIns="0" anchor="t">
             <a:spAutoFit/>
           </a:bodyPr>
           <a:lstStyle/>
@@ -5769,7 +5716,7 @@
           <a:noFill/>
         </p:spPr>
         <p:txBody>
-          <a:bodyPr wrap="square" lIns="0" rIns="0" tIns="0" bIns="0" anchor="t">
+          <a:bodyPr wrap="square" lIns="0" tIns="0" rIns="0" bIns="0" anchor="t">
             <a:spAutoFit/>
           </a:bodyPr>
           <a:lstStyle/>
@@ -5804,7 +5751,7 @@
           <a:noFill/>
         </p:spPr>
         <p:txBody>
-          <a:bodyPr wrap="square" lIns="0" rIns="0" tIns="0" bIns="0" anchor="t">
+          <a:bodyPr wrap="square" lIns="0" tIns="0" rIns="0" bIns="0" anchor="t">
             <a:spAutoFit/>
           </a:bodyPr>
           <a:lstStyle/>
@@ -5839,7 +5786,7 @@
           <a:noFill/>
         </p:spPr>
         <p:txBody>
-          <a:bodyPr wrap="square" lIns="0" rIns="0" tIns="0" bIns="0" anchor="t">
+          <a:bodyPr wrap="square" lIns="0" tIns="0" rIns="0" bIns="0" anchor="t">
             <a:spAutoFit/>
           </a:bodyPr>
           <a:lstStyle/>
@@ -5909,7 +5856,7 @@
           <a:noFill/>
         </p:spPr>
         <p:txBody>
-          <a:bodyPr wrap="square" lIns="0" rIns="0" tIns="0" bIns="0" anchor="t">
+          <a:bodyPr wrap="square" lIns="0" tIns="0" rIns="0" bIns="0" anchor="t">
             <a:spAutoFit/>
           </a:bodyPr>
           <a:lstStyle/>
@@ -5944,7 +5891,7 @@
           <a:noFill/>
         </p:spPr>
         <p:txBody>
-          <a:bodyPr wrap="square" lIns="0" rIns="0" tIns="0" bIns="0" anchor="t">
+          <a:bodyPr wrap="square" lIns="0" tIns="0" rIns="0" bIns="0" anchor="t">
             <a:spAutoFit/>
           </a:bodyPr>
           <a:lstStyle/>
@@ -5979,7 +5926,7 @@
           <a:noFill/>
         </p:spPr>
         <p:txBody>
-          <a:bodyPr wrap="square" lIns="0" rIns="0" tIns="0" bIns="0" anchor="t">
+          <a:bodyPr wrap="square" lIns="0" tIns="0" rIns="0" bIns="0" anchor="t">
             <a:spAutoFit/>
           </a:bodyPr>
           <a:lstStyle/>
@@ -6014,7 +5961,7 @@
           <a:noFill/>
         </p:spPr>
         <p:txBody>
-          <a:bodyPr wrap="square" lIns="0" rIns="0" tIns="0" bIns="0" anchor="t">
+          <a:bodyPr wrap="square" lIns="0" tIns="0" rIns="0" bIns="0" anchor="t">
             <a:spAutoFit/>
           </a:bodyPr>
           <a:lstStyle/>
@@ -6049,7 +5996,7 @@
           <a:noFill/>
         </p:spPr>
         <p:txBody>
-          <a:bodyPr wrap="square" lIns="0" rIns="0" tIns="0" bIns="0" anchor="t">
+          <a:bodyPr wrap="square" lIns="0" tIns="0" rIns="0" bIns="0" anchor="t">
             <a:spAutoFit/>
           </a:bodyPr>
           <a:lstStyle/>
@@ -6076,7 +6023,7 @@
 </file>
 
 <file path=ppt/slides/slide11.xml><?xml version="1.0" encoding="utf-8"?>
-<p:sld xmlns:a="http://schemas.openxmlformats.org/drawingml/2006/main" xmlns:p="http://schemas.openxmlformats.org/presentationml/2006/main" xmlns:r="http://schemas.openxmlformats.org/officeDocument/2006/relationships">
+<p:sld xmlns:a="http://schemas.openxmlformats.org/drawingml/2006/main" xmlns:r="http://schemas.openxmlformats.org/officeDocument/2006/relationships" xmlns:p="http://schemas.openxmlformats.org/presentationml/2006/main">
   <p:cSld>
     <p:spTree>
       <p:nvGrpSpPr>
@@ -6084,7 +6031,14 @@
         <p:cNvGrpSpPr/>
         <p:nvPr/>
       </p:nvGrpSpPr>
-      <p:grpSpPr/>
+      <p:grpSpPr>
+        <a:xfrm>
+          <a:off x="0" y="0"/>
+          <a:ext cx="0" cy="0"/>
+          <a:chOff x="0" y="0"/>
+          <a:chExt cx="0" cy="0"/>
+        </a:xfrm>
+      </p:grpSpPr>
       <p:sp>
         <p:nvSpPr>
           <p:cNvPr id="2" name="TextBox 1"/>
@@ -6102,7 +6056,7 @@
           <a:noFill/>
         </p:spPr>
         <p:txBody>
-          <a:bodyPr wrap="square" lIns="0" rIns="0" tIns="0" bIns="0" anchor="t">
+          <a:bodyPr wrap="square" lIns="0" tIns="0" rIns="0" bIns="0" anchor="t">
             <a:spAutoFit/>
           </a:bodyPr>
           <a:lstStyle/>
@@ -6137,7 +6091,7 @@
           <a:noFill/>
         </p:spPr>
         <p:txBody>
-          <a:bodyPr wrap="square" lIns="0" rIns="0" tIns="0" bIns="0" anchor="t">
+          <a:bodyPr wrap="square" lIns="0" tIns="0" rIns="0" bIns="0" anchor="t">
             <a:spAutoFit/>
           </a:bodyPr>
           <a:lstStyle/>
@@ -6207,7 +6161,7 @@
           <a:noFill/>
         </p:spPr>
         <p:txBody>
-          <a:bodyPr wrap="square" lIns="0" rIns="0" tIns="0" bIns="0" anchor="t">
+          <a:bodyPr wrap="square" lIns="0" tIns="0" rIns="0" bIns="0" anchor="t">
             <a:spAutoFit/>
           </a:bodyPr>
           <a:lstStyle/>
@@ -6242,7 +6196,7 @@
           <a:noFill/>
         </p:spPr>
         <p:txBody>
-          <a:bodyPr wrap="square" lIns="0" rIns="0" tIns="0" bIns="0" anchor="t">
+          <a:bodyPr wrap="square" lIns="0" tIns="0" rIns="0" bIns="0" anchor="t">
             <a:spAutoFit/>
           </a:bodyPr>
           <a:lstStyle/>
@@ -6283,25 +6237,35 @@
                 <a:tableStyleId>{5C22544A-7EE6-4342-B048-85BDC9FD1C3A}</a:tableStyleId>
               </a:tblPr>
               <a:tblGrid>
-                <a:gridCol w="2834640"/>
-                <a:gridCol w="4020159"/>
-                <a:gridCol w="4020159"/>
+                <a:gridCol w="2834640">
+                  <a:extLst>
+                    <a:ext uri="{9D8B030D-6E8A-4147-A177-3AD203B41FA5}">
+                      <a16:colId xmlns:a16="http://schemas.microsoft.com/office/drawing/2014/main" val="20000"/>
+                    </a:ext>
+                  </a:extLst>
+                </a:gridCol>
+                <a:gridCol w="4020159">
+                  <a:extLst>
+                    <a:ext uri="{9D8B030D-6E8A-4147-A177-3AD203B41FA5}">
+                      <a16:colId xmlns:a16="http://schemas.microsoft.com/office/drawing/2014/main" val="20001"/>
+                    </a:ext>
+                  </a:extLst>
+                </a:gridCol>
+                <a:gridCol w="4020159">
+                  <a:extLst>
+                    <a:ext uri="{9D8B030D-6E8A-4147-A177-3AD203B41FA5}">
+                      <a16:colId xmlns:a16="http://schemas.microsoft.com/office/drawing/2014/main" val="20002"/>
+                    </a:ext>
+                  </a:extLst>
+                </a:gridCol>
               </a:tblGrid>
               <a:tr h="391885">
                 <a:tc>
                   <a:txBody>
-                    <a:bodyPr wrap="square"/>
+                    <a:bodyPr/>
                     <a:lstStyle/>
                     <a:p>
-                      <a:r>
-                        <a:rPr sz="850" b="0" i="0" spc="120">
-                          <a:solidFill>
-                            <a:srgbClr val="71757B"/>
-                          </a:solidFill>
-                          <a:latin typeface="Menlo"/>
-                        </a:rPr>
-                        <a:t/>
-                      </a:r>
+                      <a:endParaRPr/>
                     </a:p>
                   </a:txBody>
                   <a:tcPr marL="128016" marT="54864" marB="54864" anchor="ctr">
@@ -6312,7 +6276,7 @@
                 </a:tc>
                 <a:tc>
                   <a:txBody>
-                    <a:bodyPr wrap="square"/>
+                    <a:bodyPr/>
                     <a:lstStyle/>
                     <a:p>
                       <a:r>
@@ -6334,7 +6298,7 @@
                 </a:tc>
                 <a:tc>
                   <a:txBody>
-                    <a:bodyPr wrap="square"/>
+                    <a:bodyPr/>
                     <a:lstStyle/>
                     <a:p>
                       <a:r>
@@ -6354,11 +6318,16 @@
                     </a:solidFill>
                   </a:tcPr>
                 </a:tc>
+                <a:extLst>
+                  <a:ext uri="{0D108BD9-81ED-4DB2-BD59-A6C34878D82A}">
+                    <a16:rowId xmlns:a16="http://schemas.microsoft.com/office/drawing/2014/main" val="10000"/>
+                  </a:ext>
+                </a:extLst>
               </a:tr>
               <a:tr h="391885">
                 <a:tc>
                   <a:txBody>
-                    <a:bodyPr wrap="square"/>
+                    <a:bodyPr/>
                     <a:lstStyle/>
                     <a:p>
                       <a:r>
@@ -6380,7 +6349,7 @@
                 </a:tc>
                 <a:tc>
                   <a:txBody>
-                    <a:bodyPr wrap="square"/>
+                    <a:bodyPr/>
                     <a:lstStyle/>
                     <a:p>
                       <a:r>
@@ -6402,7 +6371,7 @@
                 </a:tc>
                 <a:tc>
                   <a:txBody>
-                    <a:bodyPr wrap="square"/>
+                    <a:bodyPr/>
                     <a:lstStyle/>
                     <a:p>
                       <a:r>
@@ -6422,11 +6391,16 @@
                     </a:solidFill>
                   </a:tcPr>
                 </a:tc>
+                <a:extLst>
+                  <a:ext uri="{0D108BD9-81ED-4DB2-BD59-A6C34878D82A}">
+                    <a16:rowId xmlns:a16="http://schemas.microsoft.com/office/drawing/2014/main" val="10001"/>
+                  </a:ext>
+                </a:extLst>
               </a:tr>
               <a:tr h="391885">
                 <a:tc>
                   <a:txBody>
-                    <a:bodyPr wrap="square"/>
+                    <a:bodyPr/>
                     <a:lstStyle/>
                     <a:p>
                       <a:r>
@@ -6448,7 +6422,7 @@
                 </a:tc>
                 <a:tc>
                   <a:txBody>
-                    <a:bodyPr wrap="square"/>
+                    <a:bodyPr/>
                     <a:lstStyle/>
                     <a:p>
                       <a:r>
@@ -6470,7 +6444,7 @@
                 </a:tc>
                 <a:tc>
                   <a:txBody>
-                    <a:bodyPr wrap="square"/>
+                    <a:bodyPr/>
                     <a:lstStyle/>
                     <a:p>
                       <a:r>
@@ -6490,11 +6464,16 @@
                     </a:solidFill>
                   </a:tcPr>
                 </a:tc>
+                <a:extLst>
+                  <a:ext uri="{0D108BD9-81ED-4DB2-BD59-A6C34878D82A}">
+                    <a16:rowId xmlns:a16="http://schemas.microsoft.com/office/drawing/2014/main" val="10002"/>
+                  </a:ext>
+                </a:extLst>
               </a:tr>
               <a:tr h="391885">
                 <a:tc>
                   <a:txBody>
-                    <a:bodyPr wrap="square"/>
+                    <a:bodyPr/>
                     <a:lstStyle/>
                     <a:p>
                       <a:r>
@@ -6516,7 +6495,7 @@
                 </a:tc>
                 <a:tc>
                   <a:txBody>
-                    <a:bodyPr wrap="square"/>
+                    <a:bodyPr/>
                     <a:lstStyle/>
                     <a:p>
                       <a:r>
@@ -6538,7 +6517,7 @@
                 </a:tc>
                 <a:tc>
                   <a:txBody>
-                    <a:bodyPr wrap="square"/>
+                    <a:bodyPr/>
                     <a:lstStyle/>
                     <a:p>
                       <a:r>
@@ -6558,11 +6537,16 @@
                     </a:solidFill>
                   </a:tcPr>
                 </a:tc>
+                <a:extLst>
+                  <a:ext uri="{0D108BD9-81ED-4DB2-BD59-A6C34878D82A}">
+                    <a16:rowId xmlns:a16="http://schemas.microsoft.com/office/drawing/2014/main" val="10003"/>
+                  </a:ext>
+                </a:extLst>
               </a:tr>
               <a:tr h="391885">
                 <a:tc>
                   <a:txBody>
-                    <a:bodyPr wrap="square"/>
+                    <a:bodyPr/>
                     <a:lstStyle/>
                     <a:p>
                       <a:r>
@@ -6584,7 +6568,7 @@
                 </a:tc>
                 <a:tc>
                   <a:txBody>
-                    <a:bodyPr wrap="square"/>
+                    <a:bodyPr/>
                     <a:lstStyle/>
                     <a:p>
                       <a:r>
@@ -6606,7 +6590,7 @@
                 </a:tc>
                 <a:tc>
                   <a:txBody>
-                    <a:bodyPr wrap="square"/>
+                    <a:bodyPr/>
                     <a:lstStyle/>
                     <a:p>
                       <a:r>
@@ -6626,11 +6610,16 @@
                     </a:solidFill>
                   </a:tcPr>
                 </a:tc>
+                <a:extLst>
+                  <a:ext uri="{0D108BD9-81ED-4DB2-BD59-A6C34878D82A}">
+                    <a16:rowId xmlns:a16="http://schemas.microsoft.com/office/drawing/2014/main" val="10004"/>
+                  </a:ext>
+                </a:extLst>
               </a:tr>
               <a:tr h="391885">
                 <a:tc>
                   <a:txBody>
-                    <a:bodyPr wrap="square"/>
+                    <a:bodyPr/>
                     <a:lstStyle/>
                     <a:p>
                       <a:r>
@@ -6652,7 +6641,7 @@
                 </a:tc>
                 <a:tc>
                   <a:txBody>
-                    <a:bodyPr wrap="square"/>
+                    <a:bodyPr/>
                     <a:lstStyle/>
                     <a:p>
                       <a:r>
@@ -6674,7 +6663,7 @@
                 </a:tc>
                 <a:tc>
                   <a:txBody>
-                    <a:bodyPr wrap="square"/>
+                    <a:bodyPr/>
                     <a:lstStyle/>
                     <a:p>
                       <a:r>
@@ -6694,11 +6683,16 @@
                     </a:solidFill>
                   </a:tcPr>
                 </a:tc>
+                <a:extLst>
+                  <a:ext uri="{0D108BD9-81ED-4DB2-BD59-A6C34878D82A}">
+                    <a16:rowId xmlns:a16="http://schemas.microsoft.com/office/drawing/2014/main" val="10005"/>
+                  </a:ext>
+                </a:extLst>
               </a:tr>
               <a:tr h="391885">
                 <a:tc>
                   <a:txBody>
-                    <a:bodyPr wrap="square"/>
+                    <a:bodyPr/>
                     <a:lstStyle/>
                     <a:p>
                       <a:r>
@@ -6720,7 +6714,7 @@
                 </a:tc>
                 <a:tc>
                   <a:txBody>
-                    <a:bodyPr wrap="square"/>
+                    <a:bodyPr/>
                     <a:lstStyle/>
                     <a:p>
                       <a:r>
@@ -6742,7 +6736,7 @@
                 </a:tc>
                 <a:tc>
                   <a:txBody>
-                    <a:bodyPr wrap="square"/>
+                    <a:bodyPr/>
                     <a:lstStyle/>
                     <a:p>
                       <a:r>
@@ -6762,6 +6756,11 @@
                     </a:solidFill>
                   </a:tcPr>
                 </a:tc>
+                <a:extLst>
+                  <a:ext uri="{0D108BD9-81ED-4DB2-BD59-A6C34878D82A}">
+                    <a16:rowId xmlns:a16="http://schemas.microsoft.com/office/drawing/2014/main" val="10006"/>
+                  </a:ext>
+                </a:extLst>
               </a:tr>
             </a:tbl>
           </a:graphicData>
@@ -6819,7 +6818,7 @@
           <a:noFill/>
         </p:spPr>
         <p:txBody>
-          <a:bodyPr wrap="square" lIns="0" rIns="0" tIns="0" bIns="0" anchor="t">
+          <a:bodyPr wrap="square" lIns="0" tIns="0" rIns="0" bIns="0" anchor="t">
             <a:spAutoFit/>
           </a:bodyPr>
           <a:lstStyle/>
@@ -6854,7 +6853,7 @@
           <a:noFill/>
         </p:spPr>
         <p:txBody>
-          <a:bodyPr wrap="square" lIns="0" rIns="0" tIns="0" bIns="0" anchor="t">
+          <a:bodyPr wrap="square" lIns="0" tIns="0" rIns="0" bIns="0" anchor="t">
             <a:spAutoFit/>
           </a:bodyPr>
           <a:lstStyle/>
@@ -6889,7 +6888,7 @@
           <a:noFill/>
         </p:spPr>
         <p:txBody>
-          <a:bodyPr wrap="square" lIns="0" rIns="0" tIns="0" bIns="0" anchor="t">
+          <a:bodyPr wrap="square" lIns="0" tIns="0" rIns="0" bIns="0" anchor="t">
             <a:spAutoFit/>
           </a:bodyPr>
           <a:lstStyle/>
@@ -6959,7 +6958,7 @@
           <a:noFill/>
         </p:spPr>
         <p:txBody>
-          <a:bodyPr wrap="square" lIns="0" rIns="0" tIns="0" bIns="0" anchor="t">
+          <a:bodyPr wrap="square" lIns="0" tIns="0" rIns="0" bIns="0" anchor="t">
             <a:spAutoFit/>
           </a:bodyPr>
           <a:lstStyle/>
@@ -6994,7 +6993,7 @@
           <a:noFill/>
         </p:spPr>
         <p:txBody>
-          <a:bodyPr wrap="square" lIns="0" rIns="0" tIns="0" bIns="0" anchor="t">
+          <a:bodyPr wrap="square" lIns="0" tIns="0" rIns="0" bIns="0" anchor="t">
             <a:spAutoFit/>
           </a:bodyPr>
           <a:lstStyle/>
@@ -7029,7 +7028,7 @@
           <a:noFill/>
         </p:spPr>
         <p:txBody>
-          <a:bodyPr wrap="square" lIns="0" rIns="0" tIns="0" bIns="0" anchor="t">
+          <a:bodyPr wrap="square" lIns="0" tIns="0" rIns="0" bIns="0" anchor="t">
             <a:spAutoFit/>
           </a:bodyPr>
           <a:lstStyle/>
@@ -7099,7 +7098,7 @@
           <a:noFill/>
         </p:spPr>
         <p:txBody>
-          <a:bodyPr wrap="square" lIns="0" rIns="0" tIns="0" bIns="0" anchor="t">
+          <a:bodyPr wrap="square" lIns="0" tIns="0" rIns="0" bIns="0" anchor="t">
             <a:spAutoFit/>
           </a:bodyPr>
           <a:lstStyle/>
@@ -7134,7 +7133,7 @@
           <a:noFill/>
         </p:spPr>
         <p:txBody>
-          <a:bodyPr wrap="square" lIns="0" rIns="0" tIns="0" bIns="0" anchor="t">
+          <a:bodyPr wrap="square" lIns="0" tIns="0" rIns="0" bIns="0" anchor="t">
             <a:spAutoFit/>
           </a:bodyPr>
           <a:lstStyle/>
@@ -7169,7 +7168,7 @@
           <a:noFill/>
         </p:spPr>
         <p:txBody>
-          <a:bodyPr wrap="square" lIns="0" rIns="0" tIns="0" bIns="0" anchor="t">
+          <a:bodyPr wrap="square" lIns="0" tIns="0" rIns="0" bIns="0" anchor="t">
             <a:spAutoFit/>
           </a:bodyPr>
           <a:lstStyle/>
@@ -7204,7 +7203,7 @@
           <a:noFill/>
         </p:spPr>
         <p:txBody>
-          <a:bodyPr wrap="square" lIns="0" rIns="0" tIns="0" bIns="0" anchor="t">
+          <a:bodyPr wrap="square" lIns="0" tIns="0" rIns="0" bIns="0" anchor="t">
             <a:spAutoFit/>
           </a:bodyPr>
           <a:lstStyle/>
@@ -7239,7 +7238,7 @@
           <a:noFill/>
         </p:spPr>
         <p:txBody>
-          <a:bodyPr wrap="square" lIns="0" rIns="0" tIns="0" bIns="0" anchor="t">
+          <a:bodyPr wrap="square" lIns="0" tIns="0" rIns="0" bIns="0" anchor="t">
             <a:spAutoFit/>
           </a:bodyPr>
           <a:lstStyle/>
@@ -7266,7 +7265,7 @@
 </file>
 
 <file path=ppt/slides/slide12.xml><?xml version="1.0" encoding="utf-8"?>
-<p:sld xmlns:a="http://schemas.openxmlformats.org/drawingml/2006/main" xmlns:p="http://schemas.openxmlformats.org/presentationml/2006/main" xmlns:r="http://schemas.openxmlformats.org/officeDocument/2006/relationships">
+<p:sld xmlns:a="http://schemas.openxmlformats.org/drawingml/2006/main" xmlns:r="http://schemas.openxmlformats.org/officeDocument/2006/relationships" xmlns:p="http://schemas.openxmlformats.org/presentationml/2006/main">
   <p:cSld>
     <p:spTree>
       <p:nvGrpSpPr>
@@ -7274,7 +7273,14 @@
         <p:cNvGrpSpPr/>
         <p:nvPr/>
       </p:nvGrpSpPr>
-      <p:grpSpPr/>
+      <p:grpSpPr>
+        <a:xfrm>
+          <a:off x="0" y="0"/>
+          <a:ext cx="0" cy="0"/>
+          <a:chOff x="0" y="0"/>
+          <a:chExt cx="0" cy="0"/>
+        </a:xfrm>
+      </p:grpSpPr>
       <p:sp>
         <p:nvSpPr>
           <p:cNvPr id="2" name="TextBox 1"/>
@@ -7292,7 +7298,7 @@
           <a:noFill/>
         </p:spPr>
         <p:txBody>
-          <a:bodyPr wrap="square" lIns="0" rIns="0" tIns="0" bIns="0" anchor="t">
+          <a:bodyPr wrap="square" lIns="0" tIns="0" rIns="0" bIns="0" anchor="t">
             <a:spAutoFit/>
           </a:bodyPr>
           <a:lstStyle/>
@@ -7327,7 +7333,7 @@
           <a:noFill/>
         </p:spPr>
         <p:txBody>
-          <a:bodyPr wrap="square" lIns="0" rIns="0" tIns="0" bIns="0" anchor="t">
+          <a:bodyPr wrap="square" lIns="0" tIns="0" rIns="0" bIns="0" anchor="t">
             <a:spAutoFit/>
           </a:bodyPr>
           <a:lstStyle/>
@@ -7397,7 +7403,7 @@
           <a:noFill/>
         </p:spPr>
         <p:txBody>
-          <a:bodyPr wrap="square" lIns="0" rIns="0" tIns="0" bIns="0" anchor="t">
+          <a:bodyPr wrap="square" lIns="0" tIns="0" rIns="0" bIns="0" anchor="t">
             <a:spAutoFit/>
           </a:bodyPr>
           <a:lstStyle/>
@@ -7432,7 +7438,7 @@
           <a:noFill/>
         </p:spPr>
         <p:txBody>
-          <a:bodyPr wrap="square" lIns="0" rIns="0" tIns="0" bIns="0" anchor="t">
+          <a:bodyPr wrap="square" lIns="0" tIns="0" rIns="0" bIns="0" anchor="t">
             <a:spAutoFit/>
           </a:bodyPr>
           <a:lstStyle/>
@@ -7463,7 +7469,7 @@
           <p:nvPr/>
         </p:nvPicPr>
         <p:blipFill>
-          <a:blip r:embed="rId2"/>
+          <a:blip r:embed="rId3"/>
           <a:stretch>
             <a:fillRect/>
           </a:stretch>
@@ -7530,7 +7536,7 @@
           <a:noFill/>
         </p:spPr>
         <p:txBody>
-          <a:bodyPr wrap="square" lIns="0" rIns="0" tIns="0" bIns="0" anchor="t">
+          <a:bodyPr wrap="square" lIns="0" tIns="0" rIns="0" bIns="0" anchor="t">
             <a:spAutoFit/>
           </a:bodyPr>
           <a:lstStyle/>
@@ -7565,7 +7571,7 @@
           <a:noFill/>
         </p:spPr>
         <p:txBody>
-          <a:bodyPr wrap="square" lIns="0" rIns="0" tIns="0" bIns="0" anchor="t">
+          <a:bodyPr wrap="square" lIns="0" tIns="0" rIns="0" bIns="0" anchor="t">
             <a:spAutoFit/>
           </a:bodyPr>
           <a:lstStyle/>
@@ -7600,7 +7606,7 @@
           <a:noFill/>
         </p:spPr>
         <p:txBody>
-          <a:bodyPr wrap="square" lIns="0" rIns="0" tIns="0" bIns="0" anchor="t">
+          <a:bodyPr wrap="square" lIns="0" tIns="0" rIns="0" bIns="0" anchor="t">
             <a:spAutoFit/>
           </a:bodyPr>
           <a:lstStyle/>
@@ -7670,7 +7676,7 @@
           <a:noFill/>
         </p:spPr>
         <p:txBody>
-          <a:bodyPr wrap="square" lIns="0" rIns="0" tIns="0" bIns="0" anchor="t">
+          <a:bodyPr wrap="square" lIns="0" tIns="0" rIns="0" bIns="0" anchor="t">
             <a:spAutoFit/>
           </a:bodyPr>
           <a:lstStyle/>
@@ -7705,7 +7711,7 @@
           <a:noFill/>
         </p:spPr>
         <p:txBody>
-          <a:bodyPr wrap="square" lIns="0" rIns="0" tIns="0" bIns="0" anchor="t">
+          <a:bodyPr wrap="square" lIns="0" tIns="0" rIns="0" bIns="0" anchor="t">
             <a:spAutoFit/>
           </a:bodyPr>
           <a:lstStyle/>
@@ -7740,7 +7746,7 @@
           <a:noFill/>
         </p:spPr>
         <p:txBody>
-          <a:bodyPr wrap="square" lIns="0" rIns="0" tIns="0" bIns="0" anchor="t">
+          <a:bodyPr wrap="square" lIns="0" tIns="0" rIns="0" bIns="0" anchor="t">
             <a:spAutoFit/>
           </a:bodyPr>
           <a:lstStyle/>
@@ -7810,7 +7816,7 @@
           <a:noFill/>
         </p:spPr>
         <p:txBody>
-          <a:bodyPr wrap="square" lIns="0" rIns="0" tIns="0" bIns="0" anchor="t">
+          <a:bodyPr wrap="square" lIns="0" tIns="0" rIns="0" bIns="0" anchor="t">
             <a:spAutoFit/>
           </a:bodyPr>
           <a:lstStyle/>
@@ -7845,7 +7851,7 @@
           <a:noFill/>
         </p:spPr>
         <p:txBody>
-          <a:bodyPr wrap="square" lIns="0" rIns="0" tIns="0" bIns="0" anchor="t">
+          <a:bodyPr wrap="square" lIns="0" tIns="0" rIns="0" bIns="0" anchor="t">
             <a:spAutoFit/>
           </a:bodyPr>
           <a:lstStyle/>
@@ -7880,7 +7886,7 @@
           <a:noFill/>
         </p:spPr>
         <p:txBody>
-          <a:bodyPr wrap="square" lIns="0" rIns="0" tIns="0" bIns="0" anchor="t">
+          <a:bodyPr wrap="square" lIns="0" tIns="0" rIns="0" bIns="0" anchor="t">
             <a:spAutoFit/>
           </a:bodyPr>
           <a:lstStyle/>
@@ -7950,7 +7956,7 @@
           <a:noFill/>
         </p:spPr>
         <p:txBody>
-          <a:bodyPr wrap="square" lIns="0" rIns="0" tIns="0" bIns="0" anchor="t">
+          <a:bodyPr wrap="square" lIns="0" tIns="0" rIns="0" bIns="0" anchor="t">
             <a:spAutoFit/>
           </a:bodyPr>
           <a:lstStyle/>
@@ -7985,7 +7991,7 @@
           <a:noFill/>
         </p:spPr>
         <p:txBody>
-          <a:bodyPr wrap="square" lIns="0" rIns="0" tIns="0" bIns="0" anchor="t">
+          <a:bodyPr wrap="square" lIns="0" tIns="0" rIns="0" bIns="0" anchor="t">
             <a:spAutoFit/>
           </a:bodyPr>
           <a:lstStyle/>
@@ -8020,7 +8026,7 @@
           <a:noFill/>
         </p:spPr>
         <p:txBody>
-          <a:bodyPr wrap="square" lIns="0" rIns="0" tIns="0" bIns="0" anchor="t">
+          <a:bodyPr wrap="square" lIns="0" tIns="0" rIns="0" bIns="0" anchor="t">
             <a:spAutoFit/>
           </a:bodyPr>
           <a:lstStyle/>
@@ -8055,7 +8061,7 @@
           <a:noFill/>
         </p:spPr>
         <p:txBody>
-          <a:bodyPr wrap="square" lIns="0" rIns="0" tIns="0" bIns="0" anchor="t">
+          <a:bodyPr wrap="square" lIns="0" tIns="0" rIns="0" bIns="0" anchor="t">
             <a:spAutoFit/>
           </a:bodyPr>
           <a:lstStyle/>
@@ -8090,7 +8096,7 @@
           <a:noFill/>
         </p:spPr>
         <p:txBody>
-          <a:bodyPr wrap="square" lIns="0" rIns="0" tIns="0" bIns="0" anchor="t">
+          <a:bodyPr wrap="square" lIns="0" tIns="0" rIns="0" bIns="0" anchor="t">
             <a:spAutoFit/>
           </a:bodyPr>
           <a:lstStyle/>
@@ -8125,7 +8131,7 @@
           <a:noFill/>
         </p:spPr>
         <p:txBody>
-          <a:bodyPr wrap="square" lIns="0" rIns="0" tIns="0" bIns="0" anchor="t">
+          <a:bodyPr wrap="square" lIns="0" tIns="0" rIns="0" bIns="0" anchor="t">
             <a:spAutoFit/>
           </a:bodyPr>
           <a:lstStyle/>
@@ -8152,7 +8158,7 @@
 </file>
 
 <file path=ppt/slides/slide2.xml><?xml version="1.0" encoding="utf-8"?>
-<p:sld xmlns:a="http://schemas.openxmlformats.org/drawingml/2006/main" xmlns:p="http://schemas.openxmlformats.org/presentationml/2006/main" xmlns:r="http://schemas.openxmlformats.org/officeDocument/2006/relationships">
+<p:sld xmlns:a="http://schemas.openxmlformats.org/drawingml/2006/main" xmlns:r="http://schemas.openxmlformats.org/officeDocument/2006/relationships" xmlns:p="http://schemas.openxmlformats.org/presentationml/2006/main">
   <p:cSld>
     <p:spTree>
       <p:nvGrpSpPr>
@@ -8160,7 +8166,14 @@
         <p:cNvGrpSpPr/>
         <p:nvPr/>
       </p:nvGrpSpPr>
-      <p:grpSpPr/>
+      <p:grpSpPr>
+        <a:xfrm>
+          <a:off x="0" y="0"/>
+          <a:ext cx="0" cy="0"/>
+          <a:chOff x="0" y="0"/>
+          <a:chExt cx="0" cy="0"/>
+        </a:xfrm>
+      </p:grpSpPr>
       <p:sp>
         <p:nvSpPr>
           <p:cNvPr id="2" name="TextBox 1"/>
@@ -8178,7 +8191,7 @@
           <a:noFill/>
         </p:spPr>
         <p:txBody>
-          <a:bodyPr wrap="square" lIns="0" rIns="0" tIns="0" bIns="0" anchor="t">
+          <a:bodyPr wrap="square" lIns="0" tIns="0" rIns="0" bIns="0" anchor="t">
             <a:spAutoFit/>
           </a:bodyPr>
           <a:lstStyle/>
@@ -8213,7 +8226,7 @@
           <a:noFill/>
         </p:spPr>
         <p:txBody>
-          <a:bodyPr wrap="square" lIns="0" rIns="0" tIns="0" bIns="0" anchor="t">
+          <a:bodyPr wrap="square" lIns="0" tIns="0" rIns="0" bIns="0" anchor="t">
             <a:spAutoFit/>
           </a:bodyPr>
           <a:lstStyle/>
@@ -8283,7 +8296,7 @@
           <a:noFill/>
         </p:spPr>
         <p:txBody>
-          <a:bodyPr wrap="square" lIns="0" rIns="0" tIns="0" bIns="0" anchor="t">
+          <a:bodyPr wrap="square" lIns="0" tIns="0" rIns="0" bIns="0" anchor="t">
             <a:spAutoFit/>
           </a:bodyPr>
           <a:lstStyle/>
@@ -8318,7 +8331,7 @@
           <a:noFill/>
         </p:spPr>
         <p:txBody>
-          <a:bodyPr wrap="square" lIns="0" rIns="0" tIns="0" bIns="0" anchor="t">
+          <a:bodyPr wrap="square" lIns="0" tIns="0" rIns="0" bIns="0" anchor="t">
             <a:spAutoFit/>
           </a:bodyPr>
           <a:lstStyle/>
@@ -8349,7 +8362,7 @@
           <p:nvPr/>
         </p:nvPicPr>
         <p:blipFill>
-          <a:blip r:embed="rId2"/>
+          <a:blip r:embed="rId3"/>
           <a:stretch>
             <a:fillRect/>
           </a:stretch>
@@ -8416,7 +8429,7 @@
           <a:noFill/>
         </p:spPr>
         <p:txBody>
-          <a:bodyPr wrap="square" lIns="0" rIns="0" tIns="0" bIns="0" anchor="t">
+          <a:bodyPr wrap="square" lIns="0" tIns="0" rIns="0" bIns="0" anchor="t">
             <a:spAutoFit/>
           </a:bodyPr>
           <a:lstStyle/>
@@ -8451,7 +8464,7 @@
           <a:noFill/>
         </p:spPr>
         <p:txBody>
-          <a:bodyPr wrap="square" lIns="0" rIns="0" tIns="0" bIns="0" anchor="t">
+          <a:bodyPr wrap="square" lIns="0" tIns="0" rIns="0" bIns="0" anchor="t">
             <a:spAutoFit/>
           </a:bodyPr>
           <a:lstStyle/>
@@ -8486,7 +8499,7 @@
           <a:noFill/>
         </p:spPr>
         <p:txBody>
-          <a:bodyPr wrap="square" lIns="0" rIns="0" tIns="0" bIns="0" anchor="t">
+          <a:bodyPr wrap="square" lIns="0" tIns="0" rIns="0" bIns="0" anchor="t">
             <a:spAutoFit/>
           </a:bodyPr>
           <a:lstStyle/>
@@ -8556,7 +8569,7 @@
           <a:noFill/>
         </p:spPr>
         <p:txBody>
-          <a:bodyPr wrap="square" lIns="0" rIns="0" tIns="0" bIns="0" anchor="t">
+          <a:bodyPr wrap="square" lIns="0" tIns="0" rIns="0" bIns="0" anchor="t">
             <a:spAutoFit/>
           </a:bodyPr>
           <a:lstStyle/>
@@ -8591,7 +8604,7 @@
           <a:noFill/>
         </p:spPr>
         <p:txBody>
-          <a:bodyPr wrap="square" lIns="0" rIns="0" tIns="0" bIns="0" anchor="t">
+          <a:bodyPr wrap="square" lIns="0" tIns="0" rIns="0" bIns="0" anchor="t">
             <a:spAutoFit/>
           </a:bodyPr>
           <a:lstStyle/>
@@ -8626,7 +8639,7 @@
           <a:noFill/>
         </p:spPr>
         <p:txBody>
-          <a:bodyPr wrap="square" lIns="0" rIns="0" tIns="0" bIns="0" anchor="t">
+          <a:bodyPr wrap="square" lIns="0" tIns="0" rIns="0" bIns="0" anchor="t">
             <a:spAutoFit/>
           </a:bodyPr>
           <a:lstStyle/>
@@ -8696,7 +8709,7 @@
           <a:noFill/>
         </p:spPr>
         <p:txBody>
-          <a:bodyPr wrap="square" lIns="0" rIns="0" tIns="0" bIns="0" anchor="t">
+          <a:bodyPr wrap="square" lIns="0" tIns="0" rIns="0" bIns="0" anchor="t">
             <a:spAutoFit/>
           </a:bodyPr>
           <a:lstStyle/>
@@ -8731,7 +8744,7 @@
           <a:noFill/>
         </p:spPr>
         <p:txBody>
-          <a:bodyPr wrap="square" lIns="0" rIns="0" tIns="0" bIns="0" anchor="t">
+          <a:bodyPr wrap="square" lIns="0" tIns="0" rIns="0" bIns="0" anchor="t">
             <a:spAutoFit/>
           </a:bodyPr>
           <a:lstStyle/>
@@ -8766,7 +8779,7 @@
           <a:noFill/>
         </p:spPr>
         <p:txBody>
-          <a:bodyPr wrap="square" lIns="0" rIns="0" tIns="0" bIns="0" anchor="t">
+          <a:bodyPr wrap="square" lIns="0" tIns="0" rIns="0" bIns="0" anchor="t">
             <a:spAutoFit/>
           </a:bodyPr>
           <a:lstStyle/>
@@ -8801,7 +8814,7 @@
           <a:noFill/>
         </p:spPr>
         <p:txBody>
-          <a:bodyPr wrap="square" lIns="0" rIns="0" tIns="0" bIns="0" anchor="t">
+          <a:bodyPr wrap="square" lIns="0" tIns="0" rIns="0" bIns="0" anchor="t">
             <a:spAutoFit/>
           </a:bodyPr>
           <a:lstStyle/>
@@ -8836,7 +8849,7 @@
           <a:noFill/>
         </p:spPr>
         <p:txBody>
-          <a:bodyPr wrap="square" lIns="0" rIns="0" tIns="0" bIns="0" anchor="t">
+          <a:bodyPr wrap="square" lIns="0" tIns="0" rIns="0" bIns="0" anchor="t">
             <a:spAutoFit/>
           </a:bodyPr>
           <a:lstStyle/>
@@ -8863,7 +8876,7 @@
 </file>
 
 <file path=ppt/slides/slide3.xml><?xml version="1.0" encoding="utf-8"?>
-<p:sld xmlns:a="http://schemas.openxmlformats.org/drawingml/2006/main" xmlns:p="http://schemas.openxmlformats.org/presentationml/2006/main" xmlns:r="http://schemas.openxmlformats.org/officeDocument/2006/relationships">
+<p:sld xmlns:a="http://schemas.openxmlformats.org/drawingml/2006/main" xmlns:r="http://schemas.openxmlformats.org/officeDocument/2006/relationships" xmlns:p="http://schemas.openxmlformats.org/presentationml/2006/main">
   <p:cSld>
     <p:spTree>
       <p:nvGrpSpPr>
@@ -8871,7 +8884,14 @@
         <p:cNvGrpSpPr/>
         <p:nvPr/>
       </p:nvGrpSpPr>
-      <p:grpSpPr/>
+      <p:grpSpPr>
+        <a:xfrm>
+          <a:off x="0" y="0"/>
+          <a:ext cx="0" cy="0"/>
+          <a:chOff x="0" y="0"/>
+          <a:chExt cx="0" cy="0"/>
+        </a:xfrm>
+      </p:grpSpPr>
       <p:sp>
         <p:nvSpPr>
           <p:cNvPr id="2" name="TextBox 1"/>
@@ -8889,7 +8909,7 @@
           <a:noFill/>
         </p:spPr>
         <p:txBody>
-          <a:bodyPr wrap="square" lIns="0" rIns="0" tIns="0" bIns="0" anchor="t">
+          <a:bodyPr wrap="square" lIns="0" tIns="0" rIns="0" bIns="0" anchor="t">
             <a:spAutoFit/>
           </a:bodyPr>
           <a:lstStyle/>
@@ -8924,7 +8944,7 @@
           <a:noFill/>
         </p:spPr>
         <p:txBody>
-          <a:bodyPr wrap="square" lIns="0" rIns="0" tIns="0" bIns="0" anchor="t">
+          <a:bodyPr wrap="square" lIns="0" tIns="0" rIns="0" bIns="0" anchor="t">
             <a:spAutoFit/>
           </a:bodyPr>
           <a:lstStyle/>
@@ -8994,7 +9014,7 @@
           <a:noFill/>
         </p:spPr>
         <p:txBody>
-          <a:bodyPr wrap="square" lIns="0" rIns="0" tIns="0" bIns="0" anchor="t">
+          <a:bodyPr wrap="square" lIns="0" tIns="0" rIns="0" bIns="0" anchor="t">
             <a:spAutoFit/>
           </a:bodyPr>
           <a:lstStyle/>
@@ -9029,7 +9049,7 @@
           <a:noFill/>
         </p:spPr>
         <p:txBody>
-          <a:bodyPr wrap="square" lIns="0" rIns="0" tIns="0" bIns="0" anchor="t">
+          <a:bodyPr wrap="square" lIns="0" tIns="0" rIns="0" bIns="0" anchor="t">
             <a:spAutoFit/>
           </a:bodyPr>
           <a:lstStyle/>
@@ -9103,7 +9123,7 @@
           <a:noFill/>
         </p:spPr>
         <p:txBody>
-          <a:bodyPr wrap="square" lIns="0" rIns="0" tIns="0" bIns="0" anchor="t">
+          <a:bodyPr wrap="square" lIns="0" tIns="0" rIns="0" bIns="0" anchor="t">
             <a:spAutoFit/>
           </a:bodyPr>
           <a:lstStyle/>
@@ -9138,7 +9158,7 @@
           <a:noFill/>
         </p:spPr>
         <p:txBody>
-          <a:bodyPr wrap="square" lIns="0" rIns="0" tIns="0" bIns="0" anchor="t">
+          <a:bodyPr wrap="square" lIns="0" tIns="0" rIns="0" bIns="0" anchor="t">
             <a:spAutoFit/>
           </a:bodyPr>
           <a:lstStyle/>
@@ -9173,7 +9193,7 @@
           <a:noFill/>
         </p:spPr>
         <p:txBody>
-          <a:bodyPr wrap="square" lIns="0" rIns="0" tIns="0" bIns="0" anchor="t">
+          <a:bodyPr wrap="square" lIns="0" tIns="0" rIns="0" bIns="0" anchor="t">
             <a:spAutoFit/>
           </a:bodyPr>
           <a:lstStyle/>
@@ -9243,7 +9263,7 @@
           <a:noFill/>
         </p:spPr>
         <p:txBody>
-          <a:bodyPr wrap="square" lIns="0" rIns="0" tIns="0" bIns="0" anchor="t">
+          <a:bodyPr wrap="square" lIns="0" tIns="0" rIns="0" bIns="0" anchor="t">
             <a:spAutoFit/>
           </a:bodyPr>
           <a:lstStyle/>
@@ -9278,7 +9298,7 @@
           <a:noFill/>
         </p:spPr>
         <p:txBody>
-          <a:bodyPr wrap="square" lIns="0" rIns="0" tIns="0" bIns="0" anchor="t">
+          <a:bodyPr wrap="square" lIns="0" tIns="0" rIns="0" bIns="0" anchor="t">
             <a:spAutoFit/>
           </a:bodyPr>
           <a:lstStyle/>
@@ -9313,7 +9333,7 @@
           <a:noFill/>
         </p:spPr>
         <p:txBody>
-          <a:bodyPr wrap="square" lIns="0" rIns="0" tIns="0" bIns="0" anchor="t">
+          <a:bodyPr wrap="square" lIns="0" tIns="0" rIns="0" bIns="0" anchor="t">
             <a:spAutoFit/>
           </a:bodyPr>
           <a:lstStyle/>
@@ -9383,7 +9403,7 @@
           <a:noFill/>
         </p:spPr>
         <p:txBody>
-          <a:bodyPr wrap="square" lIns="0" rIns="0" tIns="0" bIns="0" anchor="t">
+          <a:bodyPr wrap="square" lIns="0" tIns="0" rIns="0" bIns="0" anchor="t">
             <a:spAutoFit/>
           </a:bodyPr>
           <a:lstStyle/>
@@ -9418,7 +9438,7 @@
           <a:noFill/>
         </p:spPr>
         <p:txBody>
-          <a:bodyPr wrap="square" lIns="0" rIns="0" tIns="0" bIns="0" anchor="t">
+          <a:bodyPr wrap="square" lIns="0" tIns="0" rIns="0" bIns="0" anchor="t">
             <a:spAutoFit/>
           </a:bodyPr>
           <a:lstStyle/>
@@ -9453,7 +9473,7 @@
           <a:noFill/>
         </p:spPr>
         <p:txBody>
-          <a:bodyPr wrap="square" lIns="0" rIns="0" tIns="0" bIns="0" anchor="t">
+          <a:bodyPr wrap="square" lIns="0" tIns="0" rIns="0" bIns="0" anchor="t">
             <a:spAutoFit/>
           </a:bodyPr>
           <a:lstStyle/>
@@ -9523,7 +9543,7 @@
           <a:noFill/>
         </p:spPr>
         <p:txBody>
-          <a:bodyPr wrap="square" lIns="0" rIns="0" tIns="0" bIns="0" anchor="t">
+          <a:bodyPr wrap="square" lIns="0" tIns="0" rIns="0" bIns="0" anchor="t">
             <a:spAutoFit/>
           </a:bodyPr>
           <a:lstStyle/>
@@ -9558,7 +9578,7 @@
           <a:noFill/>
         </p:spPr>
         <p:txBody>
-          <a:bodyPr wrap="square" lIns="0" rIns="0" tIns="0" bIns="0" anchor="t">
+          <a:bodyPr wrap="square" lIns="0" tIns="0" rIns="0" bIns="0" anchor="t">
             <a:spAutoFit/>
           </a:bodyPr>
           <a:lstStyle/>
@@ -9593,7 +9613,7 @@
           <a:noFill/>
         </p:spPr>
         <p:txBody>
-          <a:bodyPr wrap="square" lIns="0" rIns="0" tIns="0" bIns="0" anchor="t">
+          <a:bodyPr wrap="square" lIns="0" tIns="0" rIns="0" bIns="0" anchor="t">
             <a:spAutoFit/>
           </a:bodyPr>
           <a:lstStyle/>
@@ -9628,7 +9648,7 @@
           <a:noFill/>
         </p:spPr>
         <p:txBody>
-          <a:bodyPr wrap="square" lIns="0" rIns="0" tIns="0" bIns="0" anchor="t">
+          <a:bodyPr wrap="square" lIns="0" tIns="0" rIns="0" bIns="0" anchor="t">
             <a:spAutoFit/>
           </a:bodyPr>
           <a:lstStyle/>
@@ -9663,7 +9683,7 @@
           <a:noFill/>
         </p:spPr>
         <p:txBody>
-          <a:bodyPr wrap="square" lIns="0" rIns="0" tIns="0" bIns="0" anchor="t">
+          <a:bodyPr wrap="square" lIns="0" tIns="0" rIns="0" bIns="0" anchor="t">
             <a:spAutoFit/>
           </a:bodyPr>
           <a:lstStyle/>
@@ -9690,7 +9710,7 @@
           <p:nvPr/>
         </p:nvPicPr>
         <p:blipFill>
-          <a:blip r:embed="rId4"/>
+          <a:blip r:embed="rId3"/>
           <a:stretch>
             <a:fillRect/>
           </a:stretch>
@@ -9714,7 +9734,7 @@
 </file>
 
 <file path=ppt/slides/slide4.xml><?xml version="1.0" encoding="utf-8"?>
-<p:sld xmlns:a="http://schemas.openxmlformats.org/drawingml/2006/main" xmlns:p="http://schemas.openxmlformats.org/presentationml/2006/main" xmlns:r="http://schemas.openxmlformats.org/officeDocument/2006/relationships">
+<p:sld xmlns:a="http://schemas.openxmlformats.org/drawingml/2006/main" xmlns:r="http://schemas.openxmlformats.org/officeDocument/2006/relationships" xmlns:p="http://schemas.openxmlformats.org/presentationml/2006/main">
   <p:cSld>
     <p:spTree>
       <p:nvGrpSpPr>
@@ -9722,7 +9742,14 @@
         <p:cNvGrpSpPr/>
         <p:nvPr/>
       </p:nvGrpSpPr>
-      <p:grpSpPr/>
+      <p:grpSpPr>
+        <a:xfrm>
+          <a:off x="0" y="0"/>
+          <a:ext cx="0" cy="0"/>
+          <a:chOff x="0" y="0"/>
+          <a:chExt cx="0" cy="0"/>
+        </a:xfrm>
+      </p:grpSpPr>
       <p:sp>
         <p:nvSpPr>
           <p:cNvPr id="2" name="TextBox 1"/>
@@ -9740,7 +9767,7 @@
           <a:noFill/>
         </p:spPr>
         <p:txBody>
-          <a:bodyPr wrap="square" lIns="0" rIns="0" tIns="0" bIns="0" anchor="t">
+          <a:bodyPr wrap="square" lIns="0" tIns="0" rIns="0" bIns="0" anchor="t">
             <a:spAutoFit/>
           </a:bodyPr>
           <a:lstStyle/>
@@ -9775,7 +9802,7 @@
           <a:noFill/>
         </p:spPr>
         <p:txBody>
-          <a:bodyPr wrap="square" lIns="0" rIns="0" tIns="0" bIns="0" anchor="t">
+          <a:bodyPr wrap="square" lIns="0" tIns="0" rIns="0" bIns="0" anchor="t">
             <a:spAutoFit/>
           </a:bodyPr>
           <a:lstStyle/>
@@ -9845,7 +9872,7 @@
           <a:noFill/>
         </p:spPr>
         <p:txBody>
-          <a:bodyPr wrap="square" lIns="0" rIns="0" tIns="0" bIns="0" anchor="t">
+          <a:bodyPr wrap="square" lIns="0" tIns="0" rIns="0" bIns="0" anchor="t">
             <a:spAutoFit/>
           </a:bodyPr>
           <a:lstStyle/>
@@ -9880,7 +9907,7 @@
           <a:noFill/>
         </p:spPr>
         <p:txBody>
-          <a:bodyPr wrap="square" lIns="0" rIns="0" tIns="0" bIns="0" anchor="t">
+          <a:bodyPr wrap="square" lIns="0" tIns="0" rIns="0" bIns="0" anchor="t">
             <a:spAutoFit/>
           </a:bodyPr>
           <a:lstStyle/>
@@ -9911,7 +9938,7 @@
           <p:nvPr/>
         </p:nvPicPr>
         <p:blipFill>
-          <a:blip r:embed="rId2"/>
+          <a:blip r:embed="rId3"/>
           <a:stretch>
             <a:fillRect/>
           </a:stretch>
@@ -9978,7 +10005,7 @@
           <a:noFill/>
         </p:spPr>
         <p:txBody>
-          <a:bodyPr wrap="square" lIns="0" rIns="0" tIns="0" bIns="0" anchor="t">
+          <a:bodyPr wrap="square" lIns="0" tIns="0" rIns="0" bIns="0" anchor="t">
             <a:spAutoFit/>
           </a:bodyPr>
           <a:lstStyle/>
@@ -10013,7 +10040,7 @@
           <a:noFill/>
         </p:spPr>
         <p:txBody>
-          <a:bodyPr wrap="square" lIns="0" rIns="0" tIns="0" bIns="0" anchor="t">
+          <a:bodyPr wrap="square" lIns="0" tIns="0" rIns="0" bIns="0" anchor="t">
             <a:spAutoFit/>
           </a:bodyPr>
           <a:lstStyle/>
@@ -10048,7 +10075,7 @@
           <a:noFill/>
         </p:spPr>
         <p:txBody>
-          <a:bodyPr wrap="square" lIns="0" rIns="0" tIns="0" bIns="0" anchor="t">
+          <a:bodyPr wrap="square" lIns="0" tIns="0" rIns="0" bIns="0" anchor="t">
             <a:spAutoFit/>
           </a:bodyPr>
           <a:lstStyle/>
@@ -10118,7 +10145,7 @@
           <a:noFill/>
         </p:spPr>
         <p:txBody>
-          <a:bodyPr wrap="square" lIns="0" rIns="0" tIns="0" bIns="0" anchor="t">
+          <a:bodyPr wrap="square" lIns="0" tIns="0" rIns="0" bIns="0" anchor="t">
             <a:spAutoFit/>
           </a:bodyPr>
           <a:lstStyle/>
@@ -10153,7 +10180,7 @@
           <a:noFill/>
         </p:spPr>
         <p:txBody>
-          <a:bodyPr wrap="square" lIns="0" rIns="0" tIns="0" bIns="0" anchor="t">
+          <a:bodyPr wrap="square" lIns="0" tIns="0" rIns="0" bIns="0" anchor="t">
             <a:spAutoFit/>
           </a:bodyPr>
           <a:lstStyle/>
@@ -10188,7 +10215,7 @@
           <a:noFill/>
         </p:spPr>
         <p:txBody>
-          <a:bodyPr wrap="square" lIns="0" rIns="0" tIns="0" bIns="0" anchor="t">
+          <a:bodyPr wrap="square" lIns="0" tIns="0" rIns="0" bIns="0" anchor="t">
             <a:spAutoFit/>
           </a:bodyPr>
           <a:lstStyle/>
@@ -10258,7 +10285,7 @@
           <a:noFill/>
         </p:spPr>
         <p:txBody>
-          <a:bodyPr wrap="square" lIns="0" rIns="0" tIns="0" bIns="0" anchor="t">
+          <a:bodyPr wrap="square" lIns="0" tIns="0" rIns="0" bIns="0" anchor="t">
             <a:spAutoFit/>
           </a:bodyPr>
           <a:lstStyle/>
@@ -10293,7 +10320,7 @@
           <a:noFill/>
         </p:spPr>
         <p:txBody>
-          <a:bodyPr wrap="square" lIns="0" rIns="0" tIns="0" bIns="0" anchor="t">
+          <a:bodyPr wrap="square" lIns="0" tIns="0" rIns="0" bIns="0" anchor="t">
             <a:spAutoFit/>
           </a:bodyPr>
           <a:lstStyle/>
@@ -10328,7 +10355,7 @@
           <a:noFill/>
         </p:spPr>
         <p:txBody>
-          <a:bodyPr wrap="square" lIns="0" rIns="0" tIns="0" bIns="0" anchor="t">
+          <a:bodyPr wrap="square" lIns="0" tIns="0" rIns="0" bIns="0" anchor="t">
             <a:spAutoFit/>
           </a:bodyPr>
           <a:lstStyle/>
@@ -10398,7 +10425,7 @@
           <a:noFill/>
         </p:spPr>
         <p:txBody>
-          <a:bodyPr wrap="square" lIns="0" rIns="0" tIns="0" bIns="0" anchor="t">
+          <a:bodyPr wrap="square" lIns="0" tIns="0" rIns="0" bIns="0" anchor="t">
             <a:spAutoFit/>
           </a:bodyPr>
           <a:lstStyle/>
@@ -10433,7 +10460,7 @@
           <a:noFill/>
         </p:spPr>
         <p:txBody>
-          <a:bodyPr wrap="square" lIns="0" rIns="0" tIns="0" bIns="0" anchor="t">
+          <a:bodyPr wrap="square" lIns="0" tIns="0" rIns="0" bIns="0" anchor="t">
             <a:spAutoFit/>
           </a:bodyPr>
           <a:lstStyle/>
@@ -10468,7 +10495,7 @@
           <a:noFill/>
         </p:spPr>
         <p:txBody>
-          <a:bodyPr wrap="square" lIns="0" rIns="0" tIns="0" bIns="0" anchor="t">
+          <a:bodyPr wrap="square" lIns="0" tIns="0" rIns="0" bIns="0" anchor="t">
             <a:spAutoFit/>
           </a:bodyPr>
           <a:lstStyle/>
@@ -10503,7 +10530,7 @@
           <a:noFill/>
         </p:spPr>
         <p:txBody>
-          <a:bodyPr wrap="square" lIns="0" rIns="0" tIns="0" bIns="0" anchor="t">
+          <a:bodyPr wrap="square" lIns="0" tIns="0" rIns="0" bIns="0" anchor="t">
             <a:spAutoFit/>
           </a:bodyPr>
           <a:lstStyle/>
@@ -10538,7 +10565,7 @@
           <a:noFill/>
         </p:spPr>
         <p:txBody>
-          <a:bodyPr wrap="square" lIns="0" rIns="0" tIns="0" bIns="0" anchor="t">
+          <a:bodyPr wrap="square" lIns="0" tIns="0" rIns="0" bIns="0" anchor="t">
             <a:spAutoFit/>
           </a:bodyPr>
           <a:lstStyle/>
@@ -10565,7 +10592,7 @@
 </file>
 
 <file path=ppt/slides/slide5.xml><?xml version="1.0" encoding="utf-8"?>
-<p:sld xmlns:a="http://schemas.openxmlformats.org/drawingml/2006/main" xmlns:p="http://schemas.openxmlformats.org/presentationml/2006/main" xmlns:r="http://schemas.openxmlformats.org/officeDocument/2006/relationships">
+<p:sld xmlns:a="http://schemas.openxmlformats.org/drawingml/2006/main" xmlns:r="http://schemas.openxmlformats.org/officeDocument/2006/relationships" xmlns:p="http://schemas.openxmlformats.org/presentationml/2006/main">
   <p:cSld>
     <p:spTree>
       <p:nvGrpSpPr>
@@ -10573,7 +10600,14 @@
         <p:cNvGrpSpPr/>
         <p:nvPr/>
       </p:nvGrpSpPr>
-      <p:grpSpPr/>
+      <p:grpSpPr>
+        <a:xfrm>
+          <a:off x="0" y="0"/>
+          <a:ext cx="0" cy="0"/>
+          <a:chOff x="0" y="0"/>
+          <a:chExt cx="0" cy="0"/>
+        </a:xfrm>
+      </p:grpSpPr>
       <p:sp>
         <p:nvSpPr>
           <p:cNvPr id="2" name="TextBox 1"/>
@@ -10591,7 +10625,7 @@
           <a:noFill/>
         </p:spPr>
         <p:txBody>
-          <a:bodyPr wrap="square" lIns="0" rIns="0" tIns="0" bIns="0" anchor="t">
+          <a:bodyPr wrap="square" lIns="0" tIns="0" rIns="0" bIns="0" anchor="t">
             <a:spAutoFit/>
           </a:bodyPr>
           <a:lstStyle/>
@@ -10626,7 +10660,7 @@
           <a:noFill/>
         </p:spPr>
         <p:txBody>
-          <a:bodyPr wrap="square" lIns="0" rIns="0" tIns="0" bIns="0" anchor="t">
+          <a:bodyPr wrap="square" lIns="0" tIns="0" rIns="0" bIns="0" anchor="t">
             <a:spAutoFit/>
           </a:bodyPr>
           <a:lstStyle/>
@@ -10696,7 +10730,7 @@
           <a:noFill/>
         </p:spPr>
         <p:txBody>
-          <a:bodyPr wrap="square" lIns="0" rIns="0" tIns="0" bIns="0" anchor="t">
+          <a:bodyPr wrap="square" lIns="0" tIns="0" rIns="0" bIns="0" anchor="t">
             <a:spAutoFit/>
           </a:bodyPr>
           <a:lstStyle/>
@@ -10709,7 +10743,7 @@
                 </a:solidFill>
                 <a:latin typeface="Futura"/>
               </a:rPr>
-              <a:t>Steering rotates the code — but needs a subspace</a:t>
+              <a:t>Steering direction needs a coordinated subspace</a:t>
             </a:r>
           </a:p>
         </p:txBody>
@@ -10731,7 +10765,7 @@
           <a:noFill/>
         </p:spPr>
         <p:txBody>
-          <a:bodyPr wrap="square" lIns="0" rIns="0" tIns="0" bIns="0" anchor="t">
+          <a:bodyPr wrap="square" lIns="0" tIns="0" rIns="0" bIns="0" anchor="t">
             <a:spAutoFit/>
           </a:bodyPr>
           <a:lstStyle/>
@@ -10805,7 +10839,7 @@
           <a:noFill/>
         </p:spPr>
         <p:txBody>
-          <a:bodyPr wrap="square" lIns="0" rIns="0" tIns="0" bIns="0" anchor="t">
+          <a:bodyPr wrap="square" lIns="0" tIns="0" rIns="0" bIns="0" anchor="t">
             <a:spAutoFit/>
           </a:bodyPr>
           <a:lstStyle/>
@@ -10818,7 +10852,7 @@
                 </a:solidFill>
                 <a:latin typeface="Menlo"/>
               </a:rPr>
-              <a:t>ERROR TO TARGET</a:t>
+              <a:t>DIRECTION, K = 1</a:t>
             </a:r>
           </a:p>
         </p:txBody>
@@ -10840,7 +10874,7 @@
           <a:noFill/>
         </p:spPr>
         <p:txBody>
-          <a:bodyPr wrap="square" lIns="0" rIns="0" tIns="0" bIns="0" anchor="t">
+          <a:bodyPr wrap="square" lIns="0" tIns="0" rIns="0" bIns="0" anchor="t">
             <a:spAutoFit/>
           </a:bodyPr>
           <a:lstStyle/>
@@ -10849,11 +10883,11 @@
             <a:r>
               <a:rPr sz="1500" b="1">
                 <a:solidFill>
-                  <a:srgbClr val="1E7A4E"/>
+                  <a:srgbClr val="B03A2E"/>
                 </a:solidFill>
                 <a:latin typeface="Menlo"/>
               </a:rPr>
-              <a:t>84° → 4.8°</a:t>
+              <a:t>28%</a:t>
             </a:r>
           </a:p>
         </p:txBody>
@@ -10875,7 +10909,7 @@
           <a:noFill/>
         </p:spPr>
         <p:txBody>
-          <a:bodyPr wrap="square" lIns="0" rIns="0" tIns="0" bIns="0" anchor="t">
+          <a:bodyPr wrap="square" lIns="0" tIns="0" rIns="0" bIns="0" anchor="t">
             <a:spAutoFit/>
           </a:bodyPr>
           <a:lstStyle/>
@@ -10888,7 +10922,7 @@
                 </a:solidFill>
                 <a:latin typeface="Avenir Next"/>
               </a:rPr>
-              <a:t>K = 32, held-out probe</a:t>
+              <a:t>of the gap closed — barely works</a:t>
             </a:r>
           </a:p>
         </p:txBody>
@@ -10945,7 +10979,7 @@
           <a:noFill/>
         </p:spPr>
         <p:txBody>
-          <a:bodyPr wrap="square" lIns="0" rIns="0" tIns="0" bIns="0" anchor="t">
+          <a:bodyPr wrap="square" lIns="0" tIns="0" rIns="0" bIns="0" anchor="t">
             <a:spAutoFit/>
           </a:bodyPr>
           <a:lstStyle/>
@@ -10958,7 +10992,7 @@
                 </a:solidFill>
                 <a:latin typeface="Menlo"/>
               </a:rPr>
-              <a:t>ERROR TO OWN LABEL</a:t>
+              <a:t>DIRECTION, K = 4</a:t>
             </a:r>
           </a:p>
         </p:txBody>
@@ -10980,7 +11014,7 @@
           <a:noFill/>
         </p:spPr>
         <p:txBody>
-          <a:bodyPr wrap="square" lIns="0" rIns="0" tIns="0" bIns="0" anchor="t">
+          <a:bodyPr wrap="square" lIns="0" tIns="0" rIns="0" bIns="0" anchor="t">
             <a:spAutoFit/>
           </a:bodyPr>
           <a:lstStyle/>
@@ -10989,11 +11023,11 @@
             <a:r>
               <a:rPr sz="1500" b="1">
                 <a:solidFill>
-                  <a:srgbClr val="0B4F6C"/>
+                  <a:srgbClr val="1E7A4E"/>
                 </a:solidFill>
                 <a:latin typeface="Menlo"/>
               </a:rPr>
-              <a:t>4.6° → 83.2°</a:t>
+              <a:t>97%</a:t>
             </a:r>
           </a:p>
         </p:txBody>
@@ -11015,7 +11049,7 @@
           <a:noFill/>
         </p:spPr>
         <p:txBody>
-          <a:bodyPr wrap="square" lIns="0" rIns="0" tIns="0" bIns="0" anchor="t">
+          <a:bodyPr wrap="square" lIns="0" tIns="0" rIns="0" bIns="0" anchor="t">
             <a:spAutoFit/>
           </a:bodyPr>
           <a:lstStyle/>
@@ -11028,7 +11062,7 @@
                 </a:solidFill>
                 <a:latin typeface="Avenir Next"/>
               </a:rPr>
-              <a:t>rotated, not degraded</a:t>
+              <a:t>a coordinated subspace works</a:t>
             </a:r>
           </a:p>
         </p:txBody>
@@ -11085,7 +11119,7 @@
           <a:noFill/>
         </p:spPr>
         <p:txBody>
-          <a:bodyPr wrap="square" lIns="0" rIns="0" tIns="0" bIns="0" anchor="t">
+          <a:bodyPr wrap="square" lIns="0" tIns="0" rIns="0" bIns="0" anchor="t">
             <a:spAutoFit/>
           </a:bodyPr>
           <a:lstStyle/>
@@ -11098,7 +11132,7 @@
                 </a:solidFill>
                 <a:latin typeface="Menlo"/>
               </a:rPr>
-              <a:t>DIRECTION, K = 1</a:t>
+              <a:t>EITHER SCALAR, K = 1</a:t>
             </a:r>
           </a:p>
         </p:txBody>
@@ -11120,7 +11154,7 @@
           <a:noFill/>
         </p:spPr>
         <p:txBody>
-          <a:bodyPr wrap="square" lIns="0" rIns="0" tIns="0" bIns="0" anchor="t">
+          <a:bodyPr wrap="square" lIns="0" tIns="0" rIns="0" bIns="0" anchor="t">
             <a:spAutoFit/>
           </a:bodyPr>
           <a:lstStyle/>
@@ -11129,11 +11163,11 @@
             <a:r>
               <a:rPr sz="1500" b="1">
                 <a:solidFill>
-                  <a:srgbClr val="B03A2E"/>
+                  <a:srgbClr val="0B4F6C"/>
                 </a:solidFill>
                 <a:latin typeface="Menlo"/>
               </a:rPr>
-              <a:t>28%</a:t>
+              <a:t>74%</a:t>
             </a:r>
           </a:p>
         </p:txBody>
@@ -11155,7 +11189,7 @@
           <a:noFill/>
         </p:spPr>
         <p:txBody>
-          <a:bodyPr wrap="square" lIns="0" rIns="0" tIns="0" bIns="0" anchor="t">
+          <a:bodyPr wrap="square" lIns="0" tIns="0" rIns="0" bIns="0" anchor="t">
             <a:spAutoFit/>
           </a:bodyPr>
           <a:lstStyle/>
@@ -11168,7 +11202,7 @@
                 </a:solidFill>
                 <a:latin typeface="Avenir Next"/>
               </a:rPr>
-              <a:t>one probe barely works</a:t>
+              <a:t>one probe is enough</a:t>
             </a:r>
           </a:p>
         </p:txBody>
@@ -11225,7 +11259,7 @@
           <a:noFill/>
         </p:spPr>
         <p:txBody>
-          <a:bodyPr wrap="square" lIns="0" rIns="0" tIns="0" bIns="0" anchor="t">
+          <a:bodyPr wrap="square" lIns="0" tIns="0" rIns="0" bIns="0" anchor="t">
             <a:spAutoFit/>
           </a:bodyPr>
           <a:lstStyle/>
@@ -11238,7 +11272,7 @@
                 </a:solidFill>
                 <a:latin typeface="Menlo"/>
               </a:rPr>
-              <a:t>EITHER SCALAR, K = 1</a:t>
+              <a:t>LEAKAGE AT DIM 16</a:t>
             </a:r>
           </a:p>
         </p:txBody>
@@ -11260,7 +11294,7 @@
           <a:noFill/>
         </p:spPr>
         <p:txBody>
-          <a:bodyPr wrap="square" lIns="0" rIns="0" tIns="0" bIns="0" anchor="t">
+          <a:bodyPr wrap="square" lIns="0" tIns="0" rIns="0" bIns="0" anchor="t">
             <a:spAutoFit/>
           </a:bodyPr>
           <a:lstStyle/>
@@ -11269,11 +11303,11 @@
             <a:r>
               <a:rPr sz="1500" b="1">
                 <a:solidFill>
-                  <a:srgbClr val="0B4F6C"/>
+                  <a:srgbClr val="B03A2E"/>
                 </a:solidFill>
                 <a:latin typeface="Menlo"/>
               </a:rPr>
-              <a:t>74%</a:t>
+              <a:t>every cell</a:t>
             </a:r>
           </a:p>
         </p:txBody>
@@ -11295,7 +11329,7 @@
           <a:noFill/>
         </p:spPr>
         <p:txBody>
-          <a:bodyPr wrap="square" lIns="0" rIns="0" tIns="0" bIns="0" anchor="t">
+          <a:bodyPr wrap="square" lIns="0" tIns="0" rIns="0" bIns="0" anchor="t">
             <a:spAutoFit/>
           </a:bodyPr>
           <a:lstStyle/>
@@ -11308,7 +11342,7 @@
                 </a:solidFill>
                 <a:latin typeface="Avenir Next"/>
               </a:rPr>
-              <a:t>one probe is enough</a:t>
+              <a:t>specificity is gone</a:t>
             </a:r>
           </a:p>
         </p:txBody>
@@ -11330,7 +11364,7 @@
           <a:noFill/>
         </p:spPr>
         <p:txBody>
-          <a:bodyPr wrap="square" lIns="0" rIns="0" tIns="0" bIns="0" anchor="t">
+          <a:bodyPr wrap="square" lIns="0" tIns="0" rIns="0" bIns="0" anchor="t">
             <a:spAutoFit/>
           </a:bodyPr>
           <a:lstStyle/>
@@ -11365,7 +11399,7 @@
           <a:noFill/>
         </p:spPr>
         <p:txBody>
-          <a:bodyPr wrap="square" lIns="0" rIns="0" tIns="0" bIns="0" anchor="t">
+          <a:bodyPr wrap="square" lIns="0" tIns="0" rIns="0" bIns="0" anchor="t">
             <a:spAutoFit/>
           </a:bodyPr>
           <a:lstStyle/>
@@ -11392,15 +11426,15 @@
           <p:nvPr/>
         </p:nvPicPr>
         <p:blipFill>
-          <a:blip r:embed="rId5"/>
+          <a:blip r:embed="rId3"/>
           <a:stretch>
             <a:fillRect/>
           </a:stretch>
         </p:blipFill>
         <p:spPr>
           <a:xfrm>
-            <a:off x="2953512" y="3063062"/>
-            <a:ext cx="6291072" cy="1838300"/>
+            <a:off x="2878277" y="3042013"/>
+            <a:ext cx="6435139" cy="1880397"/>
           </a:xfrm>
           <a:prstGeom prst="rect">
             <a:avLst/>
@@ -11416,7 +11450,7 @@
 </file>
 
 <file path=ppt/slides/slide6.xml><?xml version="1.0" encoding="utf-8"?>
-<p:sld xmlns:a="http://schemas.openxmlformats.org/drawingml/2006/main" xmlns:p="http://schemas.openxmlformats.org/presentationml/2006/main" xmlns:r="http://schemas.openxmlformats.org/officeDocument/2006/relationships">
+<p:sld xmlns:a="http://schemas.openxmlformats.org/drawingml/2006/main" xmlns:r="http://schemas.openxmlformats.org/officeDocument/2006/relationships" xmlns:p="http://schemas.openxmlformats.org/presentationml/2006/main">
   <p:cSld>
     <p:spTree>
       <p:nvGrpSpPr>
@@ -11424,7 +11458,14 @@
         <p:cNvGrpSpPr/>
         <p:nvPr/>
       </p:nvGrpSpPr>
-      <p:grpSpPr/>
+      <p:grpSpPr>
+        <a:xfrm>
+          <a:off x="0" y="0"/>
+          <a:ext cx="0" cy="0"/>
+          <a:chOff x="0" y="0"/>
+          <a:chExt cx="0" cy="0"/>
+        </a:xfrm>
+      </p:grpSpPr>
       <p:sp>
         <p:nvSpPr>
           <p:cNvPr id="2" name="TextBox 1"/>
@@ -11442,7 +11483,7 @@
           <a:noFill/>
         </p:spPr>
         <p:txBody>
-          <a:bodyPr wrap="square" lIns="0" rIns="0" tIns="0" bIns="0" anchor="t">
+          <a:bodyPr wrap="square" lIns="0" tIns="0" rIns="0" bIns="0" anchor="t">
             <a:spAutoFit/>
           </a:bodyPr>
           <a:lstStyle/>
@@ -11477,7 +11518,7 @@
           <a:noFill/>
         </p:spPr>
         <p:txBody>
-          <a:bodyPr wrap="square" lIns="0" rIns="0" tIns="0" bIns="0" anchor="t">
+          <a:bodyPr wrap="square" lIns="0" tIns="0" rIns="0" bIns="0" anchor="t">
             <a:spAutoFit/>
           </a:bodyPr>
           <a:lstStyle/>
@@ -11547,7 +11588,7 @@
           <a:noFill/>
         </p:spPr>
         <p:txBody>
-          <a:bodyPr wrap="square" lIns="0" rIns="0" tIns="0" bIns="0" anchor="t">
+          <a:bodyPr wrap="square" lIns="0" tIns="0" rIns="0" bIns="0" anchor="t">
             <a:spAutoFit/>
           </a:bodyPr>
           <a:lstStyle/>
@@ -11582,7 +11623,7 @@
           <a:noFill/>
         </p:spPr>
         <p:txBody>
-          <a:bodyPr wrap="square" lIns="0" rIns="0" tIns="0" bIns="0" anchor="t">
+          <a:bodyPr wrap="square" lIns="0" tIns="0" rIns="0" bIns="0" anchor="t">
             <a:spAutoFit/>
           </a:bodyPr>
           <a:lstStyle/>
@@ -11613,7 +11654,7 @@
           <p:nvPr/>
         </p:nvPicPr>
         <p:blipFill>
-          <a:blip r:embed="rId2"/>
+          <a:blip r:embed="rId3"/>
           <a:stretch>
             <a:fillRect/>
           </a:stretch>
@@ -11680,7 +11721,7 @@
           <a:noFill/>
         </p:spPr>
         <p:txBody>
-          <a:bodyPr wrap="square" lIns="0" rIns="0" tIns="0" bIns="0" anchor="t">
+          <a:bodyPr wrap="square" lIns="0" tIns="0" rIns="0" bIns="0" anchor="t">
             <a:spAutoFit/>
           </a:bodyPr>
           <a:lstStyle/>
@@ -11715,7 +11756,7 @@
           <a:noFill/>
         </p:spPr>
         <p:txBody>
-          <a:bodyPr wrap="square" lIns="0" rIns="0" tIns="0" bIns="0" anchor="t">
+          <a:bodyPr wrap="square" lIns="0" tIns="0" rIns="0" bIns="0" anchor="t">
             <a:spAutoFit/>
           </a:bodyPr>
           <a:lstStyle/>
@@ -11750,7 +11791,7 @@
           <a:noFill/>
         </p:spPr>
         <p:txBody>
-          <a:bodyPr wrap="square" lIns="0" rIns="0" tIns="0" bIns="0" anchor="t">
+          <a:bodyPr wrap="square" lIns="0" tIns="0" rIns="0" bIns="0" anchor="t">
             <a:spAutoFit/>
           </a:bodyPr>
           <a:lstStyle/>
@@ -11820,7 +11861,7 @@
           <a:noFill/>
         </p:spPr>
         <p:txBody>
-          <a:bodyPr wrap="square" lIns="0" rIns="0" tIns="0" bIns="0" anchor="t">
+          <a:bodyPr wrap="square" lIns="0" tIns="0" rIns="0" bIns="0" anchor="t">
             <a:spAutoFit/>
           </a:bodyPr>
           <a:lstStyle/>
@@ -11855,7 +11896,7 @@
           <a:noFill/>
         </p:spPr>
         <p:txBody>
-          <a:bodyPr wrap="square" lIns="0" rIns="0" tIns="0" bIns="0" anchor="t">
+          <a:bodyPr wrap="square" lIns="0" tIns="0" rIns="0" bIns="0" anchor="t">
             <a:spAutoFit/>
           </a:bodyPr>
           <a:lstStyle/>
@@ -11890,7 +11931,7 @@
           <a:noFill/>
         </p:spPr>
         <p:txBody>
-          <a:bodyPr wrap="square" lIns="0" rIns="0" tIns="0" bIns="0" anchor="t">
+          <a:bodyPr wrap="square" lIns="0" tIns="0" rIns="0" bIns="0" anchor="t">
             <a:spAutoFit/>
           </a:bodyPr>
           <a:lstStyle/>
@@ -11960,7 +12001,7 @@
           <a:noFill/>
         </p:spPr>
         <p:txBody>
-          <a:bodyPr wrap="square" lIns="0" rIns="0" tIns="0" bIns="0" anchor="t">
+          <a:bodyPr wrap="square" lIns="0" tIns="0" rIns="0" bIns="0" anchor="t">
             <a:spAutoFit/>
           </a:bodyPr>
           <a:lstStyle/>
@@ -11995,7 +12036,7 @@
           <a:noFill/>
         </p:spPr>
         <p:txBody>
-          <a:bodyPr wrap="square" lIns="0" rIns="0" tIns="0" bIns="0" anchor="t">
+          <a:bodyPr wrap="square" lIns="0" tIns="0" rIns="0" bIns="0" anchor="t">
             <a:spAutoFit/>
           </a:bodyPr>
           <a:lstStyle/>
@@ -12030,7 +12071,7 @@
           <a:noFill/>
         </p:spPr>
         <p:txBody>
-          <a:bodyPr wrap="square" lIns="0" rIns="0" tIns="0" bIns="0" anchor="t">
+          <a:bodyPr wrap="square" lIns="0" tIns="0" rIns="0" bIns="0" anchor="t">
             <a:spAutoFit/>
           </a:bodyPr>
           <a:lstStyle/>
@@ -12100,7 +12141,7 @@
           <a:noFill/>
         </p:spPr>
         <p:txBody>
-          <a:bodyPr wrap="square" lIns="0" rIns="0" tIns="0" bIns="0" anchor="t">
+          <a:bodyPr wrap="square" lIns="0" tIns="0" rIns="0" bIns="0" anchor="t">
             <a:spAutoFit/>
           </a:bodyPr>
           <a:lstStyle/>
@@ -12135,7 +12176,7 @@
           <a:noFill/>
         </p:spPr>
         <p:txBody>
-          <a:bodyPr wrap="square" lIns="0" rIns="0" tIns="0" bIns="0" anchor="t">
+          <a:bodyPr wrap="square" lIns="0" tIns="0" rIns="0" bIns="0" anchor="t">
             <a:spAutoFit/>
           </a:bodyPr>
           <a:lstStyle/>
@@ -12170,7 +12211,7 @@
           <a:noFill/>
         </p:spPr>
         <p:txBody>
-          <a:bodyPr wrap="square" lIns="0" rIns="0" tIns="0" bIns="0" anchor="t">
+          <a:bodyPr wrap="square" lIns="0" tIns="0" rIns="0" bIns="0" anchor="t">
             <a:spAutoFit/>
           </a:bodyPr>
           <a:lstStyle/>
@@ -12205,7 +12246,7 @@
           <a:noFill/>
         </p:spPr>
         <p:txBody>
-          <a:bodyPr wrap="square" lIns="0" rIns="0" tIns="0" bIns="0" anchor="t">
+          <a:bodyPr wrap="square" lIns="0" tIns="0" rIns="0" bIns="0" anchor="t">
             <a:spAutoFit/>
           </a:bodyPr>
           <a:lstStyle/>
@@ -12240,7 +12281,7 @@
           <a:noFill/>
         </p:spPr>
         <p:txBody>
-          <a:bodyPr wrap="square" lIns="0" rIns="0" tIns="0" bIns="0" anchor="t">
+          <a:bodyPr wrap="square" lIns="0" tIns="0" rIns="0" bIns="0" anchor="t">
             <a:spAutoFit/>
           </a:bodyPr>
           <a:lstStyle/>
@@ -12267,7 +12308,7 @@
 </file>
 
 <file path=ppt/slides/slide7.xml><?xml version="1.0" encoding="utf-8"?>
-<p:sld xmlns:a="http://schemas.openxmlformats.org/drawingml/2006/main" xmlns:p="http://schemas.openxmlformats.org/presentationml/2006/main" xmlns:r="http://schemas.openxmlformats.org/officeDocument/2006/relationships">
+<p:sld xmlns:a="http://schemas.openxmlformats.org/drawingml/2006/main" xmlns:r="http://schemas.openxmlformats.org/officeDocument/2006/relationships" xmlns:p="http://schemas.openxmlformats.org/presentationml/2006/main">
   <p:cSld>
     <p:spTree>
       <p:nvGrpSpPr>
@@ -12275,7 +12316,14 @@
         <p:cNvGrpSpPr/>
         <p:nvPr/>
       </p:nvGrpSpPr>
-      <p:grpSpPr/>
+      <p:grpSpPr>
+        <a:xfrm>
+          <a:off x="0" y="0"/>
+          <a:ext cx="0" cy="0"/>
+          <a:chOff x="0" y="0"/>
+          <a:chExt cx="0" cy="0"/>
+        </a:xfrm>
+      </p:grpSpPr>
       <p:sp>
         <p:nvSpPr>
           <p:cNvPr id="2" name="TextBox 1"/>
@@ -12293,7 +12341,7 @@
           <a:noFill/>
         </p:spPr>
         <p:txBody>
-          <a:bodyPr wrap="square" lIns="0" rIns="0" tIns="0" bIns="0" anchor="t">
+          <a:bodyPr wrap="square" lIns="0" tIns="0" rIns="0" bIns="0" anchor="t">
             <a:spAutoFit/>
           </a:bodyPr>
           <a:lstStyle/>
@@ -12328,7 +12376,7 @@
           <a:noFill/>
         </p:spPr>
         <p:txBody>
-          <a:bodyPr wrap="square" lIns="0" rIns="0" tIns="0" bIns="0" anchor="t">
+          <a:bodyPr wrap="square" lIns="0" tIns="0" rIns="0" bIns="0" anchor="t">
             <a:spAutoFit/>
           </a:bodyPr>
           <a:lstStyle/>
@@ -12398,7 +12446,7 @@
           <a:noFill/>
         </p:spPr>
         <p:txBody>
-          <a:bodyPr wrap="square" lIns="0" rIns="0" tIns="0" bIns="0" anchor="t">
+          <a:bodyPr wrap="square" lIns="0" tIns="0" rIns="0" bIns="0" anchor="t">
             <a:spAutoFit/>
           </a:bodyPr>
           <a:lstStyle/>
@@ -12433,7 +12481,7 @@
           <a:noFill/>
         </p:spPr>
         <p:txBody>
-          <a:bodyPr wrap="square" lIns="0" rIns="0" tIns="0" bIns="0" anchor="t">
+          <a:bodyPr wrap="square" lIns="0" tIns="0" rIns="0" bIns="0" anchor="t">
             <a:spAutoFit/>
           </a:bodyPr>
           <a:lstStyle/>
@@ -12464,7 +12512,7 @@
           <p:nvPr/>
         </p:nvPicPr>
         <p:blipFill>
-          <a:blip r:embed="rId2"/>
+          <a:blip r:embed="rId3"/>
           <a:stretch>
             <a:fillRect/>
           </a:stretch>
@@ -12531,7 +12579,7 @@
           <a:noFill/>
         </p:spPr>
         <p:txBody>
-          <a:bodyPr wrap="square" lIns="0" rIns="0" tIns="0" bIns="0" anchor="t">
+          <a:bodyPr wrap="square" lIns="0" tIns="0" rIns="0" bIns="0" anchor="t">
             <a:spAutoFit/>
           </a:bodyPr>
           <a:lstStyle/>
@@ -12566,7 +12614,7 @@
           <a:noFill/>
         </p:spPr>
         <p:txBody>
-          <a:bodyPr wrap="square" lIns="0" rIns="0" tIns="0" bIns="0" anchor="t">
+          <a:bodyPr wrap="square" lIns="0" tIns="0" rIns="0" bIns="0" anchor="t">
             <a:spAutoFit/>
           </a:bodyPr>
           <a:lstStyle/>
@@ -12601,7 +12649,7 @@
           <a:noFill/>
         </p:spPr>
         <p:txBody>
-          <a:bodyPr wrap="square" lIns="0" rIns="0" tIns="0" bIns="0" anchor="t">
+          <a:bodyPr wrap="square" lIns="0" tIns="0" rIns="0" bIns="0" anchor="t">
             <a:spAutoFit/>
           </a:bodyPr>
           <a:lstStyle/>
@@ -12671,7 +12719,7 @@
           <a:noFill/>
         </p:spPr>
         <p:txBody>
-          <a:bodyPr wrap="square" lIns="0" rIns="0" tIns="0" bIns="0" anchor="t">
+          <a:bodyPr wrap="square" lIns="0" tIns="0" rIns="0" bIns="0" anchor="t">
             <a:spAutoFit/>
           </a:bodyPr>
           <a:lstStyle/>
@@ -12706,7 +12754,7 @@
           <a:noFill/>
         </p:spPr>
         <p:txBody>
-          <a:bodyPr wrap="square" lIns="0" rIns="0" tIns="0" bIns="0" anchor="t">
+          <a:bodyPr wrap="square" lIns="0" tIns="0" rIns="0" bIns="0" anchor="t">
             <a:spAutoFit/>
           </a:bodyPr>
           <a:lstStyle/>
@@ -12741,7 +12789,7 @@
           <a:noFill/>
         </p:spPr>
         <p:txBody>
-          <a:bodyPr wrap="square" lIns="0" rIns="0" tIns="0" bIns="0" anchor="t">
+          <a:bodyPr wrap="square" lIns="0" tIns="0" rIns="0" bIns="0" anchor="t">
             <a:spAutoFit/>
           </a:bodyPr>
           <a:lstStyle/>
@@ -12811,7 +12859,7 @@
           <a:noFill/>
         </p:spPr>
         <p:txBody>
-          <a:bodyPr wrap="square" lIns="0" rIns="0" tIns="0" bIns="0" anchor="t">
+          <a:bodyPr wrap="square" lIns="0" tIns="0" rIns="0" bIns="0" anchor="t">
             <a:spAutoFit/>
           </a:bodyPr>
           <a:lstStyle/>
@@ -12846,7 +12894,7 @@
           <a:noFill/>
         </p:spPr>
         <p:txBody>
-          <a:bodyPr wrap="square" lIns="0" rIns="0" tIns="0" bIns="0" anchor="t">
+          <a:bodyPr wrap="square" lIns="0" tIns="0" rIns="0" bIns="0" anchor="t">
             <a:spAutoFit/>
           </a:bodyPr>
           <a:lstStyle/>
@@ -12881,7 +12929,7 @@
           <a:noFill/>
         </p:spPr>
         <p:txBody>
-          <a:bodyPr wrap="square" lIns="0" rIns="0" tIns="0" bIns="0" anchor="t">
+          <a:bodyPr wrap="square" lIns="0" tIns="0" rIns="0" bIns="0" anchor="t">
             <a:spAutoFit/>
           </a:bodyPr>
           <a:lstStyle/>
@@ -12916,7 +12964,7 @@
           <a:noFill/>
         </p:spPr>
         <p:txBody>
-          <a:bodyPr wrap="square" lIns="0" rIns="0" tIns="0" bIns="0" anchor="t">
+          <a:bodyPr wrap="square" lIns="0" tIns="0" rIns="0" bIns="0" anchor="t">
             <a:spAutoFit/>
           </a:bodyPr>
           <a:lstStyle/>
@@ -12951,7 +12999,7 @@
           <a:noFill/>
         </p:spPr>
         <p:txBody>
-          <a:bodyPr wrap="square" lIns="0" rIns="0" tIns="0" bIns="0" anchor="t">
+          <a:bodyPr wrap="square" lIns="0" tIns="0" rIns="0" bIns="0" anchor="t">
             <a:spAutoFit/>
           </a:bodyPr>
           <a:lstStyle/>
@@ -12978,7 +13026,7 @@
 </file>
 
 <file path=ppt/slides/slide8.xml><?xml version="1.0" encoding="utf-8"?>
-<p:sld xmlns:a="http://schemas.openxmlformats.org/drawingml/2006/main" xmlns:p="http://schemas.openxmlformats.org/presentationml/2006/main" xmlns:r="http://schemas.openxmlformats.org/officeDocument/2006/relationships">
+<p:sld xmlns:a="http://schemas.openxmlformats.org/drawingml/2006/main" xmlns:r="http://schemas.openxmlformats.org/officeDocument/2006/relationships" xmlns:p="http://schemas.openxmlformats.org/presentationml/2006/main">
   <p:cSld>
     <p:spTree>
       <p:nvGrpSpPr>
@@ -12986,7 +13034,14 @@
         <p:cNvGrpSpPr/>
         <p:nvPr/>
       </p:nvGrpSpPr>
-      <p:grpSpPr/>
+      <p:grpSpPr>
+        <a:xfrm>
+          <a:off x="0" y="0"/>
+          <a:ext cx="0" cy="0"/>
+          <a:chOff x="0" y="0"/>
+          <a:chExt cx="0" cy="0"/>
+        </a:xfrm>
+      </p:grpSpPr>
       <p:sp>
         <p:nvSpPr>
           <p:cNvPr id="2" name="TextBox 1"/>
@@ -13004,7 +13059,7 @@
           <a:noFill/>
         </p:spPr>
         <p:txBody>
-          <a:bodyPr wrap="square" lIns="0" rIns="0" tIns="0" bIns="0" anchor="t">
+          <a:bodyPr wrap="square" lIns="0" tIns="0" rIns="0" bIns="0" anchor="t">
             <a:spAutoFit/>
           </a:bodyPr>
           <a:lstStyle/>
@@ -13039,7 +13094,7 @@
           <a:noFill/>
         </p:spPr>
         <p:txBody>
-          <a:bodyPr wrap="square" lIns="0" rIns="0" tIns="0" bIns="0" anchor="t">
+          <a:bodyPr wrap="square" lIns="0" tIns="0" rIns="0" bIns="0" anchor="t">
             <a:spAutoFit/>
           </a:bodyPr>
           <a:lstStyle/>
@@ -13109,7 +13164,7 @@
           <a:noFill/>
         </p:spPr>
         <p:txBody>
-          <a:bodyPr wrap="square" lIns="0" rIns="0" tIns="0" bIns="0" anchor="t">
+          <a:bodyPr wrap="square" lIns="0" tIns="0" rIns="0" bIns="0" anchor="t">
             <a:spAutoFit/>
           </a:bodyPr>
           <a:lstStyle/>
@@ -13144,7 +13199,7 @@
           <a:noFill/>
         </p:spPr>
         <p:txBody>
-          <a:bodyPr wrap="square" lIns="0" rIns="0" tIns="0" bIns="0" anchor="t">
+          <a:bodyPr wrap="square" lIns="0" tIns="0" rIns="0" bIns="0" anchor="t">
             <a:spAutoFit/>
           </a:bodyPr>
           <a:lstStyle/>
@@ -13175,7 +13230,7 @@
           <p:nvPr/>
         </p:nvPicPr>
         <p:blipFill>
-          <a:blip r:embed="rId2"/>
+          <a:blip r:embed="rId3"/>
           <a:stretch>
             <a:fillRect/>
           </a:stretch>
@@ -13242,7 +13297,7 @@
           <a:noFill/>
         </p:spPr>
         <p:txBody>
-          <a:bodyPr wrap="square" lIns="0" rIns="0" tIns="0" bIns="0" anchor="t">
+          <a:bodyPr wrap="square" lIns="0" tIns="0" rIns="0" bIns="0" anchor="t">
             <a:spAutoFit/>
           </a:bodyPr>
           <a:lstStyle/>
@@ -13277,7 +13332,7 @@
           <a:noFill/>
         </p:spPr>
         <p:txBody>
-          <a:bodyPr wrap="square" lIns="0" rIns="0" tIns="0" bIns="0" anchor="t">
+          <a:bodyPr wrap="square" lIns="0" tIns="0" rIns="0" bIns="0" anchor="t">
             <a:spAutoFit/>
           </a:bodyPr>
           <a:lstStyle/>
@@ -13312,7 +13367,7 @@
           <a:noFill/>
         </p:spPr>
         <p:txBody>
-          <a:bodyPr wrap="square" lIns="0" rIns="0" tIns="0" bIns="0" anchor="t">
+          <a:bodyPr wrap="square" lIns="0" tIns="0" rIns="0" bIns="0" anchor="t">
             <a:spAutoFit/>
           </a:bodyPr>
           <a:lstStyle/>
@@ -13382,7 +13437,7 @@
           <a:noFill/>
         </p:spPr>
         <p:txBody>
-          <a:bodyPr wrap="square" lIns="0" rIns="0" tIns="0" bIns="0" anchor="t">
+          <a:bodyPr wrap="square" lIns="0" tIns="0" rIns="0" bIns="0" anchor="t">
             <a:spAutoFit/>
           </a:bodyPr>
           <a:lstStyle/>
@@ -13417,7 +13472,7 @@
           <a:noFill/>
         </p:spPr>
         <p:txBody>
-          <a:bodyPr wrap="square" lIns="0" rIns="0" tIns="0" bIns="0" anchor="t">
+          <a:bodyPr wrap="square" lIns="0" tIns="0" rIns="0" bIns="0" anchor="t">
             <a:spAutoFit/>
           </a:bodyPr>
           <a:lstStyle/>
@@ -13452,7 +13507,7 @@
           <a:noFill/>
         </p:spPr>
         <p:txBody>
-          <a:bodyPr wrap="square" lIns="0" rIns="0" tIns="0" bIns="0" anchor="t">
+          <a:bodyPr wrap="square" lIns="0" tIns="0" rIns="0" bIns="0" anchor="t">
             <a:spAutoFit/>
           </a:bodyPr>
           <a:lstStyle/>
@@ -13522,7 +13577,7 @@
           <a:noFill/>
         </p:spPr>
         <p:txBody>
-          <a:bodyPr wrap="square" lIns="0" rIns="0" tIns="0" bIns="0" anchor="t">
+          <a:bodyPr wrap="square" lIns="0" tIns="0" rIns="0" bIns="0" anchor="t">
             <a:spAutoFit/>
           </a:bodyPr>
           <a:lstStyle/>
@@ -13557,7 +13612,7 @@
           <a:noFill/>
         </p:spPr>
         <p:txBody>
-          <a:bodyPr wrap="square" lIns="0" rIns="0" tIns="0" bIns="0" anchor="t">
+          <a:bodyPr wrap="square" lIns="0" tIns="0" rIns="0" bIns="0" anchor="t">
             <a:spAutoFit/>
           </a:bodyPr>
           <a:lstStyle/>
@@ -13592,7 +13647,7 @@
           <a:noFill/>
         </p:spPr>
         <p:txBody>
-          <a:bodyPr wrap="square" lIns="0" rIns="0" tIns="0" bIns="0" anchor="t">
+          <a:bodyPr wrap="square" lIns="0" tIns="0" rIns="0" bIns="0" anchor="t">
             <a:spAutoFit/>
           </a:bodyPr>
           <a:lstStyle/>
@@ -13662,7 +13717,7 @@
           <a:noFill/>
         </p:spPr>
         <p:txBody>
-          <a:bodyPr wrap="square" lIns="0" rIns="0" tIns="0" bIns="0" anchor="t">
+          <a:bodyPr wrap="square" lIns="0" tIns="0" rIns="0" bIns="0" anchor="t">
             <a:spAutoFit/>
           </a:bodyPr>
           <a:lstStyle/>
@@ -13697,7 +13752,7 @@
           <a:noFill/>
         </p:spPr>
         <p:txBody>
-          <a:bodyPr wrap="square" lIns="0" rIns="0" tIns="0" bIns="0" anchor="t">
+          <a:bodyPr wrap="square" lIns="0" tIns="0" rIns="0" bIns="0" anchor="t">
             <a:spAutoFit/>
           </a:bodyPr>
           <a:lstStyle/>
@@ -13732,7 +13787,7 @@
           <a:noFill/>
         </p:spPr>
         <p:txBody>
-          <a:bodyPr wrap="square" lIns="0" rIns="0" tIns="0" bIns="0" anchor="t">
+          <a:bodyPr wrap="square" lIns="0" tIns="0" rIns="0" bIns="0" anchor="t">
             <a:spAutoFit/>
           </a:bodyPr>
           <a:lstStyle/>
@@ -13767,7 +13822,7 @@
           <a:noFill/>
         </p:spPr>
         <p:txBody>
-          <a:bodyPr wrap="square" lIns="0" rIns="0" tIns="0" bIns="0" anchor="t">
+          <a:bodyPr wrap="square" lIns="0" tIns="0" rIns="0" bIns="0" anchor="t">
             <a:spAutoFit/>
           </a:bodyPr>
           <a:lstStyle/>
@@ -13802,7 +13857,7 @@
           <a:noFill/>
         </p:spPr>
         <p:txBody>
-          <a:bodyPr wrap="square" lIns="0" rIns="0" tIns="0" bIns="0" anchor="t">
+          <a:bodyPr wrap="square" lIns="0" tIns="0" rIns="0" bIns="0" anchor="t">
             <a:spAutoFit/>
           </a:bodyPr>
           <a:lstStyle/>
@@ -13829,7 +13884,7 @@
 </file>
 
 <file path=ppt/slides/slide9.xml><?xml version="1.0" encoding="utf-8"?>
-<p:sld xmlns:a="http://schemas.openxmlformats.org/drawingml/2006/main" xmlns:p="http://schemas.openxmlformats.org/presentationml/2006/main" xmlns:r="http://schemas.openxmlformats.org/officeDocument/2006/relationships">
+<p:sld xmlns:a="http://schemas.openxmlformats.org/drawingml/2006/main" xmlns:r="http://schemas.openxmlformats.org/officeDocument/2006/relationships" xmlns:p="http://schemas.openxmlformats.org/presentationml/2006/main">
   <p:cSld>
     <p:spTree>
       <p:nvGrpSpPr>
@@ -13837,7 +13892,14 @@
         <p:cNvGrpSpPr/>
         <p:nvPr/>
       </p:nvGrpSpPr>
-      <p:grpSpPr/>
+      <p:grpSpPr>
+        <a:xfrm>
+          <a:off x="0" y="0"/>
+          <a:ext cx="0" cy="0"/>
+          <a:chOff x="0" y="0"/>
+          <a:chExt cx="0" cy="0"/>
+        </a:xfrm>
+      </p:grpSpPr>
       <p:sp>
         <p:nvSpPr>
           <p:cNvPr id="2" name="TextBox 1"/>
@@ -13855,7 +13917,7 @@
           <a:noFill/>
         </p:spPr>
         <p:txBody>
-          <a:bodyPr wrap="square" lIns="0" rIns="0" tIns="0" bIns="0" anchor="t">
+          <a:bodyPr wrap="square" lIns="0" tIns="0" rIns="0" bIns="0" anchor="t">
             <a:spAutoFit/>
           </a:bodyPr>
           <a:lstStyle/>
@@ -13890,7 +13952,7 @@
           <a:noFill/>
         </p:spPr>
         <p:txBody>
-          <a:bodyPr wrap="square" lIns="0" rIns="0" tIns="0" bIns="0" anchor="t">
+          <a:bodyPr wrap="square" lIns="0" tIns="0" rIns="0" bIns="0" anchor="t">
             <a:spAutoFit/>
           </a:bodyPr>
           <a:lstStyle/>
@@ -13960,7 +14022,7 @@
           <a:noFill/>
         </p:spPr>
         <p:txBody>
-          <a:bodyPr wrap="square" lIns="0" rIns="0" tIns="0" bIns="0" anchor="t">
+          <a:bodyPr wrap="square" lIns="0" tIns="0" rIns="0" bIns="0" anchor="t">
             <a:spAutoFit/>
           </a:bodyPr>
           <a:lstStyle/>
@@ -13995,7 +14057,7 @@
           <a:noFill/>
         </p:spPr>
         <p:txBody>
-          <a:bodyPr wrap="square" lIns="0" rIns="0" tIns="0" bIns="0" anchor="t">
+          <a:bodyPr wrap="square" lIns="0" tIns="0" rIns="0" bIns="0" anchor="t">
             <a:spAutoFit/>
           </a:bodyPr>
           <a:lstStyle/>
@@ -14026,7 +14088,7 @@
           <p:nvPr/>
         </p:nvPicPr>
         <p:blipFill>
-          <a:blip r:embed="rId2"/>
+          <a:blip r:embed="rId3"/>
           <a:stretch>
             <a:fillRect/>
           </a:stretch>
@@ -14093,7 +14155,7 @@
           <a:noFill/>
         </p:spPr>
         <p:txBody>
-          <a:bodyPr wrap="square" lIns="0" rIns="0" tIns="0" bIns="0" anchor="t">
+          <a:bodyPr wrap="square" lIns="0" tIns="0" rIns="0" bIns="0" anchor="t">
             <a:spAutoFit/>
           </a:bodyPr>
           <a:lstStyle/>
@@ -14128,7 +14190,7 @@
           <a:noFill/>
         </p:spPr>
         <p:txBody>
-          <a:bodyPr wrap="square" lIns="0" rIns="0" tIns="0" bIns="0" anchor="t">
+          <a:bodyPr wrap="square" lIns="0" tIns="0" rIns="0" bIns="0" anchor="t">
             <a:spAutoFit/>
           </a:bodyPr>
           <a:lstStyle/>
@@ -14163,7 +14225,7 @@
           <a:noFill/>
         </p:spPr>
         <p:txBody>
-          <a:bodyPr wrap="square" lIns="0" rIns="0" tIns="0" bIns="0" anchor="t">
+          <a:bodyPr wrap="square" lIns="0" tIns="0" rIns="0" bIns="0" anchor="t">
             <a:spAutoFit/>
           </a:bodyPr>
           <a:lstStyle/>
@@ -14233,7 +14295,7 @@
           <a:noFill/>
         </p:spPr>
         <p:txBody>
-          <a:bodyPr wrap="square" lIns="0" rIns="0" tIns="0" bIns="0" anchor="t">
+          <a:bodyPr wrap="square" lIns="0" tIns="0" rIns="0" bIns="0" anchor="t">
             <a:spAutoFit/>
           </a:bodyPr>
           <a:lstStyle/>
@@ -14268,7 +14330,7 @@
           <a:noFill/>
         </p:spPr>
         <p:txBody>
-          <a:bodyPr wrap="square" lIns="0" rIns="0" tIns="0" bIns="0" anchor="t">
+          <a:bodyPr wrap="square" lIns="0" tIns="0" rIns="0" bIns="0" anchor="t">
             <a:spAutoFit/>
           </a:bodyPr>
           <a:lstStyle/>
@@ -14303,7 +14365,7 @@
           <a:noFill/>
         </p:spPr>
         <p:txBody>
-          <a:bodyPr wrap="square" lIns="0" rIns="0" tIns="0" bIns="0" anchor="t">
+          <a:bodyPr wrap="square" lIns="0" tIns="0" rIns="0" bIns="0" anchor="t">
             <a:spAutoFit/>
           </a:bodyPr>
           <a:lstStyle/>
@@ -14373,7 +14435,7 @@
           <a:noFill/>
         </p:spPr>
         <p:txBody>
-          <a:bodyPr wrap="square" lIns="0" rIns="0" tIns="0" bIns="0" anchor="t">
+          <a:bodyPr wrap="square" lIns="0" tIns="0" rIns="0" bIns="0" anchor="t">
             <a:spAutoFit/>
           </a:bodyPr>
           <a:lstStyle/>
@@ -14408,7 +14470,7 @@
           <a:noFill/>
         </p:spPr>
         <p:txBody>
-          <a:bodyPr wrap="square" lIns="0" rIns="0" tIns="0" bIns="0" anchor="t">
+          <a:bodyPr wrap="square" lIns="0" tIns="0" rIns="0" bIns="0" anchor="t">
             <a:spAutoFit/>
           </a:bodyPr>
           <a:lstStyle/>
@@ -14443,7 +14505,7 @@
           <a:noFill/>
         </p:spPr>
         <p:txBody>
-          <a:bodyPr wrap="square" lIns="0" rIns="0" tIns="0" bIns="0" anchor="t">
+          <a:bodyPr wrap="square" lIns="0" tIns="0" rIns="0" bIns="0" anchor="t">
             <a:spAutoFit/>
           </a:bodyPr>
           <a:lstStyle/>
@@ -14513,7 +14575,7 @@
           <a:noFill/>
         </p:spPr>
         <p:txBody>
-          <a:bodyPr wrap="square" lIns="0" rIns="0" tIns="0" bIns="0" anchor="t">
+          <a:bodyPr wrap="square" lIns="0" tIns="0" rIns="0" bIns="0" anchor="t">
             <a:spAutoFit/>
           </a:bodyPr>
           <a:lstStyle/>
@@ -14548,7 +14610,7 @@
           <a:noFill/>
         </p:spPr>
         <p:txBody>
-          <a:bodyPr wrap="square" lIns="0" rIns="0" tIns="0" bIns="0" anchor="t">
+          <a:bodyPr wrap="square" lIns="0" tIns="0" rIns="0" bIns="0" anchor="t">
             <a:spAutoFit/>
           </a:bodyPr>
           <a:lstStyle/>
@@ -14583,7 +14645,7 @@
           <a:noFill/>
         </p:spPr>
         <p:txBody>
-          <a:bodyPr wrap="square" lIns="0" rIns="0" tIns="0" bIns="0" anchor="t">
+          <a:bodyPr wrap="square" lIns="0" tIns="0" rIns="0" bIns="0" anchor="t">
             <a:spAutoFit/>
           </a:bodyPr>
           <a:lstStyle/>
@@ -14618,7 +14680,7 @@
           <a:noFill/>
         </p:spPr>
         <p:txBody>
-          <a:bodyPr wrap="square" lIns="0" rIns="0" tIns="0" bIns="0" anchor="t">
+          <a:bodyPr wrap="square" lIns="0" tIns="0" rIns="0" bIns="0" anchor="t">
             <a:spAutoFit/>
           </a:bodyPr>
           <a:lstStyle/>
@@ -14653,7 +14715,7 @@
           <a:noFill/>
         </p:spPr>
         <p:txBody>
-          <a:bodyPr wrap="square" lIns="0" rIns="0" tIns="0" bIns="0" anchor="t">
+          <a:bodyPr wrap="square" lIns="0" tIns="0" rIns="0" bIns="0" anchor="t">
             <a:spAutoFit/>
           </a:bodyPr>
           <a:lstStyle/>
@@ -15010,44 +15072,44 @@
         <a:sysClr val="window" lastClr="FFFFFF"/>
       </a:lt1>
       <a:dk2>
-        <a:srgbClr val="1F497D"/>
+        <a:srgbClr val="0E2841"/>
       </a:dk2>
       <a:lt2>
-        <a:srgbClr val="EEECE1"/>
+        <a:srgbClr val="E8E8E8"/>
       </a:lt2>
       <a:accent1>
-        <a:srgbClr val="4F81BD"/>
+        <a:srgbClr val="156082"/>
       </a:accent1>
       <a:accent2>
-        <a:srgbClr val="C0504D"/>
+        <a:srgbClr val="E97132"/>
       </a:accent2>
       <a:accent3>
-        <a:srgbClr val="9BBB59"/>
+        <a:srgbClr val="196B24"/>
       </a:accent3>
       <a:accent4>
-        <a:srgbClr val="8064A2"/>
+        <a:srgbClr val="0F9ED5"/>
       </a:accent4>
       <a:accent5>
-        <a:srgbClr val="4BACC6"/>
+        <a:srgbClr val="A02B93"/>
       </a:accent5>
       <a:accent6>
-        <a:srgbClr val="F79646"/>
+        <a:srgbClr val="4EA72E"/>
       </a:accent6>
       <a:hlink>
-        <a:srgbClr val="0000FF"/>
+        <a:srgbClr val="467886"/>
       </a:hlink>
       <a:folHlink>
-        <a:srgbClr val="800080"/>
+        <a:srgbClr val="96607D"/>
       </a:folHlink>
     </a:clrScheme>
     <a:fontScheme name="Office">
       <a:majorFont>
-        <a:latin typeface="Calibri"/>
+        <a:latin typeface="Aptos Display" panose="02110004020202020204"/>
         <a:ea typeface=""/>
         <a:cs typeface=""/>
-        <a:font script="Jpan" typeface="ＭＳ Ｐゴシック"/>
+        <a:font script="Jpan" typeface="游ゴシック Light"/>
         <a:font script="Hang" typeface="맑은 고딕"/>
-        <a:font script="Hans" typeface="宋体"/>
+        <a:font script="Hans" typeface="等线 Light"/>
         <a:font script="Hant" typeface="新細明體"/>
         <a:font script="Arab" typeface="Times New Roman"/>
         <a:font script="Hebr" typeface="Times New Roman"/>
@@ -15075,14 +15137,31 @@
         <a:font script="Viet" typeface="Times New Roman"/>
         <a:font script="Uigh" typeface="Microsoft Uighur"/>
         <a:font script="Geor" typeface="Sylfaen"/>
+        <a:font script="Armn" typeface="Arial"/>
+        <a:font script="Bugi" typeface="Leelawadee UI"/>
+        <a:font script="Bopo" typeface="Microsoft JhengHei"/>
+        <a:font script="Java" typeface="Javanese Text"/>
+        <a:font script="Lisu" typeface="Segoe UI"/>
+        <a:font script="Mymr" typeface="Myanmar Text"/>
+        <a:font script="Nkoo" typeface="Ebrima"/>
+        <a:font script="Olck" typeface="Nirmala UI"/>
+        <a:font script="Osma" typeface="Ebrima"/>
+        <a:font script="Phag" typeface="Phagspa"/>
+        <a:font script="Syrn" typeface="Estrangelo Edessa"/>
+        <a:font script="Syrj" typeface="Estrangelo Edessa"/>
+        <a:font script="Syre" typeface="Estrangelo Edessa"/>
+        <a:font script="Sora" typeface="Nirmala UI"/>
+        <a:font script="Tale" typeface="Microsoft Tai Le"/>
+        <a:font script="Talu" typeface="Microsoft New Tai Lue"/>
+        <a:font script="Tfng" typeface="Ebrima"/>
       </a:majorFont>
       <a:minorFont>
-        <a:latin typeface="Calibri"/>
+        <a:latin typeface="Aptos" panose="02110004020202020204"/>
         <a:ea typeface=""/>
         <a:cs typeface=""/>
-        <a:font script="Jpan" typeface="ＭＳ Ｐゴシック"/>
+        <a:font script="Jpan" typeface="游ゴシック"/>
         <a:font script="Hang" typeface="맑은 고딕"/>
-        <a:font script="Hans" typeface="宋体"/>
+        <a:font script="Hans" typeface="等线"/>
         <a:font script="Hant" typeface="新細明體"/>
         <a:font script="Arab" typeface="Arial"/>
         <a:font script="Hebr" typeface="Arial"/>
@@ -15110,6 +15189,23 @@
         <a:font script="Viet" typeface="Arial"/>
         <a:font script="Uigh" typeface="Microsoft Uighur"/>
         <a:font script="Geor" typeface="Sylfaen"/>
+        <a:font script="Armn" typeface="Arial"/>
+        <a:font script="Bugi" typeface="Leelawadee UI"/>
+        <a:font script="Bopo" typeface="Microsoft JhengHei"/>
+        <a:font script="Java" typeface="Javanese Text"/>
+        <a:font script="Lisu" typeface="Segoe UI"/>
+        <a:font script="Mymr" typeface="Myanmar Text"/>
+        <a:font script="Nkoo" typeface="Ebrima"/>
+        <a:font script="Olck" typeface="Nirmala UI"/>
+        <a:font script="Osma" typeface="Ebrima"/>
+        <a:font script="Phag" typeface="Phagspa"/>
+        <a:font script="Syrn" typeface="Estrangelo Edessa"/>
+        <a:font script="Syrj" typeface="Estrangelo Edessa"/>
+        <a:font script="Syre" typeface="Estrangelo Edessa"/>
+        <a:font script="Sora" typeface="Nirmala UI"/>
+        <a:font script="Tale" typeface="Microsoft Tai Le"/>
+        <a:font script="Talu" typeface="Microsoft New Tai Lue"/>
+        <a:font script="Tfng" typeface="Ebrima"/>
       </a:minorFont>
     </a:fontScheme>
     <a:fmtScheme name="Office">
@@ -15121,180 +15217,136 @@
           <a:gsLst>
             <a:gs pos="0">
               <a:schemeClr val="phClr">
-                <a:tint val="50000"/>
-                <a:satMod val="300000"/>
+                <a:lumMod val="110000"/>
+                <a:satMod val="105000"/>
+                <a:tint val="67000"/>
               </a:schemeClr>
             </a:gs>
-            <a:gs pos="35000">
+            <a:gs pos="50000">
               <a:schemeClr val="phClr">
-                <a:tint val="37000"/>
-                <a:satMod val="300000"/>
+                <a:lumMod val="105000"/>
+                <a:satMod val="103000"/>
+                <a:tint val="73000"/>
               </a:schemeClr>
             </a:gs>
             <a:gs pos="100000">
               <a:schemeClr val="phClr">
-                <a:tint val="15000"/>
-                <a:satMod val="350000"/>
+                <a:lumMod val="105000"/>
+                <a:satMod val="109000"/>
+                <a:tint val="81000"/>
               </a:schemeClr>
             </a:gs>
           </a:gsLst>
-          <a:lin ang="16200000" scaled="1"/>
+          <a:lin ang="5400000" scaled="0"/>
         </a:gradFill>
         <a:gradFill rotWithShape="1">
           <a:gsLst>
             <a:gs pos="0">
               <a:schemeClr val="phClr">
-                <a:tint val="100000"/>
+                <a:satMod val="103000"/>
+                <a:lumMod val="102000"/>
+                <a:tint val="94000"/>
+              </a:schemeClr>
+            </a:gs>
+            <a:gs pos="50000">
+              <a:schemeClr val="phClr">
+                <a:satMod val="110000"/>
+                <a:lumMod val="100000"/>
                 <a:shade val="100000"/>
-                <a:satMod val="130000"/>
               </a:schemeClr>
             </a:gs>
             <a:gs pos="100000">
               <a:schemeClr val="phClr">
-                <a:tint val="50000"/>
-                <a:shade val="100000"/>
-                <a:satMod val="350000"/>
+                <a:lumMod val="99000"/>
+                <a:satMod val="120000"/>
+                <a:shade val="78000"/>
               </a:schemeClr>
             </a:gs>
           </a:gsLst>
-          <a:lin ang="16200000" scaled="0"/>
+          <a:lin ang="5400000" scaled="0"/>
         </a:gradFill>
       </a:fillStyleLst>
       <a:lnStyleLst>
-        <a:ln w="9525" cap="flat" cmpd="sng" algn="ctr">
+        <a:ln w="12700" cap="flat" cmpd="sng" algn="ctr">
           <a:solidFill>
-            <a:schemeClr val="phClr">
-              <a:shade val="95000"/>
-              <a:satMod val="105000"/>
-            </a:schemeClr>
+            <a:schemeClr val="phClr"/>
           </a:solidFill>
           <a:prstDash val="solid"/>
+          <a:miter lim="800000"/>
+        </a:ln>
+        <a:ln w="19050" cap="flat" cmpd="sng" algn="ctr">
+          <a:solidFill>
+            <a:schemeClr val="phClr"/>
+          </a:solidFill>
+          <a:prstDash val="solid"/>
+          <a:miter lim="800000"/>
         </a:ln>
         <a:ln w="25400" cap="flat" cmpd="sng" algn="ctr">
           <a:solidFill>
             <a:schemeClr val="phClr"/>
           </a:solidFill>
           <a:prstDash val="solid"/>
-        </a:ln>
-        <a:ln w="38100" cap="flat" cmpd="sng" algn="ctr">
-          <a:solidFill>
-            <a:schemeClr val="phClr"/>
-          </a:solidFill>
-          <a:prstDash val="solid"/>
+          <a:miter lim="800000"/>
         </a:ln>
       </a:lnStyleLst>
       <a:effectStyleLst>
         <a:effectStyle>
+          <a:effectLst/>
+        </a:effectStyle>
+        <a:effectStyle>
+          <a:effectLst/>
+        </a:effectStyle>
+        <a:effectStyle>
           <a:effectLst>
-            <a:outerShdw blurRad="40000" dist="20000" dir="5400000" rotWithShape="0">
+            <a:outerShdw blurRad="57150" dist="19050" dir="5400000" algn="ctr" rotWithShape="0">
               <a:srgbClr val="000000">
-                <a:alpha val="38000"/>
+                <a:alpha val="63000"/>
               </a:srgbClr>
             </a:outerShdw>
           </a:effectLst>
-        </a:effectStyle>
-        <a:effectStyle>
-          <a:effectLst>
-            <a:outerShdw blurRad="40000" dist="23000" dir="5400000" rotWithShape="0">
-              <a:srgbClr val="000000">
-                <a:alpha val="35000"/>
-              </a:srgbClr>
-            </a:outerShdw>
-          </a:effectLst>
-        </a:effectStyle>
-        <a:effectStyle>
-          <a:effectLst>
-            <a:outerShdw blurRad="40000" dist="23000" dir="5400000" rotWithShape="0">
-              <a:srgbClr val="000000">
-                <a:alpha val="35000"/>
-              </a:srgbClr>
-            </a:outerShdw>
-          </a:effectLst>
-          <a:scene3d>
-            <a:camera prst="orthographicFront">
-              <a:rot lat="0" lon="0" rev="0"/>
-            </a:camera>
-            <a:lightRig rig="threePt" dir="t">
-              <a:rot lat="0" lon="0" rev="1200000"/>
-            </a:lightRig>
-          </a:scene3d>
-          <a:sp3d>
-            <a:bevelT w="63500" h="25400"/>
-          </a:sp3d>
         </a:effectStyle>
       </a:effectStyleLst>
       <a:bgFillStyleLst>
         <a:solidFill>
           <a:schemeClr val="phClr"/>
         </a:solidFill>
+        <a:solidFill>
+          <a:schemeClr val="phClr">
+            <a:tint val="95000"/>
+            <a:satMod val="170000"/>
+          </a:schemeClr>
+        </a:solidFill>
         <a:gradFill rotWithShape="1">
           <a:gsLst>
             <a:gs pos="0">
               <a:schemeClr val="phClr">
-                <a:tint val="40000"/>
-                <a:satMod val="350000"/>
+                <a:tint val="93000"/>
+                <a:satMod val="150000"/>
+                <a:shade val="98000"/>
+                <a:lumMod val="102000"/>
               </a:schemeClr>
             </a:gs>
-            <a:gs pos="40000">
+            <a:gs pos="50000">
               <a:schemeClr val="phClr">
-                <a:tint val="45000"/>
-                <a:shade val="99000"/>
-                <a:satMod val="350000"/>
+                <a:tint val="98000"/>
+                <a:satMod val="130000"/>
+                <a:shade val="90000"/>
+                <a:lumMod val="103000"/>
               </a:schemeClr>
             </a:gs>
             <a:gs pos="100000">
               <a:schemeClr val="phClr">
-                <a:shade val="20000"/>
-                <a:satMod val="255000"/>
+                <a:shade val="63000"/>
+                <a:satMod val="120000"/>
               </a:schemeClr>
             </a:gs>
           </a:gsLst>
-          <a:path path="circle">
-            <a:fillToRect l="50000" t="-80000" r="50000" b="180000"/>
-          </a:path>
-        </a:gradFill>
-        <a:gradFill rotWithShape="1">
-          <a:gsLst>
-            <a:gs pos="0">
-              <a:schemeClr val="phClr">
-                <a:tint val="80000"/>
-                <a:satMod val="300000"/>
-              </a:schemeClr>
-            </a:gs>
-            <a:gs pos="100000">
-              <a:schemeClr val="phClr">
-                <a:shade val="30000"/>
-                <a:satMod val="200000"/>
-              </a:schemeClr>
-            </a:gs>
-          </a:gsLst>
-          <a:path path="circle">
-            <a:fillToRect l="50000" t="50000" r="50000" b="50000"/>
-          </a:path>
+          <a:lin ang="5400000" scaled="0"/>
         </a:gradFill>
       </a:bgFillStyleLst>
     </a:fmtScheme>
   </a:themeElements>
   <a:objectDefaults>
-    <a:spDef>
-      <a:spPr/>
-      <a:bodyPr/>
-      <a:lstStyle/>
-      <a:style>
-        <a:lnRef idx="1">
-          <a:schemeClr val="accent1"/>
-        </a:lnRef>
-        <a:fillRef idx="3">
-          <a:schemeClr val="accent1"/>
-        </a:fillRef>
-        <a:effectRef idx="2">
-          <a:schemeClr val="accent1"/>
-        </a:effectRef>
-        <a:fontRef idx="minor">
-          <a:schemeClr val="lt1"/>
-        </a:fontRef>
-      </a:style>
-    </a:spDef>
     <a:lnDef>
       <a:spPr/>
       <a:bodyPr/>
@@ -15316,5 +15368,10 @@
     </a:lnDef>
   </a:objectDefaults>
   <a:extraClrSchemeLst/>
+  <a:extLst>
+    <a:ext uri="{05A4C25C-085E-4340-85A3-A5531E510DB2}">
+      <thm15:themeFamily xmlns:thm15="http://schemas.microsoft.com/office/thememl/2012/main" name="Office Theme" id="{2E142A2C-CD16-42D6-873A-C26D2A0506FA}" vid="{1BDDFF52-6CD6-40A5-AB3C-68EB2F1E4D0A}"/>
+    </a:ext>
+  </a:extLst>
 </a:theme>
 </file>
--- a/artifacts/deck/vjepa-direction-ring.pptx
+++ b/artifacts/deck/vjepa-direction-ring.pptx
@@ -743,23 +743,31 @@
           <a:lstStyle/>
           <a:p>
             <a:r>
-              <a:t>Direction is decodable at 11.4 degrees from LAYER 1 — one attention block. The paper reports it emerging only at a sharp mid-depth transition. Here there is no step, just a steep rise and a glide.</a:t>
-            </a:r>
-          </a:p>
-          <a:p>
-            <a:endParaRPr/>
-          </a:p>
-          <a:p>
-            <a:r>
-              <a:t>The obvious objection is that the probe reads POSITION, not direction. It does not: the frame-0 centroid alone scores 86.3 degrees against a chance of 90. So this is real, and most likely a dataset-simplicity effect — one high-contrast disk on an empty field.</a:t>
-            </a:r>
-          </a:p>
-          <a:p>
-            <a:endParaRPr/>
-          </a:p>
-          <a:p>
-            <a:r>
-              <a:t>Two things to flag while this is up. The tracker oracle beats every encoder probe, so V-JEPA loses roughly half the recoverable signal. And pooling moves the apparent best layer by up to six layers, so a single-pooling curve would confound emergence with pooling dilution.</a:t>
+              <a:t>Layer-wise probing for all three variables. Chance for direction is 90 degrees.</a:t>
+            </a:r>
+          </a:p>
+          <a:p/>
+          <a:p>
+            <a:r>
+              <a:t>THE HEADLINE. Everything is readable after ONE attention block. Direction goes from 66.9 degrees at layer 0 to 11.4 at layer 1; speed from 0.82 to 0.10; acceleration from 2.14 to 0.30. The paper reports direction emerging only at a sharp mid-depth transition. Here there is no step, just a steep rise and a glide.</a:t>
+            </a:r>
+          </a:p>
+          <a:p/>
+          <a:p>
+            <a:r>
+              <a:t>THE CONTROL that makes that a finding rather than an artefact: the worry is that the probe reads POSITION rather than direction. It does not — the frame-0 centroid alone scores 86.3 degrees against a chance of 90. So this is real, and most likely a dataset-simplicity effect: one high-contrast disk on an empty field.</a:t>
+            </a:r>
+          </a:p>
+          <a:p/>
+          <a:p>
+            <a:r>
+              <a:t>IF ASKED WHERE EACH VARIABLE 'BECOMES AVAILABLE': be careful with thresholds. R-squared clears 0.95 at layer 1 for both scalars and layer 4 for direction, but R-squared saturates far too early to be informative — at layer 4 direction still has twice its eventual error. On the native metric, the scalars are within 2x of their best at layer 1 and direction at layer 4; within 1.2x at layers 11, 11 and 13. Same ordering, but it says where each variable is genuinely finished.</a:t>
+            </a:r>
+          </a:p>
+          <a:p/>
+          <a:p>
+            <a:r>
+              <a:t>TWO THINGS TO FLAG. The tracker oracle beats every encoder probe — 1.19 degrees against 2.57 — so V-JEPA loses roughly half the recoverable signal. And pooling moves the apparent best layer by up to six layers, so a single-pooling curve would confound emergence with pooling dilution. A third, tracker-selected pooling exists but is excluded from interpretation: its mask is built from the trajectory, which is the label.</a:t>
             </a:r>
           </a:p>
         </p:txBody>
@@ -8303,7 +8311,7 @@
           <a:p>
             <a:pPr algn="l"/>
             <a:r>
-              <a:rPr sz="3100" b="1" i="0">
+              <a:rPr sz="3100" b="1">
                 <a:solidFill>
                   <a:srgbClr val="17191C"/>
                 </a:solidFill>
@@ -8342,41 +8350,17 @@
               </a:lnSpc>
             </a:pPr>
             <a:r>
-              <a:rPr sz="1200" b="0" i="0">
+              <a:rPr sz="1200" b="0">
                 <a:solidFill>
                   <a:srgbClr val="71757B"/>
                 </a:solidFill>
                 <a:latin typeface="Avenir Next"/>
               </a:rPr>
-              <a:t>Layer-wise linear probes on held-out direction values. Chance is 90°. The dotted line is what a perfect pixel tracker achieves on the same clips.</a:t>
-            </a:r>
-          </a:p>
-        </p:txBody>
-      </p:sp>
-      <p:pic>
-        <p:nvPicPr>
-          <p:cNvPr id="7" name="Picture 6" descr="layer_sweep_direction.png"/>
-          <p:cNvPicPr>
-            <a:picLocks noChangeAspect="1"/>
-          </p:cNvPicPr>
-          <p:nvPr/>
-        </p:nvPicPr>
-        <p:blipFill>
-          <a:blip r:embed="rId3"/>
-          <a:stretch>
-            <a:fillRect/>
-          </a:stretch>
-        </p:blipFill>
-        <p:spPr>
-          <a:xfrm>
-            <a:off x="3054614" y="2633472"/>
-            <a:ext cx="6082467" cy="2697480"/>
-          </a:xfrm>
-          <a:prstGeom prst="rect">
-            <a:avLst/>
-          </a:prstGeom>
-        </p:spPr>
-      </p:pic>
+              <a:t>Layer-wise linear probes for all three variables, on held-out label values. The dash-dot line is what a perfect pixel tracker achieves on the same clips. Layer 0 is omitted — it is off-scale in every panel.</a:t>
+            </a:r>
+          </a:p>
+        </p:txBody>
+      </p:sp>
       <p:cxnSp>
         <p:nvCxnSpPr>
           <p:cNvPr id="8" name="Connector 7"/>
@@ -8436,7 +8420,7 @@
           <a:p>
             <a:pPr algn="l"/>
             <a:r>
-              <a:rPr sz="800" b="0" i="0" spc="120">
+              <a:rPr sz="800" b="0" spc="120">
                 <a:solidFill>
                   <a:srgbClr val="71757B"/>
                 </a:solidFill>
@@ -8471,7 +8455,7 @@
           <a:p>
             <a:pPr algn="l"/>
             <a:r>
-              <a:rPr sz="1500" b="1" i="0">
+              <a:rPr sz="1500" b="1">
                 <a:solidFill>
                   <a:srgbClr val="B03A2E"/>
                 </a:solidFill>
@@ -8506,7 +8490,7 @@
           <a:p>
             <a:pPr algn="l"/>
             <a:r>
-              <a:rPr sz="900" b="0" i="0">
+              <a:rPr sz="900" b="0">
                 <a:solidFill>
                   <a:srgbClr val="71757B"/>
                 </a:solidFill>
@@ -8576,13 +8560,13 @@
           <a:p>
             <a:pPr algn="l"/>
             <a:r>
-              <a:rPr sz="800" b="0" i="0" spc="120">
+              <a:rPr sz="800" b="0" spc="120">
                 <a:solidFill>
                   <a:srgbClr val="71757B"/>
                 </a:solidFill>
                 <a:latin typeface="Menlo"/>
               </a:rPr>
-              <a:t>BEST, LAYER 16</a:t>
+              <a:t>BEST, ALL THREE</a:t>
             </a:r>
           </a:p>
         </p:txBody>
@@ -8611,13 +8595,13 @@
           <a:p>
             <a:pPr algn="l"/>
             <a:r>
-              <a:rPr sz="1500" b="1" i="0">
+              <a:rPr sz="1300" b="1">
                 <a:solidFill>
                   <a:srgbClr val="1E7A4E"/>
                 </a:solidFill>
                 <a:latin typeface="Menlo"/>
               </a:rPr>
-              <a:t>2.57°</a:t>
+              <a:t>L16 / L14 / L14</a:t>
             </a:r>
           </a:p>
         </p:txBody>
@@ -8646,13 +8630,13 @@
           <a:p>
             <a:pPr algn="l"/>
             <a:r>
-              <a:rPr sz="900" b="0" i="0">
+              <a:rPr sz="900" b="0">
                 <a:solidFill>
                   <a:srgbClr val="71757B"/>
                 </a:solidFill>
                 <a:latin typeface="Avenir Next"/>
               </a:rPr>
-              <a:t>leak-free salience pooling</a:t>
+              <a:t>2.57° · 0.056 · 0.153</a:t>
             </a:r>
           </a:p>
         </p:txBody>
@@ -8716,7 +8700,7 @@
           <a:p>
             <a:pPr algn="l"/>
             <a:r>
-              <a:rPr sz="800" b="0" i="0" spc="120">
+              <a:rPr sz="800" b="0" spc="120">
                 <a:solidFill>
                   <a:srgbClr val="71757B"/>
                 </a:solidFill>
@@ -8751,13 +8735,13 @@
           <a:p>
             <a:pPr algn="l"/>
             <a:r>
-              <a:rPr sz="1500" b="1" i="0">
+              <a:rPr sz="1300" b="1">
                 <a:solidFill>
                   <a:srgbClr val="0B4F6C"/>
                 </a:solidFill>
                 <a:latin typeface="Menlo"/>
               </a:rPr>
-              <a:t>1.19°</a:t>
+              <a:t>1.19° · 0.011 · 0.036</a:t>
             </a:r>
           </a:p>
         </p:txBody>
@@ -8786,13 +8770,13 @@
           <a:p>
             <a:pPr algn="l"/>
             <a:r>
-              <a:rPr sz="900" b="0" i="0">
+              <a:rPr sz="900" b="0">
                 <a:solidFill>
                   <a:srgbClr val="71757B"/>
                 </a:solidFill>
                 <a:latin typeface="Avenir Next"/>
               </a:rPr>
-              <a:t>the encoder sits ~2× off it</a:t>
+              <a:t>the encoder never reaches it</a:t>
             </a:r>
           </a:p>
         </p:txBody>
@@ -8867,6 +8851,30 @@
           </a:p>
         </p:txBody>
       </p:sp>
+      <p:pic>
+        <p:nvPicPr>
+          <p:cNvPr id="22" name="Picture 21" descr="layer_sweep_all.png"/>
+          <p:cNvPicPr>
+            <a:picLocks noChangeAspect="1"/>
+          </p:cNvPicPr>
+          <p:nvPr/>
+        </p:nvPicPr>
+        <p:blipFill>
+          <a:blip r:embed="rId4"/>
+          <a:stretch>
+            <a:fillRect/>
+          </a:stretch>
+        </p:blipFill>
+        <p:spPr>
+          <a:xfrm>
+            <a:off x="2953512" y="3042636"/>
+            <a:ext cx="6291072" cy="1879151"/>
+          </a:xfrm>
+          <a:prstGeom prst="rect">
+            <a:avLst/>
+          </a:prstGeom>
+        </p:spPr>
+      </p:pic>
     </p:spTree>
   </p:cSld>
   <p:clrMapOvr>

--- a/artifacts/deck/vjepa-direction-ring.pptx
+++ b/artifacts/deck/vjepa-direction-ring.pptx
@@ -1455,31 +1455,49 @@
           <a:lstStyle/>
           <a:p>
             <a:r>
-              <a:t>Fit a periodic cubic spline through the per-value centroids and steer ALONG the curve. At the layer of the intervention this method is WORSE — 7.02 degrees against 5.32. Four blocks later the ordering flips hard.</a:t>
+              <a:t>This is the strongest result in the deck, and it is the one that answers Wurgaft directly.</a:t>
             </a:r>
           </a:p>
           <a:p/>
           <a:p>
             <a:r>
-              <a:t>The reason is visible in the numbers. Multi-probe steering solves for probe readouts and OVERSHOOTS to do it — alignment 1.33, well past the unit norm of a natural representation. That excess is exactly what attention discards. The spline edit lands at 1.03 and is kept.</a:t>
+              <a:t>EVERYTHING SO FAR HAS READ A PROBE on a downstream encoder layer — so it speaks about the REPRESENTATION. Their thesis is about BEHAVIOUR. For a JEPA the nearest thing to behaviour is what the predictor forecasts, and this checkpoint ships a driveable one.</a:t>
             </a:r>
           </a:p>
           <a:p/>
           <a:p>
             <a:r>
-              <a:t>Most telling: the spline puts LESS of itself in the readout subspace at injection, 0.09 against 0.32, yet survives far better. It is not pushing harder along the probe direction — it is moving the representation the way the network's own geometry moves it.</a:t>
+              <a:t>SETUP. Inject at layer 16, propagate through all 24 blocks, then ask the predictor to forecast temporal blocks four to seven from blocks zero to three. A probe fitted on UNSTEERED forecasts reads it. A change means the model's own forward prediction moved.</a:t>
             </a:r>
           </a:p>
           <a:p/>
           <a:p>
             <a:r>
-              <a:t>CONTROL, IF CHALLENGED ON EDIT SIZE. The two edits differ in magnitude — 8.5 for multi-probe, 22.1 for the spline — so someone will ask whether the bigger edit simply survives better. Rescaling the multi-probe edit settles it, and the confound runs the OTHER way: retention FALLS as the Euclidean edit grows. Half size retains 31 percent, normal size 25, double 22, and at 2.6 times — matching the spline's norm exactly — 21 percent against the spline's 76. At matched magnitude the gap widens from three times to three point six.</a:t>
+              <a:t>THE RESULT. Unsteered, the forecast encodes the clip's own direction at 6.5 degrees, so the forecast is readable — the experiment needs that. Multi-probe steering closes 7 PERCENT of the gap: the forecast still encodes the ORIGINAL motion, alignment 0.83. The model goes on predicting the motion it was always going to predict. The spline closes 95 PERCENT — the forecast now encodes the TARGET at alignment 0.96, no longer the original, and certainty rises to 0.999.</a:t>
             </a:r>
           </a:p>
           <a:p/>
           <a:p>
             <a:r>
-              <a:t>The sharpest way to say it: give the Euclidean edit THREE TIMES the initial alignment, plus the same perturbation budget, and it still ends up BELOW the spline four blocks later — 0.686 against 0.783. What survives is not how hard you push. It is whether you push somewhere the network maintains.</a:t>
+              <a:t>MAGNITUDE CONTROL, right panel. Scaling the Euclidean edit does help here, unlike retention on the previous slide where bigger was worse. But at MATCHED perturbation norm it reaches 41 percent against the spline's 95 — a 2.2 times difference in behavioural effect.</a:t>
+            </a:r>
+          </a:p>
+          <a:p/>
+          <a:p>
+            <a:r>
+              <a:t>THE LINE TO LAND: multi-probe steering satisfies every probe you point at it while leaving the model's forecast almost untouched. SATISFYING A PROBE IS NOT THE SAME AS STEERING A WORLD MODEL.</a:t>
+            </a:r>
+          </a:p>
+          <a:p/>
+          <a:p>
+            <a:r>
+              <a:t>CAVEAT to volunteer: 'behaviour' here is still a latent forecast read by a probe, not decoded pixels. The predictor forecasts encoder-space latents. So this closes the gap between representation and prediction, but not between prediction and rendered output.</a:t>
+            </a:r>
+          </a:p>
+          <a:p/>
+          <a:p>
+            <a:r>
+              <a:t>The previous slide's retention result — 76 against 25 percent — still stands and is about preservation. This one is different in kind: it is about what the model does next.</a:t>
             </a:r>
           </a:p>
         </p:txBody>
@@ -14037,13 +14055,13 @@
           <a:p>
             <a:pPr algn="l"/>
             <a:r>
-              <a:rPr sz="3100" b="1" i="0">
+              <a:rPr sz="3100" b="1">
                 <a:solidFill>
                   <a:srgbClr val="17191C"/>
                 </a:solidFill>
                 <a:latin typeface="Futura"/>
               </a:rPr>
-              <a:t>The on-manifold edit survives 3× better</a:t>
+              <a:t>It changes what the model predicts next</a:t>
             </a:r>
           </a:p>
         </p:txBody>
@@ -14076,41 +14094,17 @@
               </a:lnSpc>
             </a:pPr>
             <a:r>
-              <a:rPr sz="1200" b="0" i="0">
+              <a:rPr sz="1200" b="0">
                 <a:solidFill>
                   <a:srgbClr val="71757B"/>
                 </a:solidFill>
                 <a:latin typeface="Avenir Next"/>
               </a:rPr>
-              <a:t>Both methods steered to the same held-out targets, injected at layer 16, propagated through the same blocks, scored by alignment with the intended readout.</a:t>
-            </a:r>
-          </a:p>
-        </p:txBody>
-      </p:sp>
-      <p:pic>
-        <p:nvPicPr>
-          <p:cNvPr id="7" name="Picture 6" descr="d9_retention.png"/>
-          <p:cNvPicPr>
-            <a:picLocks noChangeAspect="1"/>
-          </p:cNvPicPr>
-          <p:nvPr/>
-        </p:nvPicPr>
-        <p:blipFill>
-          <a:blip r:embed="rId3"/>
-          <a:stretch>
-            <a:fillRect/>
-          </a:stretch>
-        </p:blipFill>
-        <p:spPr>
-          <a:xfrm>
-            <a:off x="2349347" y="2633472"/>
-            <a:ext cx="7493000" cy="2697480"/>
-          </a:xfrm>
-          <a:prstGeom prst="rect">
-            <a:avLst/>
-          </a:prstGeom>
-        </p:spPr>
-      </p:pic>
+              <a:t>Inject at layer 16, propagate through the whole encoder, then drive the shipped predictor: forecast the second half of the clip from the first. A probe fitted on unsteered forecasts reads the result — so this is behaviour, not representation.</a:t>
+            </a:r>
+          </a:p>
+        </p:txBody>
+      </p:sp>
       <p:cxnSp>
         <p:nvCxnSpPr>
           <p:cNvPr id="8" name="Connector 7"/>
@@ -14170,13 +14164,13 @@
           <a:p>
             <a:pPr algn="l"/>
             <a:r>
-              <a:rPr sz="800" b="0" i="0" spc="120">
+              <a:rPr sz="800" b="0" spc="120">
                 <a:solidFill>
                   <a:srgbClr val="71757B"/>
                 </a:solidFill>
                 <a:latin typeface="Menlo"/>
               </a:rPr>
-              <a:t>MULTI-PROBE</a:t>
+              <a:t>FORECAST, UNSTEERED</a:t>
             </a:r>
           </a:p>
         </p:txBody>
@@ -14205,13 +14199,13 @@
           <a:p>
             <a:pPr algn="l"/>
             <a:r>
-              <a:rPr sz="1500" b="1" i="0">
-                <a:solidFill>
-                  <a:srgbClr val="B03A2E"/>
+              <a:rPr sz="1500" b="1">
+                <a:solidFill>
+                  <a:srgbClr val="71757B"/>
                 </a:solidFill>
                 <a:latin typeface="Menlo"/>
               </a:rPr>
-              <a:t>25% retained</a:t>
+              <a:t>81.4°</a:t>
             </a:r>
           </a:p>
         </p:txBody>
@@ -14240,13 +14234,13 @@
           <a:p>
             <a:pPr algn="l"/>
             <a:r>
-              <a:rPr sz="900" b="0" i="0">
+              <a:rPr sz="900" b="0">
                 <a:solidFill>
                   <a:srgbClr val="71757B"/>
                 </a:solidFill>
                 <a:latin typeface="Avenir Next"/>
               </a:rPr>
-              <a:t>alignment +1.33 → +0.33</a:t>
+              <a:t>to the target — the floor</a:t>
             </a:r>
           </a:p>
         </p:txBody>
@@ -14310,13 +14304,13 @@
           <a:p>
             <a:pPr algn="l"/>
             <a:r>
-              <a:rPr sz="800" b="0" i="0" spc="120">
+              <a:rPr sz="800" b="0" spc="120">
                 <a:solidFill>
                   <a:srgbClr val="71757B"/>
                 </a:solidFill>
                 <a:latin typeface="Menlo"/>
               </a:rPr>
-              <a:t>MANIFOLD SPLINE</a:t>
+              <a:t>MULTI-PROBE K = 16</a:t>
             </a:r>
           </a:p>
         </p:txBody>
@@ -14345,13 +14339,13 @@
           <a:p>
             <a:pPr algn="l"/>
             <a:r>
-              <a:rPr sz="1500" b="1" i="0">
-                <a:solidFill>
-                  <a:srgbClr val="1E7A4E"/>
+              <a:rPr sz="1500" b="1">
+                <a:solidFill>
+                  <a:srgbClr val="B03A2E"/>
                 </a:solidFill>
                 <a:latin typeface="Menlo"/>
               </a:rPr>
-              <a:t>76% retained</a:t>
+              <a:t>76.4°</a:t>
             </a:r>
           </a:p>
         </p:txBody>
@@ -14380,13 +14374,13 @@
           <a:p>
             <a:pPr algn="l"/>
             <a:r>
-              <a:rPr sz="900" b="0" i="0">
+              <a:rPr sz="900" b="0">
                 <a:solidFill>
                   <a:srgbClr val="71757B"/>
                 </a:solidFill>
                 <a:latin typeface="Avenir Next"/>
               </a:rPr>
-              <a:t>alignment +1.03 → +0.78</a:t>
+              <a:t>7% of the gap closed</a:t>
             </a:r>
           </a:p>
         </p:txBody>
@@ -14450,13 +14444,13 @@
           <a:p>
             <a:pPr algn="l"/>
             <a:r>
-              <a:rPr sz="800" b="0" i="0" spc="120">
+              <a:rPr sz="800" b="0" spc="120">
                 <a:solidFill>
                   <a:srgbClr val="71757B"/>
                 </a:solidFill>
                 <a:latin typeface="Menlo"/>
               </a:rPr>
-              <a:t>IN FEATURE SPACE</a:t>
+              <a:t>SPLINE, ON-MANIFOLD</a:t>
             </a:r>
           </a:p>
         </p:txBody>
@@ -14485,13 +14479,13 @@
           <a:p>
             <a:pPr algn="l"/>
             <a:r>
-              <a:rPr sz="1500" b="1" i="0">
-                <a:solidFill>
-                  <a:srgbClr val="0B4F6C"/>
+              <a:rPr sz="1500" b="1">
+                <a:solidFill>
+                  <a:srgbClr val="1E7A4E"/>
                 </a:solidFill>
                 <a:latin typeface="Menlo"/>
               </a:rPr>
-              <a:t>multi-probe wins</a:t>
+              <a:t>14.4°</a:t>
             </a:r>
           </a:p>
         </p:txBody>
@@ -14520,13 +14514,13 @@
           <a:p>
             <a:pPr algn="l"/>
             <a:r>
-              <a:rPr sz="900" b="0" i="0">
+              <a:rPr sz="900" b="0">
                 <a:solidFill>
                   <a:srgbClr val="71757B"/>
                 </a:solidFill>
                 <a:latin typeface="Avenir Next"/>
               </a:rPr>
-              <a:t>5.32° vs 7.02°</a:t>
+              <a:t>95% — ceiling is 11.1°</a:t>
             </a:r>
           </a:p>
         </p:txBody>
@@ -14590,13 +14584,13 @@
           <a:p>
             <a:pPr algn="l"/>
             <a:r>
-              <a:rPr sz="800" b="0" i="0" spc="120">
+              <a:rPr sz="800" b="0" spc="120">
                 <a:solidFill>
                   <a:srgbClr val="71757B"/>
                 </a:solidFill>
                 <a:latin typeface="Menlo"/>
               </a:rPr>
-              <a:t>FOUR BLOCKS LATER</a:t>
+              <a:t>AT MATCHED ‖Δ‖</a:t>
             </a:r>
           </a:p>
         </p:txBody>
@@ -14625,13 +14619,13 @@
           <a:p>
             <a:pPr algn="l"/>
             <a:r>
-              <a:rPr sz="1500" b="1" i="0">
-                <a:solidFill>
-                  <a:srgbClr val="1E7A4E"/>
+              <a:rPr sz="1500" b="1">
+                <a:solidFill>
+                  <a:srgbClr val="0B4F6C"/>
                 </a:solidFill>
                 <a:latin typeface="Menlo"/>
               </a:rPr>
-              <a:t>manifold wins</a:t>
+              <a:t>41% vs 95%</a:t>
             </a:r>
           </a:p>
         </p:txBody>
@@ -14660,13 +14654,13 @@
           <a:p>
             <a:pPr algn="l"/>
             <a:r>
-              <a:rPr sz="900" b="0" i="0">
+              <a:rPr sz="900" b="0">
                 <a:solidFill>
                   <a:srgbClr val="71757B"/>
                 </a:solidFill>
                 <a:latin typeface="Avenir Next"/>
               </a:rPr>
-              <a:t>the ordering flips</a:t>
+              <a:t>not a magnitude effect</a:t>
             </a:r>
           </a:p>
         </p:txBody>
@@ -14741,6 +14735,30 @@
           </a:p>
         </p:txBody>
       </p:sp>
+      <p:pic>
+        <p:nvPicPr>
+          <p:cNvPr id="26" name="Picture 25" descr="behaviour_forecast.png"/>
+          <p:cNvPicPr>
+            <a:picLocks noChangeAspect="1"/>
+          </p:cNvPicPr>
+          <p:nvPr/>
+        </p:nvPicPr>
+        <p:blipFill>
+          <a:blip r:embed="rId4"/>
+          <a:stretch>
+            <a:fillRect/>
+          </a:stretch>
+        </p:blipFill>
+        <p:spPr>
+          <a:xfrm>
+            <a:off x="2953512" y="2902401"/>
+            <a:ext cx="6291072" cy="2159621"/>
+          </a:xfrm>
+          <a:prstGeom prst="rect">
+            <a:avLst/>
+          </a:prstGeom>
+        </p:spPr>
+      </p:pic>
     </p:spTree>
   </p:cSld>
   <p:clrMapOvr>

--- a/artifacts/deck/vjepa-direction-ring.pptx
+++ b/artifacts/deck/vjepa-direction-ring.pptx
@@ -1244,50 +1244,30 @@
           <a:lstStyle/>
           <a:p>
             <a:r>
-              <a:rPr dirty="0"/>
-              <a:t>You might expect the </a:t>
-            </a:r>
-            <a:r>
-              <a:rPr dirty="0" err="1"/>
-              <a:t>centre</a:t>
-            </a:r>
-            <a:r>
-              <a:rPr dirty="0"/>
-              <a:t> of the ring to be the stationary state: left plus right equals nothing. IT IS NOT. Speed survives completely, and so does the axis of motion. Only the direction bit is removed.</a:t>
-            </a:r>
-          </a:p>
-          <a:p>
-            <a:endParaRPr dirty="0"/>
-          </a:p>
-          <a:p>
-            <a:r>
-              <a:rPr dirty="0"/>
-              <a:t>So the model is holding: an object moving along this specific line, at 2.1 </a:t>
-            </a:r>
-            <a:r>
-              <a:rPr dirty="0" err="1"/>
-              <a:t>metres</a:t>
-            </a:r>
-            <a:r>
-              <a:rPr dirty="0"/>
-              <a:t> per second, with no fact about which of the two ways it is going. No clip in the dataset can be in that state.</a:t>
-            </a:r>
-          </a:p>
-          <a:p>
-            <a:endParaRPr dirty="0"/>
-          </a:p>
-          <a:p>
-            <a:r>
-              <a:rPr dirty="0"/>
-              <a:t>And it falls straight out of slide 4. m=1 is anti-symmetric under a 180-degree flip, so the two endpoints cancel exactly at the midpoint. m=2 is invariant, so the axis rides through untouched. That is also why the collapse bottoms out precisely at t = 0.5.</a:t>
-            </a:r>
-          </a:p>
-          <a:p>
-            <a:endParaRPr dirty="0"/>
-          </a:p>
-          <a:p>
-            <a:r>
-              <a:rPr dirty="0"/>
+              <a:t>You might expect the centre of the ring to be the stationary state: left plus right equals nothing. IT IS NOT. The axis of motion survives at full strength and speed survives in degraded form. Only the direction bit is removed outright.</a:t>
+            </a:r>
+          </a:p>
+          <a:p/>
+          <a:p>
+            <a:r>
+              <a:t>BE PRECISE ABOUT SPEED, because the honest version is still striking and the sloppy version will get caught. The population MEAN is flat along the whole chord — 2.10 to 2.17 metres per second. But per-clip error is not: it runs 1.1 times the probe's own baseline at the start, 2.2 times at the midpoint, 4.1 times at the far end. So speed is DEGRADED, not untouched. At 2.2 times the error is still 0.14 metres per second on a range of 0.25 to 4 — the state plainly still encodes a speed. Direction, by contrast, reaches ZERO information.</a:t>
+            </a:r>
+          </a:p>
+          <a:p/>
+          <a:p>
+            <a:r>
+              <a:t>So the model is holding: an object moving along this specific line, at roughly 2.1 metres per second, with no fact about which of the two ways it is going. No clip in the dataset can be in that state.</a:t>
+            </a:r>
+          </a:p>
+          <a:p/>
+          <a:p>
+            <a:r>
+              <a:t>And it falls straight out of slide 4. m=1 is anti-symmetric under a 180-degree flip, so the two endpoints cancel exactly at the midpoint. m=2 is invariant, so the axis rides through untouched. Speed lives in neither harmonic — it rides in the residual and gets knocked about, but nothing cancels it. That is also why the collapse bottoms out precisely at t = 0.5.</a:t>
+            </a:r>
+          </a:p>
+          <a:p/>
+          <a:p>
+            <a:r>
               <a:t>This is the concrete version of 'unnatural output': not noise, but a structured, physically impossible state.</a:t>
             </a:r>
           </a:p>
@@ -12518,41 +12498,17 @@
               </a:lnSpc>
             </a:pPr>
             <a:r>
-              <a:rPr sz="1200" b="0" i="0">
+              <a:rPr sz="1200" b="0">
                 <a:solidFill>
                   <a:srgbClr val="71757B"/>
                 </a:solidFill>
                 <a:latin typeface="Avenir Next"/>
               </a:rPr>
-              <a:t>Reading three probes at the midpoint of the linear direction chord. Run on the clips where theta and speed are decorrelated, so the speed probe is clean.</a:t>
-            </a:r>
-          </a:p>
-        </p:txBody>
-      </p:sp>
-      <p:pic>
-        <p:nvPicPr>
-          <p:cNvPr id="7" name="Picture 6" descr="ghost_state.png"/>
-          <p:cNvPicPr>
-            <a:picLocks noChangeAspect="1"/>
-          </p:cNvPicPr>
-          <p:nvPr/>
-        </p:nvPicPr>
-        <p:blipFill>
-          <a:blip r:embed="rId3"/>
-          <a:stretch>
-            <a:fillRect/>
-          </a:stretch>
-        </p:blipFill>
-        <p:spPr>
-          <a:xfrm>
-            <a:off x="3730046" y="2633472"/>
-            <a:ext cx="4731602" cy="2697480"/>
-          </a:xfrm>
-          <a:prstGeom prst="rect">
-            <a:avLst/>
-          </a:prstGeom>
-        </p:spPr>
-      </p:pic>
+              <a:t>Reading three probes at the midpoint (t = 0.5) of the linear direction chord. Run on the clips where theta and speed are decorrelated, so the speed probe is clean.</a:t>
+            </a:r>
+          </a:p>
+        </p:txBody>
+      </p:sp>
       <p:cxnSp>
         <p:nvCxnSpPr>
           <p:cNvPr id="8" name="Connector 7"/>
@@ -12612,13 +12568,13 @@
           <a:p>
             <a:pPr algn="l"/>
             <a:r>
-              <a:rPr sz="800" b="0" i="0" spc="120">
+              <a:rPr sz="800" b="0" spc="120">
                 <a:solidFill>
                   <a:srgbClr val="71757B"/>
                 </a:solidFill>
                 <a:latin typeface="Menlo"/>
               </a:rPr>
-              <a:t>SPEED</a:t>
+              <a:t>DIRECTION, M = 1</a:t>
             </a:r>
           </a:p>
         </p:txBody>
@@ -12647,13 +12603,13 @@
           <a:p>
             <a:pPr algn="l"/>
             <a:r>
-              <a:rPr sz="1500" b="1" i="0">
-                <a:solidFill>
-                  <a:srgbClr val="1E7A4E"/>
+              <a:rPr sz="1500" b="1">
+                <a:solidFill>
+                  <a:srgbClr val="B03A2E"/>
                 </a:solidFill>
                 <a:latin typeface="Menlo"/>
               </a:rPr>
-              <a:t>2.10 → 2.17 m/s</a:t>
+              <a:t>certainty 0.18</a:t>
             </a:r>
           </a:p>
         </p:txBody>
@@ -12682,13 +12638,13 @@
           <a:p>
             <a:pPr algn="l"/>
             <a:r>
-              <a:rPr sz="900" b="0" i="0">
+              <a:rPr sz="900" b="0">
                 <a:solidFill>
                   <a:srgbClr val="71757B"/>
                 </a:solidFill>
                 <a:latin typeface="Avenir Next"/>
               </a:rPr>
-              <a:t>untouched across the path</a:t>
+              <a:t>annihilated — zero information</a:t>
             </a:r>
           </a:p>
         </p:txBody>
@@ -12752,7 +12708,7 @@
           <a:p>
             <a:pPr algn="l"/>
             <a:r>
-              <a:rPr sz="800" b="0" i="0" spc="120">
+              <a:rPr sz="800" b="0" spc="120">
                 <a:solidFill>
                   <a:srgbClr val="71757B"/>
                 </a:solidFill>
@@ -12787,7 +12743,7 @@
           <a:p>
             <a:pPr algn="l"/>
             <a:r>
-              <a:rPr sz="1500" b="1" i="0">
+              <a:rPr sz="1500" b="1">
                 <a:solidFill>
                   <a:srgbClr val="1E7A4E"/>
                 </a:solidFill>
@@ -12822,7 +12778,7 @@
           <a:p>
             <a:pPr algn="l"/>
             <a:r>
-              <a:rPr sz="900" b="0" i="0">
+              <a:rPr sz="900" b="0">
                 <a:solidFill>
                   <a:srgbClr val="71757B"/>
                 </a:solidFill>
@@ -12892,13 +12848,13 @@
           <a:p>
             <a:pPr algn="l"/>
             <a:r>
-              <a:rPr sz="800" b="0" i="0" spc="120">
+              <a:rPr sz="800" b="0" spc="120">
                 <a:solidFill>
                   <a:srgbClr val="71757B"/>
                 </a:solidFill>
                 <a:latin typeface="Menlo"/>
               </a:rPr>
-              <a:t>DIRECTION, M = 1</a:t>
+              <a:t>SPEED</a:t>
             </a:r>
           </a:p>
         </p:txBody>
@@ -12927,13 +12883,13 @@
           <a:p>
             <a:pPr algn="l"/>
             <a:r>
-              <a:rPr sz="1500" b="1" i="0">
-                <a:solidFill>
-                  <a:srgbClr val="B03A2E"/>
+              <a:rPr sz="1500" b="1">
+                <a:solidFill>
+                  <a:srgbClr val="B87A00"/>
                 </a:solidFill>
                 <a:latin typeface="Menlo"/>
               </a:rPr>
-              <a:t>certainty 0.18</a:t>
+              <a:t>2.2× baseline</a:t>
             </a:r>
           </a:p>
         </p:txBody>
@@ -12962,13 +12918,13 @@
           <a:p>
             <a:pPr algn="l"/>
             <a:r>
-              <a:rPr sz="900" b="0" i="0">
+              <a:rPr sz="900" b="0">
                 <a:solidFill>
                   <a:srgbClr val="71757B"/>
                 </a:solidFill>
                 <a:latin typeface="Avenir Next"/>
               </a:rPr>
-              <a:t>annihilated — chance is 0</a:t>
+              <a:t>degraded, not untouched</a:t>
             </a:r>
           </a:p>
         </p:txBody>
@@ -13043,6 +12999,30 @@
           </a:p>
         </p:txBody>
       </p:sp>
+      <p:pic>
+        <p:nvPicPr>
+          <p:cNvPr id="22" name="Picture 21" descr="ghost_state.png"/>
+          <p:cNvPicPr>
+            <a:picLocks noChangeAspect="1"/>
+          </p:cNvPicPr>
+          <p:nvPr/>
+        </p:nvPicPr>
+        <p:blipFill>
+          <a:blip r:embed="rId4"/>
+          <a:stretch>
+            <a:fillRect/>
+          </a:stretch>
+        </p:blipFill>
+        <p:spPr>
+          <a:xfrm>
+            <a:off x="3752681" y="2633472"/>
+            <a:ext cx="4692734" cy="2697480"/>
+          </a:xfrm>
+          <a:prstGeom prst="rect">
+            <a:avLst/>
+          </a:prstGeom>
+        </p:spPr>
+      </p:pic>
     </p:spTree>
   </p:cSld>
   <p:clrMapOvr>

--- a/artifacts/deck/vjepa-direction-ring.pptx
+++ b/artifacts/deck/vjepa-direction-ring.pptx
@@ -6110,7 +6110,7 @@
                 </a:solidFill>
                 <a:latin typeface="Menlo"/>
               </a:rPr>
-              <a:t>F8  ·  F12  ·  F15</a:t>
+              <a:t>F8  ·  F14  ·  F15</a:t>
             </a:r>
           </a:p>
         </p:txBody>
@@ -9821,7 +9821,7 @@
                 </a:solidFill>
                 <a:latin typeface="Menlo"/>
               </a:rPr>
-              <a:t>F13</a:t>
+              <a:t>F10</a:t>
             </a:r>
           </a:p>
         </p:txBody>
@@ -10673,13 +10673,13 @@
           <a:p>
             <a:pPr algn="r"/>
             <a:r>
-              <a:rPr sz="900" b="0" i="0" spc="100">
+              <a:rPr sz="900" b="0" spc="100">
                 <a:solidFill>
                   <a:srgbClr val="71757B"/>
                 </a:solidFill>
                 <a:latin typeface="Menlo"/>
               </a:rPr>
-              <a:t>F8  ·  F8b</a:t>
+              <a:t>F8  ·  F8b  ·  F8c</a:t>
             </a:r>
           </a:p>
         </p:txBody>
@@ -10749,7 +10749,7 @@
                 </a:solidFill>
                 <a:latin typeface="Futura"/>
               </a:rPr>
-              <a:t>Steering direction needs a coordinated subspace</a:t>
+              <a:t>Steering rotates the code — but needs a subspace</a:t>
             </a:r>
           </a:p>
         </p:txBody>
@@ -11537,7 +11537,7 @@
                 </a:solidFill>
                 <a:latin typeface="Menlo"/>
               </a:rPr>
-              <a:t>F11  ·  F12</a:t>
+              <a:t>F13  ·  F14</a:t>
             </a:r>
           </a:p>
         </p:txBody>
@@ -12395,7 +12395,7 @@
                 </a:solidFill>
                 <a:latin typeface="Menlo"/>
               </a:rPr>
-              <a:t>F12b</a:t>
+              <a:t>F14b</a:t>
             </a:r>
           </a:p>
         </p:txBody>
@@ -13113,7 +13113,7 @@
                 </a:solidFill>
                 <a:latin typeface="Menlo"/>
               </a:rPr>
-              <a:t>F14</a:t>
+              <a:t>F11</a:t>
             </a:r>
           </a:p>
         </p:txBody>
@@ -13965,13 +13965,13 @@
           <a:p>
             <a:pPr algn="r"/>
             <a:r>
-              <a:rPr sz="900" b="0" i="0" spc="100">
+              <a:rPr sz="900" b="0" spc="100">
                 <a:solidFill>
                   <a:srgbClr val="71757B"/>
                 </a:solidFill>
                 <a:latin typeface="Menlo"/>
               </a:rPr>
-              <a:t>F15  ·  F10</a:t>
+              <a:t>F15  ·  F18</a:t>
             </a:r>
           </a:p>
         </p:txBody>

--- a/artifacts/deck/vjepa-direction-ring.pptx
+++ b/artifacts/deck/vjepa-direction-ring.pptx
@@ -1453,13 +1453,13 @@
           <a:p/>
           <a:p>
             <a:r>
-              <a:t>THE RESULT. Unsteered, the forecast encodes the clip's own direction at 6.5 degrees, so the forecast is readable — the experiment needs that. Multi-probe steering closes 7 PERCENT of the gap: the forecast still encodes the ORIGINAL motion, alignment 0.83. The model goes on predicting the motion it was always going to predict. The spline closes 95 PERCENT — the forecast now encodes the TARGET at alignment 0.96, no longer the original, and certainty rises to 0.999.</a:t>
+              <a:t>THE RESULT. Unsteered, the forecast encodes the clip's own direction at 6.5 degrees, so the forecast is readable — the experiment needs that. Multi-probe steering closes 6.6 PERCENT of the gap: the forecast still encodes the ORIGINAL motion, alignment 0.83. The model goes on predicting the motion it was always going to predict. The spline closes 89 PERCENT — the forecast now encodes the TARGET at alignment 0.96, no longer the original, and certainty rises to 0.999.</a:t>
             </a:r>
           </a:p>
           <a:p/>
           <a:p>
             <a:r>
-              <a:t>MAGNITUDE CONTROL, right panel. Scaling the Euclidean edit does help here, unlike retention on the previous slide where bigger was worse. But at MATCHED perturbation norm it reaches 41 percent against the spline's 95 — a 2.2 times difference in behavioural effect.</a:t>
+              <a:t>MAGNITUDE CONTROL, right panel. Scaling the Euclidean edit does help here, unlike retention on the previous slide where bigger was worse. But at MATCHED perturbation norm it reaches 38 percent against the spline's 89 — a 2.3 times difference in behavioural effect.</a:t>
             </a:r>
           </a:p>
           <a:p/>
@@ -1478,6 +1478,12 @@
           <a:p>
             <a:r>
               <a:t>The previous slide's retention result — 76 against 25 percent — still stands and is about preservation. This one is different in kind: it is about what the model does next.</a:t>
+            </a:r>
+          </a:p>
+          <a:p/>
+          <a:p>
+            <a:r>
+              <a:t>IF ASKED ABOUT THE CEILING: it is the control arm itself — the same probe, the same held-out-value test clips, reading each clip's OWN label, at 6.5 degrees. An earlier draft quoted 11.1, which came from the alpha-selection fold on train values and was not comparable. Correcting it moves the spline from 95 percent of the gap to 89. The finding does not change; the arithmetic is now consistent.</a:t>
             </a:r>
           </a:p>
         </p:txBody>
@@ -6104,13 +6110,13 @@
           <a:p>
             <a:pPr algn="r"/>
             <a:r>
-              <a:rPr sz="900" b="0" i="0" spc="100">
+              <a:rPr sz="900" b="0" spc="100">
                 <a:solidFill>
                   <a:srgbClr val="71757B"/>
                 </a:solidFill>
                 <a:latin typeface="Menlo"/>
               </a:rPr>
-              <a:t>F8  ·  F14  ·  F15</a:t>
+              <a:t>F8  ·  F14  ·  F15  ·  F18</a:t>
             </a:r>
           </a:p>
         </p:txBody>
@@ -6461,6 +6467,79 @@
                           <a:latin typeface="Avenir Next"/>
                         </a:rPr>
                         <a:t>76%</a:t>
+                      </a:r>
+                    </a:p>
+                  </a:txBody>
+                  <a:tcPr marL="128016" marT="54864" marB="54864" anchor="ctr">
+                    <a:solidFill>
+                      <a:srgbClr val="FFFFFF"/>
+                    </a:solidFill>
+                  </a:tcPr>
+                </a:tc>
+                <a:extLst>
+                  <a:ext uri="{0D108BD9-81ED-4DB2-BD59-A6C34878D82A}">
+                    <a16:rowId xmlns:a16="http://schemas.microsoft.com/office/drawing/2014/main" val="10002"/>
+                  </a:ext>
+                </a:extLst>
+              </a:tr>
+              <a:tr h="391885">
+                <a:tc>
+                  <a:txBody>
+                    <a:bodyPr/>
+                    <a:lstStyle/>
+                    <a:p>
+                      <a:r>
+                        <a:rPr sz="1050" b="1">
+                          <a:solidFill>
+                            <a:srgbClr val="17191C"/>
+                          </a:solidFill>
+                          <a:latin typeface="Avenir Next"/>
+                        </a:rPr>
+                        <a:t>changes the forecast</a:t>
+                      </a:r>
+                    </a:p>
+                  </a:txBody>
+                  <a:tcPr marL="128016" marT="54864" marB="54864" anchor="ctr">
+                    <a:solidFill>
+                      <a:srgbClr val="FFFFFF"/>
+                    </a:solidFill>
+                  </a:tcPr>
+                </a:tc>
+                <a:tc>
+                  <a:txBody>
+                    <a:bodyPr/>
+                    <a:lstStyle/>
+                    <a:p>
+                      <a:r>
+                        <a:rPr sz="1050" b="0">
+                          <a:solidFill>
+                            <a:srgbClr val="B03A2E"/>
+                          </a:solidFill>
+                          <a:latin typeface="Avenir Next"/>
+                        </a:rPr>
+                        <a:t>7% of the gap</a:t>
+                      </a:r>
+                    </a:p>
+                  </a:txBody>
+                  <a:tcPr marL="128016" marT="54864" marB="54864" anchor="ctr">
+                    <a:solidFill>
+                      <a:srgbClr val="FFFFFF"/>
+                    </a:solidFill>
+                  </a:tcPr>
+                </a:tc>
+                <a:tc>
+                  <a:txBody>
+                    <a:bodyPr/>
+                    <a:lstStyle/>
+                    <a:p>
+                      <a:r>
+                        <a:rPr sz="1050" b="0">
+                          <a:solidFill>
+                            <a:srgbClr val="1E7A4E"/>
+                          </a:solidFill>
+                          <a:latin typeface="Avenir Next"/>
+                        </a:rPr>
+                        <a:t>89%</a:t>
                       </a:r>
                     </a:p>
                   </a:txBody>
@@ -14360,7 +14439,7 @@
                 </a:solidFill>
                 <a:latin typeface="Avenir Next"/>
               </a:rPr>
-              <a:t>7% of the gap closed</a:t>
+              <a:t>6.6% of the gap closed</a:t>
             </a:r>
           </a:p>
         </p:txBody>
@@ -14500,7 +14579,7 @@
                 </a:solidFill>
                 <a:latin typeface="Avenir Next"/>
               </a:rPr>
-              <a:t>95% — ceiling is 11.1°</a:t>
+              <a:t>89% — ceiling is 6.5°</a:t>
             </a:r>
           </a:p>
         </p:txBody>
@@ -14605,7 +14684,7 @@
                 </a:solidFill>
                 <a:latin typeface="Menlo"/>
               </a:rPr>
-              <a:t>41% vs 95%</a:t>
+              <a:t>38% vs 89%</a:t>
             </a:r>
           </a:p>
         </p:txBody>
@@ -14724,7 +14803,7 @@
           <p:nvPr/>
         </p:nvPicPr>
         <p:blipFill>
-          <a:blip r:embed="rId4"/>
+          <a:blip r:embed="rId5"/>
           <a:stretch>
             <a:fillRect/>
           </a:stretch>
